--- a/Salkicic_Nukic_Halilbasic.pptx
+++ b/Salkicic_Nukic_Halilbasic.pptx
@@ -8684,7 +8684,7 @@
               <a:buNone/>
             </a:pPr>
             <a:r>
-              <a:rPr lang="en-US" sz="2600" b="1" dirty="0">
+              <a:rPr lang="bs-Latn-BA" sz="2600" b="1" dirty="0" err="1">
                 <a:solidFill>
                   <a:srgbClr val="FFFFFF"/>
                 </a:solidFill>
@@ -8692,7 +8692,18 @@
                 <a:ea typeface="Times New Roman" pitchFamily="34" charset="-122"/>
                 <a:cs typeface="Times New Roman" pitchFamily="34" charset="-120"/>
               </a:rPr>
-              <a:t>[Naslov vašeg postera ide ovdje]</a:t>
+              <a:t>Airbnb</a:t>
+            </a:r>
+            <a:r>
+              <a:rPr lang="bs-Latn-BA" sz="2600" b="1" dirty="0">
+                <a:solidFill>
+                  <a:srgbClr val="FFFFFF"/>
+                </a:solidFill>
+                <a:latin typeface="Times New Roman" pitchFamily="34" charset="0"/>
+                <a:ea typeface="Times New Roman" pitchFamily="34" charset="-122"/>
+                <a:cs typeface="Times New Roman" pitchFamily="34" charset="-120"/>
+              </a:rPr>
+              <a:t> cjenovni obrasci u mediteranskim gradovima</a:t>
             </a:r>
             <a:endParaRPr lang="en-US" sz="2600" dirty="0"/>
           </a:p>
@@ -8726,6 +8737,39 @@
           <a:lstStyle/>
           <a:p>
             <a:r>
+              <a:rPr lang="bs-Latn-BA" sz="1000" i="1" dirty="0">
+                <a:solidFill>
+                  <a:srgbClr val="CBD5E1"/>
+                </a:solidFill>
+                <a:latin typeface="Times New Roman" pitchFamily="34" charset="0"/>
+                <a:ea typeface="Times New Roman" pitchFamily="34" charset="-122"/>
+                <a:cs typeface="Times New Roman" pitchFamily="34" charset="-120"/>
+              </a:rPr>
+              <a:t>Ajnur </a:t>
+            </a:r>
+            <a:r>
+              <a:rPr lang="bs-Latn-BA" sz="1000" i="1" dirty="0" err="1">
+                <a:solidFill>
+                  <a:srgbClr val="CBD5E1"/>
+                </a:solidFill>
+                <a:latin typeface="Times New Roman" pitchFamily="34" charset="0"/>
+                <a:ea typeface="Times New Roman" pitchFamily="34" charset="-122"/>
+                <a:cs typeface="Times New Roman" pitchFamily="34" charset="-120"/>
+              </a:rPr>
+              <a:t>Nukić</a:t>
+            </a:r>
+            <a:r>
+              <a:rPr lang="bs-Latn-BA" sz="1000" i="1" dirty="0">
+                <a:solidFill>
+                  <a:srgbClr val="CBD5E1"/>
+                </a:solidFill>
+                <a:latin typeface="Times New Roman" pitchFamily="34" charset="0"/>
+                <a:ea typeface="Times New Roman" pitchFamily="34" charset="-122"/>
+                <a:cs typeface="Times New Roman" pitchFamily="34" charset="-120"/>
+              </a:rPr>
+              <a:t> (ajnur.nukic2002@gmail.com) </a:t>
+            </a:r>
+            <a:r>
               <a:rPr lang="en-US" sz="1000" i="1" dirty="0">
                 <a:solidFill>
                   <a:srgbClr val="CBD5E1"/>
@@ -8734,7 +8778,84 @@
                 <a:ea typeface="Times New Roman" pitchFamily="34" charset="-122"/>
                 <a:cs typeface="Times New Roman" pitchFamily="34" charset="-120"/>
               </a:rPr>
-              <a:t>Autor 1 (email)  |  Autor 2 (email)  |  Autor 3 (email)</a:t>
+              <a:t>|  </a:t>
+            </a:r>
+            <a:r>
+              <a:rPr lang="bs-Latn-BA" sz="1000" i="1" dirty="0">
+                <a:solidFill>
+                  <a:srgbClr val="CBD5E1"/>
+                </a:solidFill>
+                <a:latin typeface="Times New Roman" pitchFamily="34" charset="0"/>
+                <a:ea typeface="Times New Roman" pitchFamily="34" charset="-122"/>
+                <a:cs typeface="Times New Roman" pitchFamily="34" charset="-120"/>
+              </a:rPr>
+              <a:t>Belma </a:t>
+            </a:r>
+            <a:r>
+              <a:rPr lang="bs-Latn-BA" sz="1000" i="1" dirty="0" err="1">
+                <a:solidFill>
+                  <a:srgbClr val="CBD5E1"/>
+                </a:solidFill>
+                <a:latin typeface="Times New Roman" pitchFamily="34" charset="0"/>
+                <a:ea typeface="Times New Roman" pitchFamily="34" charset="-122"/>
+                <a:cs typeface="Times New Roman" pitchFamily="34" charset="-120"/>
+              </a:rPr>
+              <a:t>Salkičić</a:t>
+            </a:r>
+            <a:r>
+              <a:rPr lang="en-US" sz="1000" i="1" dirty="0">
+                <a:solidFill>
+                  <a:srgbClr val="CBD5E1"/>
+                </a:solidFill>
+                <a:latin typeface="Times New Roman" pitchFamily="34" charset="0"/>
+                <a:ea typeface="Times New Roman" pitchFamily="34" charset="-122"/>
+                <a:cs typeface="Times New Roman" pitchFamily="34" charset="-120"/>
+              </a:rPr>
+              <a:t>(belma7salkicic@gmail.com)  |  </a:t>
+            </a:r>
+            <a:r>
+              <a:rPr lang="bs-Latn-BA" sz="1000" i="1" dirty="0" err="1">
+                <a:solidFill>
+                  <a:srgbClr val="CBD5E1"/>
+                </a:solidFill>
+                <a:latin typeface="Times New Roman" pitchFamily="34" charset="0"/>
+                <a:ea typeface="Times New Roman" pitchFamily="34" charset="-122"/>
+                <a:cs typeface="Times New Roman" pitchFamily="34" charset="-120"/>
+              </a:rPr>
+              <a:t>Demir</a:t>
+            </a:r>
+            <a:r>
+              <a:rPr lang="bs-Latn-BA" sz="1000" i="1" dirty="0">
+                <a:solidFill>
+                  <a:srgbClr val="CBD5E1"/>
+                </a:solidFill>
+                <a:latin typeface="Times New Roman" pitchFamily="34" charset="0"/>
+                <a:ea typeface="Times New Roman" pitchFamily="34" charset="-122"/>
+                <a:cs typeface="Times New Roman" pitchFamily="34" charset="-120"/>
+              </a:rPr>
+              <a:t> </a:t>
+            </a:r>
+            <a:r>
+              <a:rPr lang="bs-Latn-BA" sz="1000" i="1" dirty="0" err="1">
+                <a:solidFill>
+                  <a:srgbClr val="CBD5E1"/>
+                </a:solidFill>
+                <a:latin typeface="Times New Roman" pitchFamily="34" charset="0"/>
+                <a:ea typeface="Times New Roman" pitchFamily="34" charset="-122"/>
+                <a:cs typeface="Times New Roman" pitchFamily="34" charset="-120"/>
+              </a:rPr>
+              <a:t>Halilbašić</a:t>
+            </a:r>
+            <a:r>
+              <a:rPr lang="en-US" sz="1000" i="1" dirty="0">
+                <a:solidFill>
+                  <a:srgbClr val="CBD5E1"/>
+                </a:solidFill>
+                <a:latin typeface="Times New Roman" pitchFamily="34" charset="0"/>
+                <a:ea typeface="Times New Roman" pitchFamily="34" charset="-122"/>
+                <a:cs typeface="Times New Roman" pitchFamily="34" charset="-120"/>
+              </a:rPr>
+              <a:t> (demirhalilbasic@gmail.com)</a:t>
             </a:r>
             <a:endParaRPr lang="en-US" sz="1000" dirty="0"/>
           </a:p>
@@ -8755,7 +8876,7 @@
         <p:spPr>
           <a:xfrm>
             <a:off x="160020" y="2788920"/>
-            <a:ext cx="5104638" cy="1554480"/>
+            <a:ext cx="5104638" cy="2148840"/>
           </a:xfrm>
           <a:prstGeom prst="rect">
             <a:avLst/>
@@ -8904,8 +9025,8 @@
         </p:nvSpPr>
         <p:spPr>
           <a:xfrm>
-            <a:off x="297180" y="3383280"/>
-            <a:ext cx="4830318" cy="841248"/>
+            <a:off x="297180" y="3383279"/>
+            <a:ext cx="4830318" cy="1483993"/>
           </a:xfrm>
           <a:prstGeom prst="rect">
             <a:avLst/>
@@ -8918,221 +9039,66 @@
           <a:lstStyle/>
           <a:p>
             <a:r>
-              <a:rPr lang="pl-PL" sz="1200" i="1" dirty="0">
-                <a:solidFill>
-                  <a:srgbClr val="9CA3AF"/>
-                </a:solidFill>
-                <a:latin typeface="Times New Roman" pitchFamily="34" charset="0"/>
-                <a:ea typeface="Times New Roman" pitchFamily="34" charset="-122"/>
-                <a:cs typeface="Times New Roman" pitchFamily="34" charset="-120"/>
-              </a:rPr>
-              <a:t>Napišite 3–5 rečenica. Ukratko opišite temu, podatke, metodu i ključni nalaz.</a:t>
-            </a:r>
-            <a:endParaRPr lang="en-US" sz="1200" i="1" dirty="0">
-              <a:solidFill>
-                <a:srgbClr val="9CA3AF"/>
-              </a:solidFill>
-              <a:latin typeface="Times New Roman" pitchFamily="34" charset="0"/>
-              <a:ea typeface="Times New Roman" pitchFamily="34" charset="-122"/>
-              <a:cs typeface="Times New Roman" pitchFamily="34" charset="-120"/>
+              <a:rPr lang="bs-Latn-BA" sz="1200" dirty="0" err="1">
+                <a:latin typeface="Times New Roman" panose="02020603050405020304" pitchFamily="18" charset="0"/>
+                <a:cs typeface="Times New Roman" panose="02020603050405020304" pitchFamily="18" charset="0"/>
+              </a:rPr>
+              <a:t>Istraživanje</a:t>
+            </a:r>
+            <a:r>
+              <a:rPr lang="bs-Latn-BA" sz="1200" dirty="0">
+                <a:latin typeface="Times New Roman" panose="02020603050405020304" pitchFamily="18" charset="0"/>
+                <a:cs typeface="Times New Roman" panose="02020603050405020304" pitchFamily="18" charset="0"/>
+              </a:rPr>
+              <a:t> analizira faktore koji određuju cijenu </a:t>
+            </a:r>
+            <a:r>
+              <a:rPr lang="bs-Latn-BA" sz="1200" dirty="0" err="1">
+                <a:latin typeface="Times New Roman" panose="02020603050405020304" pitchFamily="18" charset="0"/>
+                <a:cs typeface="Times New Roman" panose="02020603050405020304" pitchFamily="18" charset="0"/>
+              </a:rPr>
+              <a:t>Airbnb</a:t>
+            </a:r>
+            <a:r>
+              <a:rPr lang="bs-Latn-BA" sz="1200" dirty="0">
+                <a:latin typeface="Times New Roman" panose="02020603050405020304" pitchFamily="18" charset="0"/>
+                <a:cs typeface="Times New Roman" panose="02020603050405020304" pitchFamily="18" charset="0"/>
+              </a:rPr>
+              <a:t> smještaja u šest mediteranskih gradova na uzorku od 91.301 oglasa. Primijenjeni su regresijski modeli, </a:t>
+            </a:r>
+            <a:r>
+              <a:rPr lang="bs-Latn-BA" sz="1200" dirty="0" err="1">
+                <a:latin typeface="Times New Roman" panose="02020603050405020304" pitchFamily="18" charset="0"/>
+                <a:cs typeface="Times New Roman" panose="02020603050405020304" pitchFamily="18" charset="0"/>
+              </a:rPr>
+              <a:t>geospacijalna</a:t>
+            </a:r>
+            <a:r>
+              <a:rPr lang="bs-Latn-BA" sz="1200" dirty="0">
+                <a:latin typeface="Times New Roman" panose="02020603050405020304" pitchFamily="18" charset="0"/>
+                <a:cs typeface="Times New Roman" panose="02020603050405020304" pitchFamily="18" charset="0"/>
+              </a:rPr>
+              <a:t> analiza i </a:t>
+            </a:r>
+            <a:r>
+              <a:rPr lang="bs-Latn-BA" sz="1200" dirty="0" err="1">
+                <a:latin typeface="Times New Roman" panose="02020603050405020304" pitchFamily="18" charset="0"/>
+                <a:cs typeface="Times New Roman" panose="02020603050405020304" pitchFamily="18" charset="0"/>
+              </a:rPr>
+              <a:t>klasterizacija</a:t>
+            </a:r>
+            <a:r>
+              <a:rPr lang="bs-Latn-BA" sz="1200" dirty="0">
+                <a:latin typeface="Times New Roman" panose="02020603050405020304" pitchFamily="18" charset="0"/>
+                <a:cs typeface="Times New Roman" panose="02020603050405020304" pitchFamily="18" charset="0"/>
+              </a:rPr>
+              <a:t>. Tip smještaja pokazao se kao dominantniji cjenovni faktor od lokacije u pet od šest gradova. Rim je najskuplje tržište, a Atena i Istanbul nude najbolji omjer cijene i kvalitete.</a:t>
+            </a:r>
+            <a:endParaRPr lang="en-US" sz="1200" dirty="0">
+              <a:latin typeface="Times New Roman" panose="02020603050405020304" pitchFamily="18" charset="0"/>
+              <a:cs typeface="Times New Roman" panose="02020603050405020304" pitchFamily="18" charset="0"/>
             </a:endParaRPr>
           </a:p>
-          <a:p>
-            <a:endParaRPr lang="en-US" sz="1200" dirty="0"/>
-          </a:p>
-          <a:p>
-            <a:pPr marL="0" indent="0" algn="l">
-              <a:buNone/>
-            </a:pPr>
-            <a:r>
-              <a:rPr lang="en-US" sz="1200" i="1" dirty="0">
-                <a:solidFill>
-                  <a:srgbClr val="9CA3AF"/>
-                </a:solidFill>
-                <a:latin typeface="Times New Roman" pitchFamily="34" charset="0"/>
-                <a:ea typeface="Times New Roman" pitchFamily="34" charset="-122"/>
-                <a:cs typeface="Times New Roman" pitchFamily="34" charset="-120"/>
-              </a:rPr>
-              <a:t>✎  </a:t>
-            </a:r>
-            <a:r>
-              <a:rPr lang="en-US" sz="1200" i="1" dirty="0" err="1">
-                <a:solidFill>
-                  <a:srgbClr val="9CA3AF"/>
-                </a:solidFill>
-                <a:latin typeface="Times New Roman" pitchFamily="34" charset="0"/>
-                <a:ea typeface="Times New Roman" pitchFamily="34" charset="-122"/>
-                <a:cs typeface="Times New Roman" pitchFamily="34" charset="-120"/>
-              </a:rPr>
-              <a:t>Savjet</a:t>
-            </a:r>
-            <a:r>
-              <a:rPr lang="en-US" sz="1200" i="1" dirty="0">
-                <a:solidFill>
-                  <a:srgbClr val="9CA3AF"/>
-                </a:solidFill>
-                <a:latin typeface="Times New Roman" pitchFamily="34" charset="0"/>
-                <a:ea typeface="Times New Roman" pitchFamily="34" charset="-122"/>
-                <a:cs typeface="Times New Roman" pitchFamily="34" charset="-120"/>
-              </a:rPr>
-              <a:t>: </a:t>
-            </a:r>
-            <a:r>
-              <a:rPr lang="en-US" sz="1200" i="1" dirty="0" err="1">
-                <a:solidFill>
-                  <a:srgbClr val="9CA3AF"/>
-                </a:solidFill>
-                <a:latin typeface="Times New Roman" pitchFamily="34" charset="0"/>
-                <a:ea typeface="Times New Roman" pitchFamily="34" charset="-122"/>
-                <a:cs typeface="Times New Roman" pitchFamily="34" charset="-120"/>
-              </a:rPr>
-              <a:t>Sažetak</a:t>
-            </a:r>
-            <a:r>
-              <a:rPr lang="en-US" sz="1200" i="1" dirty="0">
-                <a:solidFill>
-                  <a:srgbClr val="9CA3AF"/>
-                </a:solidFill>
-                <a:latin typeface="Times New Roman" pitchFamily="34" charset="0"/>
-                <a:ea typeface="Times New Roman" pitchFamily="34" charset="-122"/>
-                <a:cs typeface="Times New Roman" pitchFamily="34" charset="-120"/>
-              </a:rPr>
-              <a:t> </a:t>
-            </a:r>
-            <a:r>
-              <a:rPr lang="en-US" sz="1200" i="1" dirty="0" err="1">
-                <a:solidFill>
-                  <a:srgbClr val="9CA3AF"/>
-                </a:solidFill>
-                <a:latin typeface="Times New Roman" pitchFamily="34" charset="0"/>
-                <a:ea typeface="Times New Roman" pitchFamily="34" charset="-122"/>
-                <a:cs typeface="Times New Roman" pitchFamily="34" charset="-120"/>
-              </a:rPr>
-              <a:t>pišite</a:t>
-            </a:r>
-            <a:r>
-              <a:rPr lang="en-US" sz="1200" i="1" dirty="0">
-                <a:solidFill>
-                  <a:srgbClr val="9CA3AF"/>
-                </a:solidFill>
-                <a:latin typeface="Times New Roman" pitchFamily="34" charset="0"/>
-                <a:ea typeface="Times New Roman" pitchFamily="34" charset="-122"/>
-                <a:cs typeface="Times New Roman" pitchFamily="34" charset="-120"/>
-              </a:rPr>
-              <a:t> NA KRAJU, </a:t>
-            </a:r>
-            <a:r>
-              <a:rPr lang="en-US" sz="1200" i="1" dirty="0" err="1">
-                <a:solidFill>
-                  <a:srgbClr val="9CA3AF"/>
-                </a:solidFill>
-                <a:latin typeface="Times New Roman" pitchFamily="34" charset="0"/>
-                <a:ea typeface="Times New Roman" pitchFamily="34" charset="-122"/>
-                <a:cs typeface="Times New Roman" pitchFamily="34" charset="-120"/>
-              </a:rPr>
-              <a:t>kada</a:t>
-            </a:r>
-            <a:r>
-              <a:rPr lang="en-US" sz="1200" i="1" dirty="0">
-                <a:solidFill>
-                  <a:srgbClr val="9CA3AF"/>
-                </a:solidFill>
-                <a:latin typeface="Times New Roman" pitchFamily="34" charset="0"/>
-                <a:ea typeface="Times New Roman" pitchFamily="34" charset="-122"/>
-                <a:cs typeface="Times New Roman" pitchFamily="34" charset="-120"/>
-              </a:rPr>
-              <a:t> </a:t>
-            </a:r>
-            <a:r>
-              <a:rPr lang="en-US" sz="1200" i="1" dirty="0" err="1">
-                <a:solidFill>
-                  <a:srgbClr val="9CA3AF"/>
-                </a:solidFill>
-                <a:latin typeface="Times New Roman" pitchFamily="34" charset="0"/>
-                <a:ea typeface="Times New Roman" pitchFamily="34" charset="-122"/>
-                <a:cs typeface="Times New Roman" pitchFamily="34" charset="-120"/>
-              </a:rPr>
-              <a:t>završite</a:t>
-            </a:r>
-            <a:r>
-              <a:rPr lang="en-US" sz="1200" i="1" dirty="0">
-                <a:solidFill>
-                  <a:srgbClr val="9CA3AF"/>
-                </a:solidFill>
-                <a:latin typeface="Times New Roman" pitchFamily="34" charset="0"/>
-                <a:ea typeface="Times New Roman" pitchFamily="34" charset="-122"/>
-                <a:cs typeface="Times New Roman" pitchFamily="34" charset="-120"/>
-              </a:rPr>
-              <a:t> </a:t>
-            </a:r>
-            <a:r>
-              <a:rPr lang="en-US" sz="1200" i="1" dirty="0" err="1">
-                <a:solidFill>
-                  <a:srgbClr val="9CA3AF"/>
-                </a:solidFill>
-                <a:latin typeface="Times New Roman" pitchFamily="34" charset="0"/>
-                <a:ea typeface="Times New Roman" pitchFamily="34" charset="-122"/>
-                <a:cs typeface="Times New Roman" pitchFamily="34" charset="-120"/>
-              </a:rPr>
-              <a:t>sve</a:t>
-            </a:r>
-            <a:r>
-              <a:rPr lang="en-US" sz="1200" i="1" dirty="0">
-                <a:solidFill>
-                  <a:srgbClr val="9CA3AF"/>
-                </a:solidFill>
-                <a:latin typeface="Times New Roman" pitchFamily="34" charset="0"/>
-                <a:ea typeface="Times New Roman" pitchFamily="34" charset="-122"/>
-                <a:cs typeface="Times New Roman" pitchFamily="34" charset="-120"/>
-              </a:rPr>
-              <a:t> </a:t>
-            </a:r>
-            <a:r>
-              <a:rPr lang="en-US" sz="1200" i="1" dirty="0" err="1">
-                <a:solidFill>
-                  <a:srgbClr val="9CA3AF"/>
-                </a:solidFill>
-                <a:latin typeface="Times New Roman" pitchFamily="34" charset="0"/>
-                <a:ea typeface="Times New Roman" pitchFamily="34" charset="-122"/>
-                <a:cs typeface="Times New Roman" pitchFamily="34" charset="-120"/>
-              </a:rPr>
-              <a:t>ostale</a:t>
-            </a:r>
-            <a:r>
-              <a:rPr lang="en-US" sz="1200" i="1" dirty="0">
-                <a:solidFill>
-                  <a:srgbClr val="9CA3AF"/>
-                </a:solidFill>
-                <a:latin typeface="Times New Roman" pitchFamily="34" charset="0"/>
-                <a:ea typeface="Times New Roman" pitchFamily="34" charset="-122"/>
-                <a:cs typeface="Times New Roman" pitchFamily="34" charset="-120"/>
-              </a:rPr>
-              <a:t> </a:t>
-            </a:r>
-            <a:r>
-              <a:rPr lang="en-US" sz="1200" i="1" dirty="0" err="1">
-                <a:solidFill>
-                  <a:srgbClr val="9CA3AF"/>
-                </a:solidFill>
-                <a:latin typeface="Times New Roman" pitchFamily="34" charset="0"/>
-                <a:ea typeface="Times New Roman" pitchFamily="34" charset="-122"/>
-                <a:cs typeface="Times New Roman" pitchFamily="34" charset="-120"/>
-              </a:rPr>
-              <a:t>sekcije</a:t>
-            </a:r>
-            <a:r>
-              <a:rPr lang="en-US" sz="1200" i="1" dirty="0">
-                <a:solidFill>
-                  <a:srgbClr val="9CA3AF"/>
-                </a:solidFill>
-                <a:latin typeface="Times New Roman" pitchFamily="34" charset="0"/>
-                <a:ea typeface="Times New Roman" pitchFamily="34" charset="-122"/>
-                <a:cs typeface="Times New Roman" pitchFamily="34" charset="-120"/>
-              </a:rPr>
-              <a:t>.</a:t>
-            </a:r>
-            <a:endParaRPr lang="en-US" sz="1200" dirty="0"/>
-          </a:p>
         </p:txBody>
       </p:sp>
       <p:sp>
@@ -9149,8 +9115,8 @@
         </p:nvSpPr>
         <p:spPr>
           <a:xfrm>
-            <a:off x="160020" y="4507992"/>
-            <a:ext cx="5104638" cy="1920240"/>
+            <a:off x="160020" y="5124768"/>
+            <a:ext cx="5104638" cy="2226942"/>
           </a:xfrm>
           <a:prstGeom prst="rect">
             <a:avLst/>
@@ -9187,7 +9153,7 @@
         </p:nvSpPr>
         <p:spPr>
           <a:xfrm>
-            <a:off x="160020" y="4507992"/>
+            <a:off x="159322" y="5134736"/>
             <a:ext cx="5104638" cy="109728"/>
           </a:xfrm>
           <a:prstGeom prst="rect">
@@ -9218,7 +9184,7 @@
         </p:nvSpPr>
         <p:spPr>
           <a:xfrm>
-            <a:off x="297180" y="4654296"/>
+            <a:off x="297180" y="5255892"/>
             <a:ext cx="4830318" cy="347472"/>
           </a:xfrm>
           <a:prstGeom prst="rect">
@@ -9263,7 +9229,7 @@
         </p:nvSpPr>
         <p:spPr>
           <a:xfrm>
-            <a:off x="297180" y="5038344"/>
+            <a:off x="297180" y="5622033"/>
             <a:ext cx="4830318" cy="0"/>
           </a:xfrm>
           <a:prstGeom prst="line">
@@ -9277,6 +9243,13 @@
             <a:prstDash val="solid"/>
           </a:ln>
         </p:spPr>
+        <p:txBody>
+          <a:bodyPr/>
+          <a:lstStyle/>
+          <a:p>
+            <a:endParaRPr lang="bs-Latn-BA" dirty="0"/>
+          </a:p>
+        </p:txBody>
       </p:sp>
       <p:sp>
         <p:nvSpPr>
@@ -9292,8 +9265,8 @@
         </p:nvSpPr>
         <p:spPr>
           <a:xfrm>
-            <a:off x="297180" y="5102352"/>
-            <a:ext cx="4830318" cy="1207008"/>
+            <a:off x="297180" y="5779008"/>
+            <a:ext cx="4830318" cy="1469514"/>
           </a:xfrm>
           <a:prstGeom prst="rect">
             <a:avLst/>
@@ -9306,283 +9279,44 @@
           <a:lstStyle/>
           <a:p>
             <a:r>
-              <a:rPr lang="en-US" sz="1200" i="1" dirty="0">
-                <a:solidFill>
-                  <a:srgbClr val="9CA3AF"/>
-                </a:solidFill>
-                <a:latin typeface="Times New Roman" pitchFamily="34" charset="0"/>
-                <a:ea typeface="Times New Roman" pitchFamily="34" charset="-122"/>
-                <a:cs typeface="Times New Roman" pitchFamily="34" charset="-120"/>
-              </a:rPr>
-              <a:t>Koji problem </a:t>
-            </a:r>
-            <a:r>
-              <a:rPr lang="en-US" sz="1200" i="1" dirty="0" err="1">
-                <a:solidFill>
-                  <a:srgbClr val="9CA3AF"/>
-                </a:solidFill>
-                <a:latin typeface="Times New Roman" pitchFamily="34" charset="0"/>
-                <a:ea typeface="Times New Roman" pitchFamily="34" charset="-122"/>
-                <a:cs typeface="Times New Roman" pitchFamily="34" charset="-120"/>
-              </a:rPr>
-              <a:t>istražujete</a:t>
-            </a:r>
-            <a:r>
-              <a:rPr lang="en-US" sz="1200" i="1" dirty="0">
-                <a:solidFill>
-                  <a:srgbClr val="9CA3AF"/>
-                </a:solidFill>
-                <a:latin typeface="Times New Roman" pitchFamily="34" charset="0"/>
-                <a:ea typeface="Times New Roman" pitchFamily="34" charset="-122"/>
-                <a:cs typeface="Times New Roman" pitchFamily="34" charset="-120"/>
-              </a:rPr>
-              <a:t> </a:t>
-            </a:r>
-            <a:r>
-              <a:rPr lang="en-US" sz="1200" i="1" dirty="0" err="1">
-                <a:solidFill>
-                  <a:srgbClr val="9CA3AF"/>
-                </a:solidFill>
-                <a:latin typeface="Times New Roman" pitchFamily="34" charset="0"/>
-                <a:ea typeface="Times New Roman" pitchFamily="34" charset="-122"/>
-                <a:cs typeface="Times New Roman" pitchFamily="34" charset="-120"/>
-              </a:rPr>
-              <a:t>i</a:t>
-            </a:r>
-            <a:r>
-              <a:rPr lang="en-US" sz="1200" i="1" dirty="0">
-                <a:solidFill>
-                  <a:srgbClr val="9CA3AF"/>
-                </a:solidFill>
-                <a:latin typeface="Times New Roman" pitchFamily="34" charset="0"/>
-                <a:ea typeface="Times New Roman" pitchFamily="34" charset="-122"/>
-                <a:cs typeface="Times New Roman" pitchFamily="34" charset="-120"/>
-              </a:rPr>
-              <a:t> </a:t>
-            </a:r>
-            <a:r>
-              <a:rPr lang="en-US" sz="1200" i="1" dirty="0" err="1">
-                <a:solidFill>
-                  <a:srgbClr val="9CA3AF"/>
-                </a:solidFill>
-                <a:latin typeface="Times New Roman" pitchFamily="34" charset="0"/>
-                <a:ea typeface="Times New Roman" pitchFamily="34" charset="-122"/>
-                <a:cs typeface="Times New Roman" pitchFamily="34" charset="-120"/>
-              </a:rPr>
-              <a:t>zašto</a:t>
-            </a:r>
-            <a:r>
-              <a:rPr lang="en-US" sz="1200" i="1" dirty="0">
-                <a:solidFill>
-                  <a:srgbClr val="9CA3AF"/>
-                </a:solidFill>
-                <a:latin typeface="Times New Roman" pitchFamily="34" charset="0"/>
-                <a:ea typeface="Times New Roman" pitchFamily="34" charset="-122"/>
-                <a:cs typeface="Times New Roman" pitchFamily="34" charset="-120"/>
-              </a:rPr>
-              <a:t> je </a:t>
-            </a:r>
-            <a:r>
-              <a:rPr lang="en-US" sz="1200" i="1" dirty="0" err="1">
-                <a:solidFill>
-                  <a:srgbClr val="9CA3AF"/>
-                </a:solidFill>
-                <a:latin typeface="Times New Roman" pitchFamily="34" charset="0"/>
-                <a:ea typeface="Times New Roman" pitchFamily="34" charset="-122"/>
-                <a:cs typeface="Times New Roman" pitchFamily="34" charset="-120"/>
-              </a:rPr>
-              <a:t>važan</a:t>
-            </a:r>
-            <a:r>
-              <a:rPr lang="en-US" sz="1200" i="1" dirty="0">
-                <a:solidFill>
-                  <a:srgbClr val="9CA3AF"/>
-                </a:solidFill>
-                <a:latin typeface="Times New Roman" pitchFamily="34" charset="0"/>
-                <a:ea typeface="Times New Roman" pitchFamily="34" charset="-122"/>
-                <a:cs typeface="Times New Roman" pitchFamily="34" charset="-120"/>
-              </a:rPr>
-              <a:t>?</a:t>
-            </a:r>
-          </a:p>
-          <a:p>
-            <a:r>
-              <a:rPr lang="en-US" sz="1200" i="1" dirty="0" err="1">
-                <a:solidFill>
-                  <a:srgbClr val="9CA3AF"/>
-                </a:solidFill>
-                <a:latin typeface="Times New Roman" pitchFamily="34" charset="0"/>
-                <a:ea typeface="Times New Roman" pitchFamily="34" charset="-122"/>
-                <a:cs typeface="Times New Roman" pitchFamily="34" charset="-120"/>
-              </a:rPr>
-              <a:t>Istraživačko</a:t>
-            </a:r>
-            <a:r>
-              <a:rPr lang="en-US" sz="1200" i="1" dirty="0">
-                <a:solidFill>
-                  <a:srgbClr val="9CA3AF"/>
-                </a:solidFill>
-                <a:latin typeface="Times New Roman" pitchFamily="34" charset="0"/>
-                <a:ea typeface="Times New Roman" pitchFamily="34" charset="-122"/>
-                <a:cs typeface="Times New Roman" pitchFamily="34" charset="-120"/>
-              </a:rPr>
-              <a:t> </a:t>
-            </a:r>
-            <a:r>
-              <a:rPr lang="en-US" sz="1200" i="1" dirty="0" err="1">
-                <a:solidFill>
-                  <a:srgbClr val="9CA3AF"/>
-                </a:solidFill>
-                <a:latin typeface="Times New Roman" pitchFamily="34" charset="0"/>
-                <a:ea typeface="Times New Roman" pitchFamily="34" charset="-122"/>
-                <a:cs typeface="Times New Roman" pitchFamily="34" charset="-120"/>
-              </a:rPr>
-              <a:t>pitanje</a:t>
-            </a:r>
-            <a:r>
-              <a:rPr lang="en-US" sz="1200" i="1" dirty="0">
-                <a:solidFill>
-                  <a:srgbClr val="9CA3AF"/>
-                </a:solidFill>
-                <a:latin typeface="Times New Roman" pitchFamily="34" charset="0"/>
-                <a:ea typeface="Times New Roman" pitchFamily="34" charset="-122"/>
-                <a:cs typeface="Times New Roman" pitchFamily="34" charset="-120"/>
-              </a:rPr>
-              <a:t>: 'Ovo </a:t>
-            </a:r>
-            <a:r>
-              <a:rPr lang="en-US" sz="1200" i="1" dirty="0" err="1">
-                <a:solidFill>
-                  <a:srgbClr val="9CA3AF"/>
-                </a:solidFill>
-                <a:latin typeface="Times New Roman" pitchFamily="34" charset="0"/>
-                <a:ea typeface="Times New Roman" pitchFamily="34" charset="-122"/>
-                <a:cs typeface="Times New Roman" pitchFamily="34" charset="-120"/>
-              </a:rPr>
-              <a:t>istraživanje</a:t>
-            </a:r>
-            <a:r>
-              <a:rPr lang="en-US" sz="1200" i="1" dirty="0">
-                <a:solidFill>
-                  <a:srgbClr val="9CA3AF"/>
-                </a:solidFill>
-                <a:latin typeface="Times New Roman" pitchFamily="34" charset="0"/>
-                <a:ea typeface="Times New Roman" pitchFamily="34" charset="-122"/>
-                <a:cs typeface="Times New Roman" pitchFamily="34" charset="-120"/>
-              </a:rPr>
-              <a:t> </a:t>
-            </a:r>
-            <a:r>
-              <a:rPr lang="en-US" sz="1200" i="1" dirty="0" err="1">
-                <a:solidFill>
-                  <a:srgbClr val="9CA3AF"/>
-                </a:solidFill>
-                <a:latin typeface="Times New Roman" pitchFamily="34" charset="0"/>
-                <a:ea typeface="Times New Roman" pitchFamily="34" charset="-122"/>
-                <a:cs typeface="Times New Roman" pitchFamily="34" charset="-120"/>
-              </a:rPr>
-              <a:t>ispituje</a:t>
-            </a:r>
-            <a:r>
-              <a:rPr lang="en-US" sz="1200" i="1" dirty="0">
-                <a:solidFill>
-                  <a:srgbClr val="9CA3AF"/>
-                </a:solidFill>
-                <a:latin typeface="Times New Roman" pitchFamily="34" charset="0"/>
-                <a:ea typeface="Times New Roman" pitchFamily="34" charset="-122"/>
-                <a:cs typeface="Times New Roman" pitchFamily="34" charset="-120"/>
-              </a:rPr>
-              <a:t> da li X </a:t>
-            </a:r>
-            <a:r>
-              <a:rPr lang="en-US" sz="1200" i="1" dirty="0" err="1">
-                <a:solidFill>
-                  <a:srgbClr val="9CA3AF"/>
-                </a:solidFill>
-                <a:latin typeface="Times New Roman" pitchFamily="34" charset="0"/>
-                <a:ea typeface="Times New Roman" pitchFamily="34" charset="-122"/>
-                <a:cs typeface="Times New Roman" pitchFamily="34" charset="-120"/>
-              </a:rPr>
-              <a:t>koristeći</a:t>
-            </a:r>
-            <a:r>
-              <a:rPr lang="en-US" sz="1200" i="1" dirty="0">
-                <a:solidFill>
-                  <a:srgbClr val="9CA3AF"/>
-                </a:solidFill>
-                <a:latin typeface="Times New Roman" pitchFamily="34" charset="0"/>
-                <a:ea typeface="Times New Roman" pitchFamily="34" charset="-122"/>
-                <a:cs typeface="Times New Roman" pitchFamily="34" charset="-120"/>
-              </a:rPr>
-              <a:t> </a:t>
-            </a:r>
-            <a:r>
-              <a:rPr lang="en-US" sz="1200" i="1" dirty="0" err="1">
-                <a:solidFill>
-                  <a:srgbClr val="9CA3AF"/>
-                </a:solidFill>
-                <a:latin typeface="Times New Roman" pitchFamily="34" charset="0"/>
-                <a:ea typeface="Times New Roman" pitchFamily="34" charset="-122"/>
-                <a:cs typeface="Times New Roman" pitchFamily="34" charset="-120"/>
-              </a:rPr>
-              <a:t>podatke</a:t>
-            </a:r>
-            <a:r>
-              <a:rPr lang="en-US" sz="1200" i="1" dirty="0">
-                <a:solidFill>
-                  <a:srgbClr val="9CA3AF"/>
-                </a:solidFill>
-                <a:latin typeface="Times New Roman" pitchFamily="34" charset="0"/>
-                <a:ea typeface="Times New Roman" pitchFamily="34" charset="-122"/>
-                <a:cs typeface="Times New Roman" pitchFamily="34" charset="-120"/>
-              </a:rPr>
-              <a:t> </a:t>
-            </a:r>
-            <a:r>
-              <a:rPr lang="en-US" sz="1200" i="1" dirty="0" err="1">
-                <a:solidFill>
-                  <a:srgbClr val="9CA3AF"/>
-                </a:solidFill>
-                <a:latin typeface="Times New Roman" pitchFamily="34" charset="0"/>
-                <a:ea typeface="Times New Roman" pitchFamily="34" charset="-122"/>
-                <a:cs typeface="Times New Roman" pitchFamily="34" charset="-120"/>
-              </a:rPr>
-              <a:t>iz</a:t>
-            </a:r>
-            <a:r>
-              <a:rPr lang="en-US" sz="1200" i="1" dirty="0">
-                <a:solidFill>
-                  <a:srgbClr val="9CA3AF"/>
-                </a:solidFill>
-                <a:latin typeface="Times New Roman" pitchFamily="34" charset="0"/>
-                <a:ea typeface="Times New Roman" pitchFamily="34" charset="-122"/>
-                <a:cs typeface="Times New Roman" pitchFamily="34" charset="-120"/>
-              </a:rPr>
-              <a:t> Y...'</a:t>
-            </a:r>
-          </a:p>
-          <a:p>
-            <a:pPr marL="0" indent="0" algn="l">
-              <a:buNone/>
-            </a:pPr>
-            <a:endParaRPr lang="en-US" sz="1200" dirty="0"/>
-          </a:p>
-          <a:p>
-            <a:pPr marL="0" indent="0" algn="l">
-              <a:buNone/>
-            </a:pPr>
-            <a:r>
-              <a:rPr lang="en-US" sz="1200" i="1" dirty="0">
-                <a:solidFill>
-                  <a:srgbClr val="9CA3AF"/>
-                </a:solidFill>
-                <a:latin typeface="Times New Roman" pitchFamily="34" charset="0"/>
-                <a:ea typeface="Times New Roman" pitchFamily="34" charset="-122"/>
-                <a:cs typeface="Times New Roman" pitchFamily="34" charset="-120"/>
-              </a:rPr>
-              <a:t>Kratko objasnite kontekst ili pozadinu teme.</a:t>
-            </a:r>
-            <a:endParaRPr lang="en-US" sz="1200" dirty="0"/>
+              <a:rPr lang="bs-Latn-BA" sz="1200" dirty="0">
+                <a:latin typeface="Times New Roman" panose="02020603050405020304" pitchFamily="18" charset="0"/>
+                <a:cs typeface="Times New Roman" panose="02020603050405020304" pitchFamily="18" charset="0"/>
+              </a:rPr>
+              <a:t>Koji faktori određuju cijenu </a:t>
+            </a:r>
+            <a:r>
+              <a:rPr lang="bs-Latn-BA" sz="1200" dirty="0" err="1">
+                <a:latin typeface="Times New Roman" panose="02020603050405020304" pitchFamily="18" charset="0"/>
+                <a:cs typeface="Times New Roman" panose="02020603050405020304" pitchFamily="18" charset="0"/>
+              </a:rPr>
+              <a:t>Airbnb</a:t>
+            </a:r>
+            <a:r>
+              <a:rPr lang="bs-Latn-BA" sz="1200" dirty="0">
+                <a:latin typeface="Times New Roman" panose="02020603050405020304" pitchFamily="18" charset="0"/>
+                <a:cs typeface="Times New Roman" panose="02020603050405020304" pitchFamily="18" charset="0"/>
+              </a:rPr>
+              <a:t> smještaja i djeluju li jednako u različitim gradovima? Fokus je na geografskoj lokaciji (centar </a:t>
+            </a:r>
+            <a:r>
+              <a:rPr lang="bs-Latn-BA" sz="1200" dirty="0" err="1">
+                <a:latin typeface="Times New Roman" panose="02020603050405020304" pitchFamily="18" charset="0"/>
+                <a:cs typeface="Times New Roman" panose="02020603050405020304" pitchFamily="18" charset="0"/>
+              </a:rPr>
+              <a:t>vs</a:t>
+            </a:r>
+            <a:r>
+              <a:rPr lang="bs-Latn-BA" sz="1200" dirty="0">
+                <a:latin typeface="Times New Roman" panose="02020603050405020304" pitchFamily="18" charset="0"/>
+                <a:cs typeface="Times New Roman" panose="02020603050405020304" pitchFamily="18" charset="0"/>
+              </a:rPr>
+              <a:t>. periferija) i tipu smještaja (cijeli stan, privatna soba, zajednička soba) u Ateni, Malagi, Istanbulu, Napulju, Rimu i Valenciji.</a:t>
+            </a:r>
+            <a:endParaRPr lang="en-US" sz="1000" dirty="0">
+              <a:latin typeface="Times New Roman" panose="02020603050405020304" pitchFamily="18" charset="0"/>
+              <a:cs typeface="Times New Roman" panose="02020603050405020304" pitchFamily="18" charset="0"/>
+            </a:endParaRPr>
           </a:p>
         </p:txBody>
       </p:sp>
@@ -9600,8 +9334,8 @@
         </p:nvSpPr>
         <p:spPr>
           <a:xfrm>
-            <a:off x="160020" y="6592824"/>
-            <a:ext cx="5104638" cy="7662672"/>
+            <a:off x="160020" y="7470584"/>
+            <a:ext cx="5104638" cy="6784912"/>
           </a:xfrm>
           <a:prstGeom prst="rect">
             <a:avLst/>
@@ -9638,7 +9372,7 @@
         </p:nvSpPr>
         <p:spPr>
           <a:xfrm>
-            <a:off x="160020" y="6592824"/>
+            <a:off x="160020" y="7470584"/>
             <a:ext cx="5104638" cy="109728"/>
           </a:xfrm>
           <a:prstGeom prst="rect">
@@ -9669,7 +9403,7 @@
         </p:nvSpPr>
         <p:spPr>
           <a:xfrm>
-            <a:off x="297180" y="6739128"/>
+            <a:off x="297180" y="7598664"/>
             <a:ext cx="4830318" cy="347472"/>
           </a:xfrm>
           <a:prstGeom prst="rect">
@@ -9714,7 +9448,7 @@
         </p:nvSpPr>
         <p:spPr>
           <a:xfrm>
-            <a:off x="297180" y="7123176"/>
+            <a:off x="297180" y="7961376"/>
             <a:ext cx="4830318" cy="0"/>
           </a:xfrm>
           <a:prstGeom prst="line">
@@ -9743,8 +9477,8 @@
         </p:nvSpPr>
         <p:spPr>
           <a:xfrm>
-            <a:off x="297180" y="7187184"/>
-            <a:ext cx="4830318" cy="6949440"/>
+            <a:off x="297180" y="8077200"/>
+            <a:ext cx="4830318" cy="6059423"/>
           </a:xfrm>
           <a:prstGeom prst="rect">
             <a:avLst/>
@@ -9757,621 +9491,112 @@
           <a:lstStyle/>
           <a:p>
             <a:r>
-              <a:rPr lang="en-US" sz="1200" i="1" dirty="0">
-                <a:solidFill>
-                  <a:srgbClr val="9CA3AF"/>
-                </a:solidFill>
-                <a:latin typeface="Times New Roman" pitchFamily="34" charset="0"/>
-                <a:ea typeface="Times New Roman" pitchFamily="34" charset="-122"/>
-                <a:cs typeface="Times New Roman" pitchFamily="34" charset="-120"/>
-              </a:rPr>
-              <a:t>Izvor </a:t>
-            </a:r>
-            <a:r>
-              <a:rPr lang="en-US" sz="1200" i="1" dirty="0" err="1">
-                <a:solidFill>
-                  <a:srgbClr val="9CA3AF"/>
-                </a:solidFill>
-                <a:latin typeface="Times New Roman" pitchFamily="34" charset="0"/>
-                <a:ea typeface="Times New Roman" pitchFamily="34" charset="-122"/>
-                <a:cs typeface="Times New Roman" pitchFamily="34" charset="-120"/>
-              </a:rPr>
-              <a:t>podataka</a:t>
-            </a:r>
-            <a:r>
-              <a:rPr lang="en-US" sz="1200" i="1" dirty="0">
-                <a:solidFill>
-                  <a:srgbClr val="9CA3AF"/>
-                </a:solidFill>
-                <a:latin typeface="Times New Roman" pitchFamily="34" charset="0"/>
-                <a:ea typeface="Times New Roman" pitchFamily="34" charset="-122"/>
-                <a:cs typeface="Times New Roman" pitchFamily="34" charset="-120"/>
-              </a:rPr>
-              <a:t>: (Kaggle, API, </a:t>
-            </a:r>
-            <a:r>
-              <a:rPr lang="en-US" sz="1200" i="1" dirty="0" err="1">
-                <a:solidFill>
-                  <a:srgbClr val="9CA3AF"/>
-                </a:solidFill>
-                <a:latin typeface="Times New Roman" pitchFamily="34" charset="0"/>
-                <a:ea typeface="Times New Roman" pitchFamily="34" charset="-122"/>
-                <a:cs typeface="Times New Roman" pitchFamily="34" charset="-120"/>
-              </a:rPr>
-              <a:t>anketa</a:t>
-            </a:r>
-            <a:r>
-              <a:rPr lang="en-US" sz="1200" i="1" dirty="0">
-                <a:solidFill>
-                  <a:srgbClr val="9CA3AF"/>
-                </a:solidFill>
-                <a:latin typeface="Times New Roman" pitchFamily="34" charset="0"/>
-                <a:ea typeface="Times New Roman" pitchFamily="34" charset="-122"/>
-                <a:cs typeface="Times New Roman" pitchFamily="34" charset="-120"/>
-              </a:rPr>
-              <a:t>...)</a:t>
-            </a:r>
-          </a:p>
-          <a:p>
-            <a:endParaRPr lang="en-US" sz="1200" i="1" dirty="0">
-              <a:solidFill>
-                <a:srgbClr val="9CA3AF"/>
-              </a:solidFill>
-              <a:latin typeface="Times New Roman" pitchFamily="34" charset="0"/>
-              <a:ea typeface="Times New Roman" pitchFamily="34" charset="-122"/>
-              <a:cs typeface="Times New Roman" pitchFamily="34" charset="-120"/>
-            </a:endParaRPr>
-          </a:p>
-          <a:p>
-            <a:r>
-              <a:rPr lang="en-US" sz="1200" i="1" dirty="0" err="1">
-                <a:solidFill>
-                  <a:srgbClr val="9CA3AF"/>
-                </a:solidFill>
-                <a:latin typeface="Times New Roman" pitchFamily="34" charset="0"/>
-                <a:ea typeface="Times New Roman" pitchFamily="34" charset="-122"/>
-                <a:cs typeface="Times New Roman" pitchFamily="34" charset="-120"/>
-              </a:rPr>
-              <a:t>Veličina</a:t>
-            </a:r>
-            <a:r>
-              <a:rPr lang="en-US" sz="1200" i="1" dirty="0">
-                <a:solidFill>
-                  <a:srgbClr val="9CA3AF"/>
-                </a:solidFill>
-                <a:latin typeface="Times New Roman" pitchFamily="34" charset="0"/>
-                <a:ea typeface="Times New Roman" pitchFamily="34" charset="-122"/>
-                <a:cs typeface="Times New Roman" pitchFamily="34" charset="-120"/>
-              </a:rPr>
-              <a:t>: X </a:t>
-            </a:r>
-            <a:r>
-              <a:rPr lang="en-US" sz="1200" i="1" dirty="0" err="1">
-                <a:solidFill>
-                  <a:srgbClr val="9CA3AF"/>
-                </a:solidFill>
-                <a:latin typeface="Times New Roman" pitchFamily="34" charset="0"/>
-                <a:ea typeface="Times New Roman" pitchFamily="34" charset="-122"/>
-                <a:cs typeface="Times New Roman" pitchFamily="34" charset="-120"/>
-              </a:rPr>
-              <a:t>redova</a:t>
-            </a:r>
-            <a:r>
-              <a:rPr lang="en-US" sz="1200" i="1" dirty="0">
-                <a:solidFill>
-                  <a:srgbClr val="9CA3AF"/>
-                </a:solidFill>
-                <a:latin typeface="Times New Roman" pitchFamily="34" charset="0"/>
-                <a:ea typeface="Times New Roman" pitchFamily="34" charset="-122"/>
-                <a:cs typeface="Times New Roman" pitchFamily="34" charset="-120"/>
-              </a:rPr>
-              <a:t>, Y </a:t>
-            </a:r>
-            <a:r>
-              <a:rPr lang="en-US" sz="1200" i="1" dirty="0" err="1">
-                <a:solidFill>
-                  <a:srgbClr val="9CA3AF"/>
-                </a:solidFill>
-                <a:latin typeface="Times New Roman" pitchFamily="34" charset="0"/>
-                <a:ea typeface="Times New Roman" pitchFamily="34" charset="-122"/>
-                <a:cs typeface="Times New Roman" pitchFamily="34" charset="-120"/>
-              </a:rPr>
-              <a:t>kolona</a:t>
-            </a:r>
-            <a:endParaRPr lang="en-US" sz="1200" i="1" dirty="0">
-              <a:solidFill>
-                <a:srgbClr val="9CA3AF"/>
-              </a:solidFill>
-              <a:latin typeface="Times New Roman" pitchFamily="34" charset="0"/>
-              <a:ea typeface="Times New Roman" pitchFamily="34" charset="-122"/>
-              <a:cs typeface="Times New Roman" pitchFamily="34" charset="-120"/>
-            </a:endParaRPr>
-          </a:p>
-          <a:p>
-            <a:endParaRPr lang="en-US" sz="1200" i="1" dirty="0">
-              <a:solidFill>
-                <a:srgbClr val="9CA3AF"/>
-              </a:solidFill>
-              <a:latin typeface="Times New Roman" pitchFamily="34" charset="0"/>
-              <a:ea typeface="Times New Roman" pitchFamily="34" charset="-122"/>
-              <a:cs typeface="Times New Roman" pitchFamily="34" charset="-120"/>
-            </a:endParaRPr>
-          </a:p>
-          <a:p>
-            <a:r>
-              <a:rPr lang="en-US" sz="1200" i="1" dirty="0" err="1">
-                <a:solidFill>
-                  <a:srgbClr val="9CA3AF"/>
-                </a:solidFill>
-                <a:latin typeface="Times New Roman" pitchFamily="34" charset="0"/>
-                <a:ea typeface="Times New Roman" pitchFamily="34" charset="-122"/>
-                <a:cs typeface="Times New Roman" pitchFamily="34" charset="-120"/>
-              </a:rPr>
-              <a:t>Ključne</a:t>
-            </a:r>
-            <a:r>
-              <a:rPr lang="en-US" sz="1200" i="1" dirty="0">
-                <a:solidFill>
-                  <a:srgbClr val="9CA3AF"/>
-                </a:solidFill>
-                <a:latin typeface="Times New Roman" pitchFamily="34" charset="0"/>
-                <a:ea typeface="Times New Roman" pitchFamily="34" charset="-122"/>
-                <a:cs typeface="Times New Roman" pitchFamily="34" charset="-120"/>
-              </a:rPr>
+              <a:rPr lang="bs-Latn-BA" sz="1200" dirty="0"/>
+              <a:t>Izvor: </a:t>
+            </a:r>
+            <a:r>
+              <a:rPr lang="bs-Latn-BA" sz="1200" dirty="0" err="1"/>
+              <a:t>Inside</a:t>
+            </a:r>
+            <a:r>
+              <a:rPr lang="bs-Latn-BA" sz="1200" dirty="0"/>
               <a:t> </a:t>
             </a:r>
             <a:r>
-              <a:rPr lang="en-US" sz="1200" i="1" dirty="0" err="1">
-                <a:solidFill>
-                  <a:srgbClr val="9CA3AF"/>
-                </a:solidFill>
-                <a:latin typeface="Times New Roman" pitchFamily="34" charset="0"/>
-                <a:ea typeface="Times New Roman" pitchFamily="34" charset="-122"/>
-                <a:cs typeface="Times New Roman" pitchFamily="34" charset="-120"/>
-              </a:rPr>
-              <a:t>varijable</a:t>
-            </a:r>
-            <a:r>
-              <a:rPr lang="en-US" sz="1200" i="1" dirty="0">
-                <a:solidFill>
-                  <a:srgbClr val="9CA3AF"/>
-                </a:solidFill>
-                <a:latin typeface="Times New Roman" pitchFamily="34" charset="0"/>
-                <a:ea typeface="Times New Roman" pitchFamily="34" charset="-122"/>
-                <a:cs typeface="Times New Roman" pitchFamily="34" charset="-120"/>
-              </a:rPr>
-              <a:t>: </a:t>
-            </a:r>
-            <a:r>
-              <a:rPr lang="en-US" sz="1200" i="1" dirty="0" err="1">
-                <a:solidFill>
-                  <a:srgbClr val="9CA3AF"/>
-                </a:solidFill>
-                <a:latin typeface="Times New Roman" pitchFamily="34" charset="0"/>
-                <a:ea typeface="Times New Roman" pitchFamily="34" charset="-122"/>
-                <a:cs typeface="Times New Roman" pitchFamily="34" charset="-120"/>
-              </a:rPr>
-              <a:t>navedite</a:t>
-            </a:r>
-            <a:r>
-              <a:rPr lang="en-US" sz="1200" i="1" dirty="0">
-                <a:solidFill>
-                  <a:srgbClr val="9CA3AF"/>
-                </a:solidFill>
-                <a:latin typeface="Times New Roman" pitchFamily="34" charset="0"/>
-                <a:ea typeface="Times New Roman" pitchFamily="34" charset="-122"/>
-                <a:cs typeface="Times New Roman" pitchFamily="34" charset="-120"/>
-              </a:rPr>
-              <a:t> 3-5 </a:t>
-            </a:r>
-            <a:r>
-              <a:rPr lang="en-US" sz="1200" i="1" dirty="0" err="1">
-                <a:solidFill>
-                  <a:srgbClr val="9CA3AF"/>
-                </a:solidFill>
-                <a:latin typeface="Times New Roman" pitchFamily="34" charset="0"/>
-                <a:ea typeface="Times New Roman" pitchFamily="34" charset="-122"/>
-                <a:cs typeface="Times New Roman" pitchFamily="34" charset="-120"/>
-              </a:rPr>
-              <a:t>glavnih</a:t>
-            </a:r>
-            <a:endParaRPr lang="en-US" sz="1200" i="1" dirty="0">
-              <a:solidFill>
-                <a:srgbClr val="9CA3AF"/>
-              </a:solidFill>
-              <a:latin typeface="Times New Roman" pitchFamily="34" charset="0"/>
-              <a:ea typeface="Times New Roman" pitchFamily="34" charset="-122"/>
-              <a:cs typeface="Times New Roman" pitchFamily="34" charset="-120"/>
-            </a:endParaRPr>
-          </a:p>
-          <a:p>
-            <a:endParaRPr lang="en-US" sz="1200" i="1" dirty="0">
-              <a:solidFill>
-                <a:srgbClr val="9CA3AF"/>
-              </a:solidFill>
-              <a:latin typeface="Times New Roman" pitchFamily="34" charset="0"/>
-              <a:ea typeface="Times New Roman" pitchFamily="34" charset="-122"/>
-              <a:cs typeface="Times New Roman" pitchFamily="34" charset="-120"/>
-            </a:endParaRPr>
-          </a:p>
-          <a:p>
-            <a:r>
-              <a:rPr lang="en-US" sz="1200" i="1" dirty="0" err="1">
-                <a:solidFill>
-                  <a:srgbClr val="9CA3AF"/>
-                </a:solidFill>
-                <a:latin typeface="Times New Roman" pitchFamily="34" charset="0"/>
-                <a:ea typeface="Times New Roman" pitchFamily="34" charset="-122"/>
-                <a:cs typeface="Times New Roman" pitchFamily="34" charset="-120"/>
-              </a:rPr>
+              <a:rPr lang="bs-Latn-BA" sz="1200" dirty="0" err="1"/>
+              <a:t>Airbnb</a:t>
+            </a:r>
+            <a:r>
+              <a:rPr lang="bs-Latn-BA" sz="1200" dirty="0"/>
+              <a:t> (insideairbnb.com), septembar–oktobar 2025. </a:t>
+            </a:r>
+          </a:p>
+          <a:p>
+            <a:endParaRPr lang="bs-Latn-BA" sz="1200" dirty="0"/>
+          </a:p>
+          <a:p>
+            <a:r>
+              <a:rPr lang="bs-Latn-BA" sz="1200" dirty="0"/>
+              <a:t>Veličina: 91.301 oglasa iz 6 gradova. </a:t>
+            </a:r>
+          </a:p>
+          <a:p>
+            <a:endParaRPr lang="bs-Latn-BA" sz="1200" dirty="0"/>
+          </a:p>
+          <a:p>
+            <a:r>
+              <a:rPr lang="bs-Latn-BA" sz="1200" dirty="0"/>
+              <a:t>Ključne varijable: cijena, tip smještaja, lokacija/kvart, udaljenost od centra, ocjene. </a:t>
+            </a:r>
+          </a:p>
+          <a:p>
+            <a:endParaRPr lang="bs-Latn-BA" sz="1200" dirty="0"/>
+          </a:p>
+          <a:p>
+            <a:r>
+              <a:rPr lang="bs-Latn-BA" sz="1200" dirty="0" err="1"/>
               <a:t>Preprocesiranje</a:t>
             </a:r>
             <a:r>
-              <a:rPr lang="en-US" sz="1200" i="1" dirty="0">
-                <a:solidFill>
-                  <a:srgbClr val="9CA3AF"/>
-                </a:solidFill>
-                <a:latin typeface="Times New Roman" pitchFamily="34" charset="0"/>
-                <a:ea typeface="Times New Roman" pitchFamily="34" charset="-122"/>
-                <a:cs typeface="Times New Roman" pitchFamily="34" charset="-120"/>
-              </a:rPr>
-              <a:t>: </a:t>
-            </a:r>
-            <a:r>
-              <a:rPr lang="en-US" sz="1200" i="1" dirty="0" err="1">
-                <a:solidFill>
-                  <a:srgbClr val="9CA3AF"/>
-                </a:solidFill>
-                <a:latin typeface="Times New Roman" pitchFamily="34" charset="0"/>
-                <a:ea typeface="Times New Roman" pitchFamily="34" charset="-122"/>
-                <a:cs typeface="Times New Roman" pitchFamily="34" charset="-120"/>
-              </a:rPr>
-              <a:t>čišćenje</a:t>
-            </a:r>
-            <a:r>
-              <a:rPr lang="en-US" sz="1200" i="1" dirty="0">
-                <a:solidFill>
-                  <a:srgbClr val="9CA3AF"/>
-                </a:solidFill>
-                <a:latin typeface="Times New Roman" pitchFamily="34" charset="0"/>
-                <a:ea typeface="Times New Roman" pitchFamily="34" charset="-122"/>
-                <a:cs typeface="Times New Roman" pitchFamily="34" charset="-120"/>
-              </a:rPr>
+              <a:rPr lang="bs-Latn-BA" sz="1200" dirty="0"/>
+              <a:t>: uklanjanje </a:t>
+            </a:r>
+            <a:r>
+              <a:rPr lang="bs-Latn-BA" sz="1200" dirty="0" err="1"/>
+              <a:t>outliera</a:t>
+            </a:r>
+            <a:r>
+              <a:rPr lang="bs-Latn-BA" sz="1200" dirty="0"/>
+              <a:t> (IQR), konverzija valuta u USD. </a:t>
+            </a:r>
+          </a:p>
+          <a:p>
+            <a:endParaRPr lang="bs-Latn-BA" sz="1200" dirty="0"/>
+          </a:p>
+          <a:p>
+            <a:r>
+              <a:rPr lang="bs-Latn-BA" sz="1200" dirty="0"/>
+              <a:t>Metode: deskriptivna statistika, OLS regresija, </a:t>
+            </a:r>
+            <a:r>
+              <a:rPr lang="bs-Latn-BA" sz="1200" dirty="0" err="1"/>
+              <a:t>KMeans</a:t>
+            </a:r>
+            <a:r>
+              <a:rPr lang="bs-Latn-BA" sz="1200" dirty="0"/>
+              <a:t> </a:t>
+            </a:r>
+            <a:r>
+              <a:rPr lang="bs-Latn-BA" sz="1200" dirty="0" err="1"/>
+              <a:t>klasterizacija</a:t>
+            </a:r>
+            <a:r>
+              <a:rPr lang="bs-Latn-BA" sz="1200" dirty="0"/>
               <a:t>, </a:t>
             </a:r>
             <a:r>
-              <a:rPr lang="en-US" sz="1200" i="1" dirty="0" err="1">
-                <a:solidFill>
-                  <a:srgbClr val="9CA3AF"/>
-                </a:solidFill>
-                <a:latin typeface="Times New Roman" pitchFamily="34" charset="0"/>
-                <a:ea typeface="Times New Roman" pitchFamily="34" charset="-122"/>
-                <a:cs typeface="Times New Roman" pitchFamily="34" charset="-120"/>
-              </a:rPr>
-              <a:t>filtriranje</a:t>
-            </a:r>
-            <a:r>
-              <a:rPr lang="en-US" sz="1200" i="1" dirty="0">
-                <a:solidFill>
-                  <a:srgbClr val="9CA3AF"/>
-                </a:solidFill>
-                <a:latin typeface="Times New Roman" pitchFamily="34" charset="0"/>
-                <a:ea typeface="Times New Roman" pitchFamily="34" charset="-122"/>
-                <a:cs typeface="Times New Roman" pitchFamily="34" charset="-120"/>
-              </a:rPr>
-              <a:t>, encoding</a:t>
-            </a:r>
-          </a:p>
-          <a:p>
-            <a:endParaRPr lang="en-US" sz="1200" i="1" dirty="0">
-              <a:solidFill>
-                <a:srgbClr val="9CA3AF"/>
-              </a:solidFill>
-              <a:latin typeface="Times New Roman" pitchFamily="34" charset="0"/>
-              <a:ea typeface="Times New Roman" pitchFamily="34" charset="-122"/>
-              <a:cs typeface="Times New Roman" pitchFamily="34" charset="-120"/>
-            </a:endParaRPr>
-          </a:p>
-          <a:p>
-            <a:r>
-              <a:rPr lang="en-US" sz="1200" i="1" dirty="0" err="1">
-                <a:solidFill>
-                  <a:srgbClr val="9CA3AF"/>
-                </a:solidFill>
-                <a:latin typeface="Times New Roman" pitchFamily="34" charset="0"/>
-                <a:ea typeface="Times New Roman" pitchFamily="34" charset="-122"/>
-                <a:cs typeface="Times New Roman" pitchFamily="34" charset="-120"/>
-              </a:rPr>
-              <a:t>Analitički</a:t>
-            </a:r>
-            <a:r>
-              <a:rPr lang="en-US" sz="1200" i="1" dirty="0">
-                <a:solidFill>
-                  <a:srgbClr val="9CA3AF"/>
-                </a:solidFill>
-                <a:latin typeface="Times New Roman" pitchFamily="34" charset="0"/>
-                <a:ea typeface="Times New Roman" pitchFamily="34" charset="-122"/>
-                <a:cs typeface="Times New Roman" pitchFamily="34" charset="-120"/>
-              </a:rPr>
-              <a:t> </a:t>
-            </a:r>
-            <a:r>
-              <a:rPr lang="en-US" sz="1200" i="1" dirty="0" err="1">
-                <a:solidFill>
-                  <a:srgbClr val="9CA3AF"/>
-                </a:solidFill>
-                <a:latin typeface="Times New Roman" pitchFamily="34" charset="0"/>
-                <a:ea typeface="Times New Roman" pitchFamily="34" charset="-122"/>
-                <a:cs typeface="Times New Roman" pitchFamily="34" charset="-120"/>
-              </a:rPr>
-              <a:t>pristup</a:t>
-            </a:r>
-            <a:r>
-              <a:rPr lang="en-US" sz="1200" i="1" dirty="0">
-                <a:solidFill>
-                  <a:srgbClr val="9CA3AF"/>
-                </a:solidFill>
-                <a:latin typeface="Times New Roman" pitchFamily="34" charset="0"/>
-                <a:ea typeface="Times New Roman" pitchFamily="34" charset="-122"/>
-                <a:cs typeface="Times New Roman" pitchFamily="34" charset="-120"/>
-              </a:rPr>
-              <a:t>:</a:t>
-            </a:r>
-          </a:p>
-          <a:p>
-            <a:r>
-              <a:rPr lang="en-US" sz="1200" i="1" dirty="0">
-                <a:solidFill>
-                  <a:srgbClr val="9CA3AF"/>
-                </a:solidFill>
-                <a:latin typeface="Times New Roman" pitchFamily="34" charset="0"/>
-                <a:ea typeface="Times New Roman" pitchFamily="34" charset="-122"/>
-                <a:cs typeface="Times New Roman" pitchFamily="34" charset="-120"/>
-              </a:rPr>
-              <a:t>1. EDA — </a:t>
-            </a:r>
-            <a:r>
-              <a:rPr lang="en-US" sz="1200" i="1" dirty="0" err="1">
-                <a:solidFill>
-                  <a:srgbClr val="9CA3AF"/>
-                </a:solidFill>
-                <a:latin typeface="Times New Roman" pitchFamily="34" charset="0"/>
-                <a:ea typeface="Times New Roman" pitchFamily="34" charset="-122"/>
-                <a:cs typeface="Times New Roman" pitchFamily="34" charset="-120"/>
-              </a:rPr>
-              <a:t>opis</a:t>
-            </a:r>
-            <a:r>
-              <a:rPr lang="en-US" sz="1200" i="1" dirty="0">
-                <a:solidFill>
-                  <a:srgbClr val="9CA3AF"/>
-                </a:solidFill>
-                <a:latin typeface="Times New Roman" pitchFamily="34" charset="0"/>
-                <a:ea typeface="Times New Roman" pitchFamily="34" charset="-122"/>
-                <a:cs typeface="Times New Roman" pitchFamily="34" charset="-120"/>
-              </a:rPr>
-              <a:t> </a:t>
-            </a:r>
-            <a:r>
-              <a:rPr lang="en-US" sz="1200" i="1" dirty="0" err="1">
-                <a:solidFill>
-                  <a:srgbClr val="9CA3AF"/>
-                </a:solidFill>
-                <a:latin typeface="Times New Roman" pitchFamily="34" charset="0"/>
-                <a:ea typeface="Times New Roman" pitchFamily="34" charset="-122"/>
-                <a:cs typeface="Times New Roman" pitchFamily="34" charset="-120"/>
-              </a:rPr>
-              <a:t>obrazaca</a:t>
-            </a:r>
-            <a:r>
-              <a:rPr lang="en-US" sz="1200" i="1" dirty="0">
-                <a:solidFill>
-                  <a:srgbClr val="9CA3AF"/>
-                </a:solidFill>
-                <a:latin typeface="Times New Roman" pitchFamily="34" charset="0"/>
-                <a:ea typeface="Times New Roman" pitchFamily="34" charset="-122"/>
-                <a:cs typeface="Times New Roman" pitchFamily="34" charset="-120"/>
-              </a:rPr>
-              <a:t> </a:t>
-            </a:r>
-            <a:r>
-              <a:rPr lang="en-US" sz="1200" i="1" dirty="0" err="1">
-                <a:solidFill>
-                  <a:srgbClr val="9CA3AF"/>
-                </a:solidFill>
-                <a:latin typeface="Times New Roman" pitchFamily="34" charset="0"/>
-                <a:ea typeface="Times New Roman" pitchFamily="34" charset="-122"/>
-                <a:cs typeface="Times New Roman" pitchFamily="34" charset="-120"/>
-              </a:rPr>
-              <a:t>i</a:t>
-            </a:r>
-            <a:r>
-              <a:rPr lang="en-US" sz="1200" i="1" dirty="0">
-                <a:solidFill>
-                  <a:srgbClr val="9CA3AF"/>
-                </a:solidFill>
-                <a:latin typeface="Times New Roman" pitchFamily="34" charset="0"/>
-                <a:ea typeface="Times New Roman" pitchFamily="34" charset="-122"/>
-                <a:cs typeface="Times New Roman" pitchFamily="34" charset="-120"/>
-              </a:rPr>
-              <a:t> </a:t>
-            </a:r>
-            <a:r>
-              <a:rPr lang="en-US" sz="1200" i="1" dirty="0" err="1">
-                <a:solidFill>
-                  <a:srgbClr val="9CA3AF"/>
-                </a:solidFill>
-                <a:latin typeface="Times New Roman" pitchFamily="34" charset="0"/>
-                <a:ea typeface="Times New Roman" pitchFamily="34" charset="-122"/>
-                <a:cs typeface="Times New Roman" pitchFamily="34" charset="-120"/>
-              </a:rPr>
-              <a:t>statistike</a:t>
-            </a:r>
-            <a:endParaRPr lang="en-US" sz="1200" i="1" dirty="0">
-              <a:solidFill>
-                <a:srgbClr val="9CA3AF"/>
-              </a:solidFill>
-              <a:latin typeface="Times New Roman" pitchFamily="34" charset="0"/>
-              <a:ea typeface="Times New Roman" pitchFamily="34" charset="-122"/>
-              <a:cs typeface="Times New Roman" pitchFamily="34" charset="-120"/>
-            </a:endParaRPr>
-          </a:p>
-          <a:p>
-            <a:r>
-              <a:rPr lang="en-US" sz="1200" i="1" dirty="0">
-                <a:solidFill>
-                  <a:srgbClr val="9CA3AF"/>
-                </a:solidFill>
-                <a:latin typeface="Times New Roman" pitchFamily="34" charset="0"/>
-                <a:ea typeface="Times New Roman" pitchFamily="34" charset="-122"/>
-                <a:cs typeface="Times New Roman" pitchFamily="34" charset="-120"/>
-              </a:rPr>
-              <a:t>2. </a:t>
-            </a:r>
-            <a:r>
-              <a:rPr lang="en-US" sz="1200" i="1" dirty="0" err="1">
-                <a:solidFill>
-                  <a:srgbClr val="9CA3AF"/>
-                </a:solidFill>
-                <a:latin typeface="Times New Roman" pitchFamily="34" charset="0"/>
-                <a:ea typeface="Times New Roman" pitchFamily="34" charset="-122"/>
-                <a:cs typeface="Times New Roman" pitchFamily="34" charset="-120"/>
-              </a:rPr>
-              <a:t>Primijenjena</a:t>
-            </a:r>
-            <a:r>
-              <a:rPr lang="en-US" sz="1200" i="1" dirty="0">
-                <a:solidFill>
-                  <a:srgbClr val="9CA3AF"/>
-                </a:solidFill>
-                <a:latin typeface="Times New Roman" pitchFamily="34" charset="0"/>
-                <a:ea typeface="Times New Roman" pitchFamily="34" charset="-122"/>
-                <a:cs typeface="Times New Roman" pitchFamily="34" charset="-120"/>
-              </a:rPr>
-              <a:t> </a:t>
-            </a:r>
-            <a:r>
-              <a:rPr lang="en-US" sz="1200" i="1" dirty="0" err="1">
-                <a:solidFill>
-                  <a:srgbClr val="9CA3AF"/>
-                </a:solidFill>
-                <a:latin typeface="Times New Roman" pitchFamily="34" charset="0"/>
-                <a:ea typeface="Times New Roman" pitchFamily="34" charset="-122"/>
-                <a:cs typeface="Times New Roman" pitchFamily="34" charset="-120"/>
-              </a:rPr>
-              <a:t>tehnika</a:t>
-            </a:r>
-            <a:r>
-              <a:rPr lang="en-US" sz="1200" i="1" dirty="0">
-                <a:solidFill>
-                  <a:srgbClr val="9CA3AF"/>
-                </a:solidFill>
-                <a:latin typeface="Times New Roman" pitchFamily="34" charset="0"/>
-                <a:ea typeface="Times New Roman" pitchFamily="34" charset="-122"/>
-                <a:cs typeface="Times New Roman" pitchFamily="34" charset="-120"/>
-              </a:rPr>
-              <a:t>: (</a:t>
-            </a:r>
-            <a:r>
-              <a:rPr lang="en-US" sz="1200" i="1" dirty="0" err="1">
-                <a:solidFill>
-                  <a:srgbClr val="9CA3AF"/>
-                </a:solidFill>
-                <a:latin typeface="Times New Roman" pitchFamily="34" charset="0"/>
-                <a:ea typeface="Times New Roman" pitchFamily="34" charset="-122"/>
-                <a:cs typeface="Times New Roman" pitchFamily="34" charset="-120"/>
-              </a:rPr>
-              <a:t>regresija</a:t>
-            </a:r>
-            <a:r>
-              <a:rPr lang="en-US" sz="1200" i="1" dirty="0">
-                <a:solidFill>
-                  <a:srgbClr val="9CA3AF"/>
-                </a:solidFill>
-                <a:latin typeface="Times New Roman" pitchFamily="34" charset="0"/>
-                <a:ea typeface="Times New Roman" pitchFamily="34" charset="-122"/>
-                <a:cs typeface="Times New Roman" pitchFamily="34" charset="-120"/>
-              </a:rPr>
-              <a:t> / </a:t>
-            </a:r>
-            <a:r>
-              <a:rPr lang="en-US" sz="1200" i="1" dirty="0" err="1">
-                <a:solidFill>
-                  <a:srgbClr val="9CA3AF"/>
-                </a:solidFill>
-                <a:latin typeface="Times New Roman" pitchFamily="34" charset="0"/>
-                <a:ea typeface="Times New Roman" pitchFamily="34" charset="-122"/>
-                <a:cs typeface="Times New Roman" pitchFamily="34" charset="-120"/>
-              </a:rPr>
-              <a:t>klasifikacija</a:t>
-            </a:r>
-            <a:r>
-              <a:rPr lang="en-US" sz="1200" i="1" dirty="0">
-                <a:solidFill>
-                  <a:srgbClr val="9CA3AF"/>
-                </a:solidFill>
-                <a:latin typeface="Times New Roman" pitchFamily="34" charset="0"/>
-                <a:ea typeface="Times New Roman" pitchFamily="34" charset="-122"/>
-                <a:cs typeface="Times New Roman" pitchFamily="34" charset="-120"/>
-              </a:rPr>
-              <a:t> / </a:t>
-            </a:r>
-            <a:r>
-              <a:rPr lang="en-US" sz="1200" i="1" dirty="0" err="1">
-                <a:solidFill>
-                  <a:srgbClr val="9CA3AF"/>
-                </a:solidFill>
-                <a:latin typeface="Times New Roman" pitchFamily="34" charset="0"/>
-                <a:ea typeface="Times New Roman" pitchFamily="34" charset="-122"/>
-                <a:cs typeface="Times New Roman" pitchFamily="34" charset="-120"/>
-              </a:rPr>
-              <a:t>klasterizacija</a:t>
-            </a:r>
-            <a:r>
-              <a:rPr lang="en-US" sz="1200" i="1" dirty="0">
-                <a:solidFill>
-                  <a:srgbClr val="9CA3AF"/>
-                </a:solidFill>
-                <a:latin typeface="Times New Roman" pitchFamily="34" charset="0"/>
-                <a:ea typeface="Times New Roman" pitchFamily="34" charset="-122"/>
-                <a:cs typeface="Times New Roman" pitchFamily="34" charset="-120"/>
-              </a:rPr>
-              <a:t>...)</a:t>
-            </a:r>
-          </a:p>
-          <a:p>
-            <a:r>
-              <a:rPr lang="en-US" sz="1200" i="1" dirty="0">
-                <a:solidFill>
-                  <a:srgbClr val="9CA3AF"/>
-                </a:solidFill>
-                <a:latin typeface="Times New Roman" pitchFamily="34" charset="0"/>
-                <a:ea typeface="Times New Roman" pitchFamily="34" charset="-122"/>
-                <a:cs typeface="Times New Roman" pitchFamily="34" charset="-120"/>
-              </a:rPr>
-              <a:t>3. </a:t>
-            </a:r>
-            <a:r>
-              <a:rPr lang="en-US" sz="1200" i="1" dirty="0" err="1">
-                <a:solidFill>
-                  <a:srgbClr val="9CA3AF"/>
-                </a:solidFill>
-                <a:latin typeface="Times New Roman" pitchFamily="34" charset="0"/>
-                <a:ea typeface="Times New Roman" pitchFamily="34" charset="-122"/>
-                <a:cs typeface="Times New Roman" pitchFamily="34" charset="-120"/>
-              </a:rPr>
-              <a:t>Biblioteke</a:t>
-            </a:r>
-            <a:r>
-              <a:rPr lang="en-US" sz="1200" i="1" dirty="0">
-                <a:solidFill>
-                  <a:srgbClr val="9CA3AF"/>
-                </a:solidFill>
-                <a:latin typeface="Times New Roman" pitchFamily="34" charset="0"/>
-                <a:ea typeface="Times New Roman" pitchFamily="34" charset="-122"/>
-                <a:cs typeface="Times New Roman" pitchFamily="34" charset="-120"/>
-              </a:rPr>
-              <a:t>: pandas, NumPy, matplotlib, seaborn, scikit-learn</a:t>
+              <a:rPr lang="bs-Latn-BA" sz="1200" dirty="0" err="1"/>
+              <a:t>geospacijalna</a:t>
+            </a:r>
+            <a:r>
+              <a:rPr lang="bs-Latn-BA" sz="1200" dirty="0"/>
+              <a:t> analiza (</a:t>
+            </a:r>
+            <a:r>
+              <a:rPr lang="bs-Latn-BA" sz="1200" dirty="0" err="1"/>
+              <a:t>Folium</a:t>
+            </a:r>
+            <a:r>
+              <a:rPr lang="bs-Latn-BA" sz="1200" dirty="0"/>
+              <a:t>, </a:t>
+            </a:r>
+            <a:r>
+              <a:rPr lang="bs-Latn-BA" sz="1200" dirty="0" err="1"/>
+              <a:t>Plotly</a:t>
+            </a:r>
+            <a:r>
+              <a:rPr lang="bs-Latn-BA" sz="1200" dirty="0"/>
+              <a:t>).</a:t>
             </a:r>
             <a:endParaRPr lang="en-US" sz="1200" dirty="0"/>
           </a:p>
@@ -10391,8 +9616,8 @@
         </p:nvSpPr>
         <p:spPr>
           <a:xfrm>
-            <a:off x="5424678" y="2788920"/>
-            <a:ext cx="5104638" cy="685800"/>
+            <a:off x="5424678" y="2898647"/>
+            <a:ext cx="5104638" cy="7027475"/>
           </a:xfrm>
           <a:prstGeom prst="rect">
             <a:avLst/>
@@ -10414,6 +9639,13 @@
             </a:outerShdw>
           </a:effectLst>
         </p:spPr>
+        <p:txBody>
+          <a:bodyPr/>
+          <a:lstStyle/>
+          <a:p>
+            <a:endParaRPr lang="bs-Latn-BA" dirty="0"/>
+          </a:p>
+        </p:txBody>
       </p:sp>
       <p:sp>
         <p:nvSpPr>
@@ -10522,37 +9754,6 @@
       </p:sp>
       <p:sp>
         <p:nvSpPr>
-          <p:cNvPr id="32" name="Shape 77">
-            <a:extLst>
-              <a:ext uri="{FF2B5EF4-FFF2-40B4-BE49-F238E27FC236}">
-                <a16:creationId xmlns:a16="http://schemas.microsoft.com/office/drawing/2014/main" id="{5602543E-81F7-AA71-3D44-767A352E9865}"/>
-              </a:ext>
-            </a:extLst>
-          </p:cNvPr>
-          <p:cNvSpPr/>
-          <p:nvPr/>
-        </p:nvSpPr>
-        <p:spPr>
-          <a:xfrm>
-            <a:off x="5424678" y="3474720"/>
-            <a:ext cx="5104638" cy="2468880"/>
-          </a:xfrm>
-          <a:prstGeom prst="rect">
-            <a:avLst/>
-          </a:prstGeom>
-          <a:solidFill>
-            <a:srgbClr val="E8F4F8"/>
-          </a:solidFill>
-          <a:ln w="9525">
-            <a:solidFill>
-              <a:srgbClr val="A0C8D8"/>
-            </a:solidFill>
-            <a:prstDash val="dash"/>
-          </a:ln>
-        </p:spPr>
-      </p:sp>
-      <p:sp>
-        <p:nvSpPr>
           <p:cNvPr id="33" name="Text 78">
             <a:extLst>
               <a:ext uri="{FF2B5EF4-FFF2-40B4-BE49-F238E27FC236}">
@@ -10581,44 +9782,16 @@
             <a:pPr marL="0" indent="0" algn="ctr">
               <a:buNone/>
             </a:pPr>
-            <a:r>
-              <a:rPr lang="en-US" sz="1000" i="1" dirty="0">
-                <a:solidFill>
-                  <a:srgbClr val="64748B"/>
-                </a:solidFill>
-                <a:latin typeface="Times New Roman" pitchFamily="34" charset="0"/>
-                <a:ea typeface="Times New Roman" pitchFamily="34" charset="-122"/>
-                <a:cs typeface="Times New Roman" pitchFamily="34" charset="-120"/>
-              </a:rPr>
-              <a:t>[ Umetnite grafikon / sliku ovdje ]</a:t>
-            </a:r>
             <a:endParaRPr lang="en-US" sz="1000" dirty="0"/>
           </a:p>
-          <a:p>
-            <a:pPr marL="0" indent="0" algn="ctr">
-              <a:buNone/>
-            </a:pPr>
-            <a:r>
-              <a:rPr lang="en-US" sz="1000" i="1" dirty="0">
-                <a:solidFill>
-                  <a:srgbClr val="64748B"/>
-                </a:solidFill>
-                <a:latin typeface="Times New Roman" pitchFamily="34" charset="0"/>
-                <a:ea typeface="Times New Roman" pitchFamily="34" charset="-122"/>
-                <a:cs typeface="Times New Roman" pitchFamily="34" charset="-120"/>
-              </a:rPr>
-              <a:t>Slika 1 – Potpis (Times New Roman, 10pt, centrirano)</a:t>
-            </a:r>
-            <a:endParaRPr lang="en-US" sz="1000" dirty="0"/>
-          </a:p>
         </p:txBody>
       </p:sp>
       <p:sp>
         <p:nvSpPr>
-          <p:cNvPr id="34" name="Shape 79">
-            <a:extLst>
-              <a:ext uri="{FF2B5EF4-FFF2-40B4-BE49-F238E27FC236}">
-                <a16:creationId xmlns:a16="http://schemas.microsoft.com/office/drawing/2014/main" id="{F7BE6597-E08A-6EB4-E299-22DD52771168}"/>
+          <p:cNvPr id="36" name="Shape 81">
+            <a:extLst>
+              <a:ext uri="{FF2B5EF4-FFF2-40B4-BE49-F238E27FC236}">
+                <a16:creationId xmlns:a16="http://schemas.microsoft.com/office/drawing/2014/main" id="{D98B04CC-70A7-F66E-20AF-89F43CFB5497}"/>
               </a:ext>
             </a:extLst>
           </p:cNvPr>
@@ -10627,101 +9800,8 @@
         </p:nvSpPr>
         <p:spPr>
           <a:xfrm>
-            <a:off x="5424678" y="6108192"/>
-            <a:ext cx="5104638" cy="2468880"/>
-          </a:xfrm>
-          <a:prstGeom prst="rect">
-            <a:avLst/>
-          </a:prstGeom>
-          <a:solidFill>
-            <a:srgbClr val="E8F4F8"/>
-          </a:solidFill>
-          <a:ln w="9525">
-            <a:solidFill>
-              <a:srgbClr val="A0C8D8"/>
-            </a:solidFill>
-            <a:prstDash val="dash"/>
-          </a:ln>
-        </p:spPr>
-      </p:sp>
-      <p:sp>
-        <p:nvSpPr>
-          <p:cNvPr id="35" name="Text 80">
-            <a:extLst>
-              <a:ext uri="{FF2B5EF4-FFF2-40B4-BE49-F238E27FC236}">
-                <a16:creationId xmlns:a16="http://schemas.microsoft.com/office/drawing/2014/main" id="{6606A2F5-AEAF-F3FA-FD10-50097DFD96A3}"/>
-              </a:ext>
-            </a:extLst>
-          </p:cNvPr>
-          <p:cNvSpPr/>
-          <p:nvPr/>
-        </p:nvSpPr>
-        <p:spPr>
-          <a:xfrm>
-            <a:off x="5431933" y="6144480"/>
-            <a:ext cx="5104638" cy="2468880"/>
-          </a:xfrm>
-          <a:prstGeom prst="rect">
-            <a:avLst/>
-          </a:prstGeom>
-          <a:noFill/>
-          <a:ln/>
-        </p:spPr>
-        <p:txBody>
-          <a:bodyPr wrap="square" rtlCol="0" anchor="ctr"/>
-          <a:lstStyle/>
-          <a:p>
-            <a:pPr marL="0" indent="0" algn="ctr">
-              <a:buNone/>
-            </a:pPr>
-            <a:r>
-              <a:rPr lang="en-US" sz="1000" i="1" dirty="0">
-                <a:solidFill>
-                  <a:srgbClr val="64748B"/>
-                </a:solidFill>
-                <a:latin typeface="Times New Roman" pitchFamily="34" charset="0"/>
-                <a:ea typeface="Times New Roman" pitchFamily="34" charset="-122"/>
-                <a:cs typeface="Times New Roman" pitchFamily="34" charset="-120"/>
-              </a:rPr>
-              <a:t>[ Umetnite grafikon / sliku ovdje ]</a:t>
-            </a:r>
-            <a:endParaRPr lang="en-US" sz="1000" dirty="0"/>
-          </a:p>
-          <a:p>
-            <a:pPr marL="0" indent="0" algn="ctr">
-              <a:buNone/>
-            </a:pPr>
-            <a:r>
-              <a:rPr lang="en-US" sz="1000" i="1" dirty="0">
-                <a:solidFill>
-                  <a:srgbClr val="64748B"/>
-                </a:solidFill>
-                <a:latin typeface="Times New Roman" pitchFamily="34" charset="0"/>
-                <a:ea typeface="Times New Roman" pitchFamily="34" charset="-122"/>
-                <a:cs typeface="Times New Roman" pitchFamily="34" charset="-120"/>
-              </a:rPr>
-              <a:t>Slika 2 – Potpis (Times New Roman, 10pt, centrirano)</a:t>
-            </a:r>
-            <a:endParaRPr lang="en-US" sz="1000" dirty="0"/>
-          </a:p>
-        </p:txBody>
-      </p:sp>
-      <p:sp>
-        <p:nvSpPr>
-          <p:cNvPr id="36" name="Shape 81">
-            <a:extLst>
-              <a:ext uri="{FF2B5EF4-FFF2-40B4-BE49-F238E27FC236}">
-                <a16:creationId xmlns:a16="http://schemas.microsoft.com/office/drawing/2014/main" id="{D98B04CC-70A7-F66E-20AF-89F43CFB5497}"/>
-              </a:ext>
-            </a:extLst>
-          </p:cNvPr>
-          <p:cNvSpPr/>
-          <p:nvPr/>
-        </p:nvSpPr>
-        <p:spPr>
-          <a:xfrm>
-            <a:off x="5424678" y="8741664"/>
-            <a:ext cx="5104638" cy="2916936"/>
+            <a:off x="5424678" y="9991126"/>
+            <a:ext cx="5104638" cy="2549678"/>
           </a:xfrm>
           <a:prstGeom prst="rect">
             <a:avLst/>
@@ -10743,6 +9823,13 @@
             </a:outerShdw>
           </a:effectLst>
         </p:spPr>
+        <p:txBody>
+          <a:bodyPr/>
+          <a:lstStyle/>
+          <a:p>
+            <a:endParaRPr lang="bs-Latn-BA" dirty="0"/>
+          </a:p>
+        </p:txBody>
       </p:sp>
       <p:sp>
         <p:nvSpPr>
@@ -10758,7 +9845,7 @@
         </p:nvSpPr>
         <p:spPr>
           <a:xfrm>
-            <a:off x="5424678" y="8741664"/>
+            <a:off x="5446452" y="10006039"/>
             <a:ext cx="5104638" cy="109728"/>
           </a:xfrm>
           <a:prstGeom prst="rect">
@@ -10789,7 +9876,7 @@
         </p:nvSpPr>
         <p:spPr>
           <a:xfrm>
-            <a:off x="5561838" y="8887968"/>
+            <a:off x="5561140" y="10117059"/>
             <a:ext cx="4830318" cy="347472"/>
           </a:xfrm>
           <a:prstGeom prst="rect">
@@ -10834,7 +9921,7 @@
         </p:nvSpPr>
         <p:spPr>
           <a:xfrm>
-            <a:off x="5561838" y="9272016"/>
+            <a:off x="5561140" y="10483596"/>
             <a:ext cx="4830318" cy="0"/>
           </a:xfrm>
           <a:prstGeom prst="line">
@@ -10863,8 +9950,8 @@
         </p:nvSpPr>
         <p:spPr>
           <a:xfrm>
-            <a:off x="5561838" y="9336023"/>
-            <a:ext cx="4830318" cy="2213079"/>
+            <a:off x="5561838" y="10645141"/>
+            <a:ext cx="4830318" cy="1830659"/>
           </a:xfrm>
           <a:prstGeom prst="rect">
             <a:avLst/>
@@ -10880,98 +9967,41 @@
               <a:buNone/>
             </a:pPr>
             <a:r>
-              <a:rPr lang="en-US" sz="1200" i="1" dirty="0">
-                <a:solidFill>
-                  <a:srgbClr val="9CA3AF"/>
-                </a:solidFill>
-                <a:latin typeface="Times New Roman" pitchFamily="34" charset="0"/>
-                <a:ea typeface="Times New Roman" pitchFamily="34" charset="-122"/>
-                <a:cs typeface="Times New Roman" pitchFamily="34" charset="-120"/>
-              </a:rPr>
-              <a:t>Šta vaši nalazi znače u kontekstu teme?</a:t>
-            </a:r>
-            <a:endParaRPr lang="en-US" sz="1200" dirty="0"/>
+              <a:rPr lang="bs-Latn-BA" sz="1200" dirty="0"/>
+              <a:t>✓ Tip smještaja dominira nad lokacijom kao cjenovni faktor u 5/6 gradova (najizraženije u Malagi i Valenciji). </a:t>
+            </a:r>
           </a:p>
           <a:p>
             <a:pPr marL="0" indent="0" algn="l">
               <a:buNone/>
             </a:pPr>
-            <a:endParaRPr lang="en-US" sz="1200" dirty="0"/>
+            <a:endParaRPr lang="bs-Latn-BA" sz="1200" dirty="0"/>
           </a:p>
           <a:p>
             <a:pPr marL="0" indent="0" algn="l">
               <a:buNone/>
             </a:pPr>
             <a:r>
-              <a:rPr lang="en-US" sz="1200" i="1" dirty="0">
-                <a:solidFill>
-                  <a:srgbClr val="9CA3AF"/>
-                </a:solidFill>
-                <a:latin typeface="Times New Roman" pitchFamily="34" charset="0"/>
-                <a:ea typeface="Times New Roman" pitchFamily="34" charset="-122"/>
-                <a:cs typeface="Times New Roman" pitchFamily="34" charset="-120"/>
-              </a:rPr>
-              <a:t>✓  Glavni zaključak 1</a:t>
-            </a:r>
-            <a:endParaRPr lang="en-US" sz="1200" dirty="0"/>
+              <a:rPr lang="bs-Latn-BA" sz="1200" dirty="0"/>
+              <a:t>✓ Cijeli stan/kuća dosljedno postiže višu cijenu od privatne sobe u svim gradovima (H2 potvrđena). </a:t>
+            </a:r>
           </a:p>
           <a:p>
             <a:pPr marL="0" indent="0" algn="l">
               <a:buNone/>
             </a:pPr>
-            <a:r>
-              <a:rPr lang="en-US" sz="1200" i="1" dirty="0">
-                <a:solidFill>
-                  <a:srgbClr val="9CA3AF"/>
-                </a:solidFill>
-                <a:latin typeface="Times New Roman" pitchFamily="34" charset="0"/>
-                <a:ea typeface="Times New Roman" pitchFamily="34" charset="-122"/>
-                <a:cs typeface="Times New Roman" pitchFamily="34" charset="-120"/>
-              </a:rPr>
-              <a:t>✓  Glavni zaključak 2</a:t>
-            </a:r>
-            <a:endParaRPr lang="en-US" sz="1200" dirty="0"/>
+            <a:endParaRPr lang="bs-Latn-BA" sz="1200" dirty="0"/>
           </a:p>
           <a:p>
             <a:pPr marL="0" indent="0" algn="l">
               <a:buNone/>
             </a:pPr>
             <a:r>
-              <a:rPr lang="en-US" sz="1200" i="1" dirty="0">
-                <a:solidFill>
-                  <a:srgbClr val="9CA3AF"/>
-                </a:solidFill>
-                <a:latin typeface="Times New Roman" pitchFamily="34" charset="0"/>
-                <a:ea typeface="Times New Roman" pitchFamily="34" charset="-122"/>
-                <a:cs typeface="Times New Roman" pitchFamily="34" charset="-120"/>
-              </a:rPr>
-              <a:t>✓  Glavni zaključak 3</a:t>
+              <a:rPr lang="bs-Latn-BA" sz="1200" dirty="0"/>
+              <a:t>✓ Atena i Istanbul nude najbolji omjer cijene i kvalitete; Istanbul i Valencia imaju visok udio nelicenciranog poslovanja (~40%). Ograničenje: jedan vremenski presjek, bez sezonskih podataka.</a:t>
             </a:r>
             <a:endParaRPr lang="en-US" sz="1200" dirty="0"/>
           </a:p>
-          <a:p>
-            <a:pPr marL="0" indent="0" algn="l">
-              <a:buNone/>
-            </a:pPr>
-            <a:endParaRPr lang="en-US" sz="1200" dirty="0"/>
-          </a:p>
-          <a:p>
-            <a:pPr marL="0" indent="0" algn="l">
-              <a:buNone/>
-            </a:pPr>
-            <a:r>
-              <a:rPr lang="en-US" sz="1200" i="1" dirty="0">
-                <a:solidFill>
-                  <a:srgbClr val="9CA3AF"/>
-                </a:solidFill>
-                <a:latin typeface="Times New Roman" pitchFamily="34" charset="0"/>
-                <a:ea typeface="Times New Roman" pitchFamily="34" charset="-122"/>
-                <a:cs typeface="Times New Roman" pitchFamily="34" charset="-120"/>
-              </a:rPr>
-              <a:t>Ograničenja analize i prijedlozi za buduća istraživanja.</a:t>
-            </a:r>
-            <a:endParaRPr lang="en-US" sz="1200" dirty="0"/>
-          </a:p>
         </p:txBody>
       </p:sp>
       <p:sp>
@@ -10988,8 +10018,8 @@
         </p:nvSpPr>
         <p:spPr>
           <a:xfrm>
-            <a:off x="5424678" y="11725524"/>
-            <a:ext cx="5104638" cy="2529972"/>
+            <a:off x="5424678" y="12574266"/>
+            <a:ext cx="5104638" cy="1681229"/>
           </a:xfrm>
           <a:prstGeom prst="rect">
             <a:avLst/>
@@ -11026,7 +10056,7 @@
         </p:nvSpPr>
         <p:spPr>
           <a:xfrm>
-            <a:off x="5424678" y="11725524"/>
+            <a:off x="5431933" y="12610555"/>
             <a:ext cx="5104638" cy="109728"/>
           </a:xfrm>
           <a:prstGeom prst="rect">
@@ -11057,7 +10087,7 @@
         </p:nvSpPr>
         <p:spPr>
           <a:xfrm>
-            <a:off x="5561838" y="11841092"/>
+            <a:off x="5561140" y="12682150"/>
             <a:ext cx="4830318" cy="347472"/>
           </a:xfrm>
           <a:prstGeom prst="rect">
@@ -11102,7 +10132,7 @@
         </p:nvSpPr>
         <p:spPr>
           <a:xfrm>
-            <a:off x="5561838" y="12194404"/>
+            <a:off x="5561838" y="13063084"/>
             <a:ext cx="4830318" cy="0"/>
           </a:xfrm>
           <a:prstGeom prst="line">
@@ -11116,6 +10146,13 @@
             <a:prstDash val="solid"/>
           </a:ln>
         </p:spPr>
+        <p:txBody>
+          <a:bodyPr/>
+          <a:lstStyle/>
+          <a:p>
+            <a:endParaRPr lang="bs-Latn-BA" dirty="0"/>
+          </a:p>
+        </p:txBody>
       </p:sp>
       <p:sp>
         <p:nvSpPr>
@@ -11131,8 +10168,8 @@
         </p:nvSpPr>
         <p:spPr>
           <a:xfrm>
-            <a:off x="5561838" y="12298680"/>
-            <a:ext cx="4830318" cy="1837944"/>
+            <a:off x="5561838" y="13197840"/>
+            <a:ext cx="4830318" cy="938784"/>
           </a:xfrm>
           <a:prstGeom prst="rect">
             <a:avLst/>
@@ -11144,101 +10181,257 @@
           <a:bodyPr wrap="square" lIns="0" tIns="0" rIns="0" bIns="0" rtlCol="0" anchor="t"/>
           <a:lstStyle/>
           <a:p>
+            <a:r>
+              <a:rPr lang="hr-BA" sz="1200" kern="100" dirty="0">
+                <a:effectLst/>
+                <a:latin typeface="Times New Roman" panose="02020603050405020304" pitchFamily="18" charset="0"/>
+                <a:ea typeface="Aptos"/>
+                <a:cs typeface="Times New Roman" panose="02020603050405020304" pitchFamily="18" charset="0"/>
+              </a:rPr>
+              <a:t>Inside Airbnb. (2025). </a:t>
+            </a:r>
+            <a:r>
+              <a:rPr lang="hr-BA" sz="1200" i="1" kern="100" dirty="0">
+                <a:effectLst/>
+                <a:latin typeface="Times New Roman" panose="02020603050405020304" pitchFamily="18" charset="0"/>
+                <a:ea typeface="Aptos"/>
+                <a:cs typeface="Times New Roman" panose="02020603050405020304" pitchFamily="18" charset="0"/>
+              </a:rPr>
+              <a:t>Listings and Neighbourhood Data</a:t>
+            </a:r>
+            <a:r>
+              <a:rPr lang="hr-BA" sz="1200" kern="100" dirty="0">
+                <a:effectLst/>
+                <a:latin typeface="Times New Roman" panose="02020603050405020304" pitchFamily="18" charset="0"/>
+                <a:ea typeface="Aptos"/>
+                <a:cs typeface="Times New Roman" panose="02020603050405020304" pitchFamily="18" charset="0"/>
+              </a:rPr>
+              <a:t> [Skup podataka za gradove: Atena (26.09.2025.), Malaga (30.09.2025.), Istanbul (29.09.2025.), Napulj (22.09.2025.), Rim (14.09.2025.) i Valencia (23.09.2025.)]. Preuzeto sa zvanične platforme Inside Airbnb: </a:t>
+            </a:r>
+            <a:r>
+              <a:rPr lang="hr-BA" sz="1200" u="sng" kern="100" dirty="0">
+                <a:solidFill>
+                  <a:srgbClr val="467886"/>
+                </a:solidFill>
+                <a:effectLst/>
+                <a:latin typeface="Times New Roman" panose="02020603050405020304" pitchFamily="18" charset="0"/>
+                <a:ea typeface="Aptos"/>
+                <a:cs typeface="Times New Roman" panose="02020603050405020304" pitchFamily="18" charset="0"/>
+                <a:hlinkClick r:id="rId2"/>
+              </a:rPr>
+              <a:t>https://insideairbnb.com/get-the-data/</a:t>
+            </a:r>
+            <a:r>
+              <a:rPr lang="hr-BA" sz="1200" kern="100" dirty="0">
+                <a:effectLst/>
+                <a:latin typeface="Times New Roman" panose="02020603050405020304" pitchFamily="18" charset="0"/>
+                <a:ea typeface="Aptos"/>
+                <a:cs typeface="Times New Roman" panose="02020603050405020304" pitchFamily="18" charset="0"/>
+              </a:rPr>
+              <a:t> [Pristupljeno: maj 2026.].</a:t>
+            </a:r>
+            <a:endParaRPr lang="bs-Latn-BA" sz="1200" kern="100" dirty="0">
+              <a:effectLst/>
+              <a:latin typeface="Times New Roman" panose="02020603050405020304" pitchFamily="18" charset="0"/>
+              <a:ea typeface="Aptos"/>
+              <a:cs typeface="Times New Roman" panose="02020603050405020304" pitchFamily="18" charset="0"/>
+            </a:endParaRPr>
+          </a:p>
+          <a:p>
             <a:pPr marL="0" indent="0" algn="l">
               <a:buNone/>
             </a:pPr>
-            <a:r>
-              <a:rPr lang="en-US" sz="1200" i="1" dirty="0">
-                <a:solidFill>
-                  <a:srgbClr val="9CA3AF"/>
-                </a:solidFill>
-                <a:latin typeface="Times New Roman" pitchFamily="34" charset="0"/>
-                <a:ea typeface="Times New Roman" pitchFamily="34" charset="-122"/>
-                <a:cs typeface="Times New Roman" pitchFamily="34" charset="-120"/>
-              </a:rPr>
-              <a:t>Navedite sve izvore (DIEC stil):</a:t>
-            </a:r>
-            <a:endParaRPr lang="en-US" sz="1200" dirty="0"/>
-          </a:p>
-          <a:p>
-            <a:pPr marL="0" indent="0" algn="l">
-              <a:buNone/>
-            </a:pPr>
-            <a:endParaRPr lang="en-US" sz="1200" dirty="0"/>
-          </a:p>
-          <a:p>
-            <a:pPr marL="0" indent="0" algn="l">
-              <a:buNone/>
-            </a:pPr>
-            <a:r>
-              <a:rPr lang="en-US" sz="1200" i="1" dirty="0">
-                <a:solidFill>
-                  <a:srgbClr val="9CA3AF"/>
-                </a:solidFill>
-                <a:latin typeface="Times New Roman" pitchFamily="34" charset="0"/>
-                <a:ea typeface="Times New Roman" pitchFamily="34" charset="-122"/>
-                <a:cs typeface="Times New Roman" pitchFamily="34" charset="-120"/>
-              </a:rPr>
-              <a:t>Članak: Prezime, I. (God.). Naslov. Časopis, Vol(Br), str. XX–XX.</a:t>
-            </a:r>
-            <a:endParaRPr lang="en-US" sz="1200" dirty="0"/>
-          </a:p>
-          <a:p>
-            <a:pPr marL="0" indent="0" algn="l">
-              <a:buNone/>
-            </a:pPr>
-            <a:r>
-              <a:rPr lang="en-US" sz="1200" i="1" dirty="0">
-                <a:solidFill>
-                  <a:srgbClr val="9CA3AF"/>
-                </a:solidFill>
-                <a:latin typeface="Times New Roman" pitchFamily="34" charset="0"/>
-                <a:ea typeface="Times New Roman" pitchFamily="34" charset="-122"/>
-                <a:cs typeface="Times New Roman" pitchFamily="34" charset="-120"/>
-              </a:rPr>
-              <a:t>Knjiga: Prezime, I. (God.). Naslov knjige. Izdavač. Grad.</a:t>
-            </a:r>
-            <a:endParaRPr lang="en-US" sz="1200" dirty="0"/>
-          </a:p>
-          <a:p>
-            <a:pPr marL="0" indent="0" algn="l">
-              <a:buNone/>
-            </a:pPr>
-            <a:r>
-              <a:rPr lang="en-US" sz="1200" i="1" dirty="0">
-                <a:solidFill>
-                  <a:srgbClr val="9CA3AF"/>
-                </a:solidFill>
-                <a:latin typeface="Times New Roman" pitchFamily="34" charset="0"/>
-                <a:ea typeface="Times New Roman" pitchFamily="34" charset="-122"/>
-                <a:cs typeface="Times New Roman" pitchFamily="34" charset="-120"/>
-              </a:rPr>
-              <a:t>Web: Autor (God.). Naslov. Dostupno na: URL. Pristupljeno: DD/MM/GGGG.</a:t>
-            </a:r>
-            <a:endParaRPr lang="en-US" sz="1200" dirty="0"/>
-          </a:p>
-          <a:p>
-            <a:pPr marL="0" indent="0" algn="l">
-              <a:buNone/>
-            </a:pPr>
-            <a:endParaRPr lang="en-US" sz="1200" dirty="0"/>
-          </a:p>
-          <a:p>
-            <a:pPr marL="0" indent="0" algn="l">
-              <a:buNone/>
-            </a:pPr>
-            <a:r>
-              <a:rPr lang="en-US" sz="1200" i="1" dirty="0">
-                <a:solidFill>
-                  <a:srgbClr val="9CA3AF"/>
-                </a:solidFill>
-                <a:latin typeface="Times New Roman" pitchFamily="34" charset="0"/>
-                <a:ea typeface="Times New Roman" pitchFamily="34" charset="-122"/>
-                <a:cs typeface="Times New Roman" pitchFamily="34" charset="-120"/>
-              </a:rPr>
-              <a:t>U tekstu: (Prezime, godina)</a:t>
-            </a:r>
-            <a:endParaRPr lang="en-US" sz="1200" dirty="0"/>
+            <a:endParaRPr lang="en-US" sz="1000" dirty="0"/>
+          </a:p>
+        </p:txBody>
+      </p:sp>
+      <p:pic>
+        <p:nvPicPr>
+          <p:cNvPr id="48" name="Picture 47">
+            <a:extLst>
+              <a:ext uri="{FF2B5EF4-FFF2-40B4-BE49-F238E27FC236}">
+                <a16:creationId xmlns:a16="http://schemas.microsoft.com/office/drawing/2014/main" id="{A3A8BF48-8414-4AE3-856C-E7FA274F3197}"/>
+              </a:ext>
+            </a:extLst>
+          </p:cNvPr>
+          <p:cNvPicPr/>
+          <p:nvPr/>
+        </p:nvPicPr>
+        <p:blipFill>
+          <a:blip r:embed="rId3" cstate="print">
+            <a:extLst>
+              <a:ext uri="{28A0092B-C50C-407E-A947-70E740481C1C}">
+                <a14:useLocalDpi xmlns:a14="http://schemas.microsoft.com/office/drawing/2010/main" val="0"/>
+              </a:ext>
+            </a:extLst>
+          </a:blip>
+          <a:srcRect/>
+          <a:stretch>
+            <a:fillRect/>
+          </a:stretch>
+        </p:blipFill>
+        <p:spPr bwMode="auto">
+          <a:xfrm>
+            <a:off x="5561140" y="3494215"/>
+            <a:ext cx="4831016" cy="2768898"/>
+          </a:xfrm>
+          <a:prstGeom prst="rect">
+            <a:avLst/>
+          </a:prstGeom>
+          <a:noFill/>
+          <a:ln>
+            <a:noFill/>
+          </a:ln>
+        </p:spPr>
+      </p:pic>
+      <p:sp>
+        <p:nvSpPr>
+          <p:cNvPr id="49" name="Text 67">
+            <a:extLst>
+              <a:ext uri="{FF2B5EF4-FFF2-40B4-BE49-F238E27FC236}">
+                <a16:creationId xmlns:a16="http://schemas.microsoft.com/office/drawing/2014/main" id="{5BAAA7EC-6DC7-42CB-B9BC-501C9234E175}"/>
+              </a:ext>
+            </a:extLst>
+          </p:cNvPr>
+          <p:cNvSpPr/>
+          <p:nvPr/>
+        </p:nvSpPr>
+        <p:spPr>
+          <a:xfrm>
+            <a:off x="5446452" y="6397868"/>
+            <a:ext cx="4830318" cy="238594"/>
+          </a:xfrm>
+          <a:prstGeom prst="rect">
+            <a:avLst/>
+          </a:prstGeom>
+          <a:noFill/>
+          <a:ln/>
+        </p:spPr>
+        <p:txBody>
+          <a:bodyPr wrap="square" lIns="0" tIns="0" rIns="0" bIns="0" rtlCol="0" anchor="t"/>
+          <a:lstStyle/>
+          <a:p>
+            <a:pPr algn="ctr"/>
+            <a:r>
+              <a:rPr lang="bs-Latn-BA" sz="1000" dirty="0">
+                <a:latin typeface="Times New Roman" panose="02020603050405020304" pitchFamily="18" charset="0"/>
+                <a:cs typeface="Times New Roman" panose="02020603050405020304" pitchFamily="18" charset="0"/>
+              </a:rPr>
+              <a:t>Slika 1 – Distribucija cijena </a:t>
+            </a:r>
+            <a:r>
+              <a:rPr lang="bs-Latn-BA" sz="1000" dirty="0" err="1">
+                <a:latin typeface="Times New Roman" panose="02020603050405020304" pitchFamily="18" charset="0"/>
+                <a:cs typeface="Times New Roman" panose="02020603050405020304" pitchFamily="18" charset="0"/>
+              </a:rPr>
+              <a:t>Airbnb</a:t>
+            </a:r>
+            <a:r>
+              <a:rPr lang="bs-Latn-BA" sz="1000" dirty="0">
+                <a:latin typeface="Times New Roman" panose="02020603050405020304" pitchFamily="18" charset="0"/>
+                <a:cs typeface="Times New Roman" panose="02020603050405020304" pitchFamily="18" charset="0"/>
+              </a:rPr>
+              <a:t> smještaja po gradu</a:t>
+            </a:r>
+            <a:endParaRPr lang="en-US" sz="700" dirty="0">
+              <a:latin typeface="Times New Roman" panose="02020603050405020304" pitchFamily="18" charset="0"/>
+              <a:cs typeface="Times New Roman" panose="02020603050405020304" pitchFamily="18" charset="0"/>
+            </a:endParaRPr>
+          </a:p>
+        </p:txBody>
+      </p:sp>
+      <p:pic>
+        <p:nvPicPr>
+          <p:cNvPr id="50" name="Picture 49">
+            <a:extLst>
+              <a:ext uri="{FF2B5EF4-FFF2-40B4-BE49-F238E27FC236}">
+                <a16:creationId xmlns:a16="http://schemas.microsoft.com/office/drawing/2014/main" id="{2535768D-594C-40EC-815F-489FE34C92DC}"/>
+              </a:ext>
+            </a:extLst>
+          </p:cNvPr>
+          <p:cNvPicPr/>
+          <p:nvPr/>
+        </p:nvPicPr>
+        <p:blipFill>
+          <a:blip r:embed="rId4" cstate="print">
+            <a:extLst>
+              <a:ext uri="{28A0092B-C50C-407E-A947-70E740481C1C}">
+                <a14:useLocalDpi xmlns:a14="http://schemas.microsoft.com/office/drawing/2010/main" val="0"/>
+              </a:ext>
+            </a:extLst>
+          </a:blip>
+          <a:srcRect/>
+          <a:stretch>
+            <a:fillRect/>
+          </a:stretch>
+        </p:blipFill>
+        <p:spPr bwMode="auto">
+          <a:xfrm>
+            <a:off x="5561140" y="6771217"/>
+            <a:ext cx="4908740" cy="2799446"/>
+          </a:xfrm>
+          <a:prstGeom prst="rect">
+            <a:avLst/>
+          </a:prstGeom>
+          <a:noFill/>
+          <a:ln>
+            <a:noFill/>
+          </a:ln>
+        </p:spPr>
+      </p:pic>
+      <p:sp>
+        <p:nvSpPr>
+          <p:cNvPr id="51" name="Text 67">
+            <a:extLst>
+              <a:ext uri="{FF2B5EF4-FFF2-40B4-BE49-F238E27FC236}">
+                <a16:creationId xmlns:a16="http://schemas.microsoft.com/office/drawing/2014/main" id="{50248480-3B58-4497-9F85-80DA1CD9CA53}"/>
+              </a:ext>
+            </a:extLst>
+          </p:cNvPr>
+          <p:cNvSpPr/>
+          <p:nvPr/>
+        </p:nvSpPr>
+        <p:spPr>
+          <a:xfrm>
+            <a:off x="5561838" y="9651585"/>
+            <a:ext cx="4830318" cy="238594"/>
+          </a:xfrm>
+          <a:prstGeom prst="rect">
+            <a:avLst/>
+          </a:prstGeom>
+          <a:noFill/>
+          <a:ln/>
+        </p:spPr>
+        <p:txBody>
+          <a:bodyPr wrap="square" lIns="0" tIns="0" rIns="0" bIns="0" rtlCol="0" anchor="t"/>
+          <a:lstStyle/>
+          <a:p>
+            <a:pPr algn="ctr"/>
+            <a:r>
+              <a:rPr lang="bs-Latn-BA" sz="1000" dirty="0">
+                <a:latin typeface="Times New Roman" panose="02020603050405020304" pitchFamily="18" charset="0"/>
+                <a:cs typeface="Times New Roman" panose="02020603050405020304" pitchFamily="18" charset="0"/>
+              </a:rPr>
+              <a:t>Slika 2 – Lokacija </a:t>
+            </a:r>
+            <a:r>
+              <a:rPr lang="bs-Latn-BA" sz="1000" dirty="0" err="1">
+                <a:latin typeface="Times New Roman" panose="02020603050405020304" pitchFamily="18" charset="0"/>
+                <a:cs typeface="Times New Roman" panose="02020603050405020304" pitchFamily="18" charset="0"/>
+              </a:rPr>
+              <a:t>vs</a:t>
+            </a:r>
+            <a:r>
+              <a:rPr lang="bs-Latn-BA" sz="1000" dirty="0">
+                <a:latin typeface="Times New Roman" panose="02020603050405020304" pitchFamily="18" charset="0"/>
+                <a:cs typeface="Times New Roman" panose="02020603050405020304" pitchFamily="18" charset="0"/>
+              </a:rPr>
+              <a:t> tip smještaja</a:t>
+            </a:r>
+            <a:endParaRPr lang="en-US" sz="700" dirty="0">
+              <a:latin typeface="Times New Roman" panose="02020603050405020304" pitchFamily="18" charset="0"/>
+              <a:cs typeface="Times New Roman" panose="02020603050405020304" pitchFamily="18" charset="0"/>
+            </a:endParaRPr>
           </a:p>
         </p:txBody>
       </p:sp>

--- a/Salkicic_Nukic_Halilbasic.pptx
+++ b/Salkicic_Nukic_Halilbasic.pptx
@@ -290,6 +290,13 @@
             <a:prstDash val="solid"/>
           </a:ln>
         </p:spPr>
+        <p:txBody>
+          <a:bodyPr/>
+          <a:lstStyle/>
+          <a:p>
+            <a:endParaRPr lang="en-US"/>
+          </a:p>
+        </p:txBody>
       </p:sp>
       <p:sp>
         <p:nvSpPr>
@@ -321,6 +328,13 @@
             <a:prstDash val="solid"/>
           </a:ln>
         </p:spPr>
+        <p:txBody>
+          <a:bodyPr/>
+          <a:lstStyle/>
+          <a:p>
+            <a:endParaRPr lang="en-US"/>
+          </a:p>
+        </p:txBody>
       </p:sp>
       <p:sp>
         <p:nvSpPr>
@@ -352,6 +366,13 @@
             <a:prstDash val="solid"/>
           </a:ln>
         </p:spPr>
+        <p:txBody>
+          <a:bodyPr/>
+          <a:lstStyle/>
+          <a:p>
+            <a:endParaRPr lang="en-US"/>
+          </a:p>
+        </p:txBody>
       </p:sp>
       <p:sp>
         <p:nvSpPr>
@@ -655,6 +676,13 @@
             <a:prstDash val="solid"/>
           </a:ln>
         </p:spPr>
+        <p:txBody>
+          <a:bodyPr/>
+          <a:lstStyle/>
+          <a:p>
+            <a:endParaRPr lang="en-US"/>
+          </a:p>
+        </p:txBody>
       </p:sp>
       <p:sp>
         <p:nvSpPr>
@@ -686,6 +714,13 @@
             <a:prstDash val="solid"/>
           </a:ln>
         </p:spPr>
+        <p:txBody>
+          <a:bodyPr/>
+          <a:lstStyle/>
+          <a:p>
+            <a:endParaRPr lang="en-US"/>
+          </a:p>
+        </p:txBody>
       </p:sp>
       <p:sp>
         <p:nvSpPr>
@@ -717,6 +752,13 @@
             <a:prstDash val="solid"/>
           </a:ln>
         </p:spPr>
+        <p:txBody>
+          <a:bodyPr/>
+          <a:lstStyle/>
+          <a:p>
+            <a:endParaRPr lang="en-US"/>
+          </a:p>
+        </p:txBody>
       </p:sp>
       <p:sp>
         <p:nvSpPr>
@@ -4524,6 +4566,13 @@
             <a:prstDash val="solid"/>
           </a:ln>
         </p:spPr>
+        <p:txBody>
+          <a:bodyPr/>
+          <a:lstStyle/>
+          <a:p>
+            <a:endParaRPr lang="en-US"/>
+          </a:p>
+        </p:txBody>
       </p:sp>
       <p:sp>
         <p:nvSpPr>
@@ -4555,6 +4604,13 @@
             <a:prstDash val="solid"/>
           </a:ln>
         </p:spPr>
+        <p:txBody>
+          <a:bodyPr/>
+          <a:lstStyle/>
+          <a:p>
+            <a:endParaRPr lang="en-US"/>
+          </a:p>
+        </p:txBody>
       </p:sp>
       <p:sp>
         <p:nvSpPr>
@@ -4676,6 +4732,13 @@
             <a:prstDash val="solid"/>
           </a:ln>
         </p:spPr>
+        <p:txBody>
+          <a:bodyPr/>
+          <a:lstStyle/>
+          <a:p>
+            <a:endParaRPr lang="en-US"/>
+          </a:p>
+        </p:txBody>
       </p:sp>
       <p:sp>
         <p:nvSpPr>
@@ -4707,6 +4770,13 @@
             <a:prstDash val="solid"/>
           </a:ln>
         </p:spPr>
+        <p:txBody>
+          <a:bodyPr/>
+          <a:lstStyle/>
+          <a:p>
+            <a:endParaRPr lang="en-US"/>
+          </a:p>
+        </p:txBody>
       </p:sp>
       <p:sp>
         <p:nvSpPr>
@@ -4736,6 +4806,13 @@
             <a:prstDash val="dash"/>
           </a:ln>
         </p:spPr>
+        <p:txBody>
+          <a:bodyPr/>
+          <a:lstStyle/>
+          <a:p>
+            <a:endParaRPr lang="en-US"/>
+          </a:p>
+        </p:txBody>
       </p:sp>
       <p:sp>
         <p:nvSpPr>
@@ -4925,6 +5002,13 @@
             <a:prstDash val="solid"/>
           </a:ln>
         </p:spPr>
+        <p:txBody>
+          <a:bodyPr/>
+          <a:lstStyle/>
+          <a:p>
+            <a:endParaRPr lang="en-US"/>
+          </a:p>
+        </p:txBody>
       </p:sp>
       <p:sp>
         <p:nvSpPr>
@@ -4956,6 +5040,13 @@
             <a:prstDash val="solid"/>
           </a:ln>
         </p:spPr>
+        <p:txBody>
+          <a:bodyPr/>
+          <a:lstStyle/>
+          <a:p>
+            <a:endParaRPr lang="en-US"/>
+          </a:p>
+        </p:txBody>
       </p:sp>
       <p:sp>
         <p:nvSpPr>
@@ -5030,6 +5121,13 @@
             <a:prstDash val="dash"/>
           </a:ln>
         </p:spPr>
+        <p:txBody>
+          <a:bodyPr/>
+          <a:lstStyle/>
+          <a:p>
+            <a:endParaRPr lang="en-US"/>
+          </a:p>
+        </p:txBody>
       </p:sp>
       <p:sp>
         <p:nvSpPr>
@@ -5218,6 +5316,13 @@
             <a:prstDash val="solid"/>
           </a:ln>
         </p:spPr>
+        <p:txBody>
+          <a:bodyPr/>
+          <a:lstStyle/>
+          <a:p>
+            <a:endParaRPr lang="en-US"/>
+          </a:p>
+        </p:txBody>
       </p:sp>
       <p:sp>
         <p:nvSpPr>
@@ -5249,6 +5354,13 @@
             <a:prstDash val="solid"/>
           </a:ln>
         </p:spPr>
+        <p:txBody>
+          <a:bodyPr/>
+          <a:lstStyle/>
+          <a:p>
+            <a:endParaRPr lang="en-US"/>
+          </a:p>
+        </p:txBody>
       </p:sp>
       <p:sp>
         <p:nvSpPr>
@@ -5323,6 +5435,13 @@
             <a:prstDash val="dash"/>
           </a:ln>
         </p:spPr>
+        <p:txBody>
+          <a:bodyPr/>
+          <a:lstStyle/>
+          <a:p>
+            <a:endParaRPr lang="en-US"/>
+          </a:p>
+        </p:txBody>
       </p:sp>
       <p:sp>
         <p:nvSpPr>
@@ -5506,6 +5625,13 @@
             <a:prstDash val="solid"/>
           </a:ln>
         </p:spPr>
+        <p:txBody>
+          <a:bodyPr/>
+          <a:lstStyle/>
+          <a:p>
+            <a:endParaRPr lang="en-US"/>
+          </a:p>
+        </p:txBody>
       </p:sp>
       <p:sp>
         <p:nvSpPr>
@@ -5618,6 +5744,13 @@
             <a:prstDash val="dash"/>
           </a:ln>
         </p:spPr>
+        <p:txBody>
+          <a:bodyPr/>
+          <a:lstStyle/>
+          <a:p>
+            <a:endParaRPr lang="en-US"/>
+          </a:p>
+        </p:txBody>
       </p:sp>
       <p:sp>
         <p:nvSpPr>
@@ -5831,6 +5964,13 @@
             <a:prstDash val="solid"/>
           </a:ln>
         </p:spPr>
+        <p:txBody>
+          <a:bodyPr/>
+          <a:lstStyle/>
+          <a:p>
+            <a:endParaRPr lang="en-US"/>
+          </a:p>
+        </p:txBody>
       </p:sp>
       <p:sp>
         <p:nvSpPr>
@@ -5862,6 +6002,13 @@
             <a:prstDash val="solid"/>
           </a:ln>
         </p:spPr>
+        <p:txBody>
+          <a:bodyPr/>
+          <a:lstStyle/>
+          <a:p>
+            <a:endParaRPr lang="en-US"/>
+          </a:p>
+        </p:txBody>
       </p:sp>
       <p:sp>
         <p:nvSpPr>
@@ -5936,6 +6083,13 @@
             <a:prstDash val="dash"/>
           </a:ln>
         </p:spPr>
+        <p:txBody>
+          <a:bodyPr/>
+          <a:lstStyle/>
+          <a:p>
+            <a:endParaRPr lang="en-US"/>
+          </a:p>
+        </p:txBody>
       </p:sp>
       <p:sp>
         <p:nvSpPr>
@@ -6041,6 +6195,13 @@
             <a:prstDash val="solid"/>
           </a:ln>
         </p:spPr>
+        <p:txBody>
+          <a:bodyPr/>
+          <a:lstStyle/>
+          <a:p>
+            <a:endParaRPr lang="en-US"/>
+          </a:p>
+        </p:txBody>
       </p:sp>
       <p:sp>
         <p:nvSpPr>
@@ -6072,6 +6233,13 @@
             <a:prstDash val="solid"/>
           </a:ln>
         </p:spPr>
+        <p:txBody>
+          <a:bodyPr/>
+          <a:lstStyle/>
+          <a:p>
+            <a:endParaRPr lang="en-US"/>
+          </a:p>
+        </p:txBody>
       </p:sp>
       <p:sp>
         <p:nvSpPr>
@@ -6146,6 +6314,13 @@
             <a:prstDash val="dash"/>
           </a:ln>
         </p:spPr>
+        <p:txBody>
+          <a:bodyPr/>
+          <a:lstStyle/>
+          <a:p>
+            <a:endParaRPr lang="en-US"/>
+          </a:p>
+        </p:txBody>
       </p:sp>
       <p:sp>
         <p:nvSpPr>
@@ -6358,6 +6533,13 @@
             <a:prstDash val="solid"/>
           </a:ln>
         </p:spPr>
+        <p:txBody>
+          <a:bodyPr/>
+          <a:lstStyle/>
+          <a:p>
+            <a:endParaRPr lang="en-US"/>
+          </a:p>
+        </p:txBody>
       </p:sp>
       <p:sp>
         <p:nvSpPr>
@@ -6389,6 +6571,13 @@
             <a:prstDash val="solid"/>
           </a:ln>
         </p:spPr>
+        <p:txBody>
+          <a:bodyPr/>
+          <a:lstStyle/>
+          <a:p>
+            <a:endParaRPr lang="en-US"/>
+          </a:p>
+        </p:txBody>
       </p:sp>
       <p:sp>
         <p:nvSpPr>
@@ -6463,6 +6652,13 @@
             <a:prstDash val="dash"/>
           </a:ln>
         </p:spPr>
+        <p:txBody>
+          <a:bodyPr/>
+          <a:lstStyle/>
+          <a:p>
+            <a:endParaRPr lang="en-US"/>
+          </a:p>
+        </p:txBody>
       </p:sp>
       <p:sp>
         <p:nvSpPr>
@@ -6801,6 +6997,13 @@
             <a:prstDash val="solid"/>
           </a:ln>
         </p:spPr>
+        <p:txBody>
+          <a:bodyPr/>
+          <a:lstStyle/>
+          <a:p>
+            <a:endParaRPr lang="en-US"/>
+          </a:p>
+        </p:txBody>
       </p:sp>
       <p:sp>
         <p:nvSpPr>
@@ -6832,6 +7035,13 @@
             <a:prstDash val="solid"/>
           </a:ln>
         </p:spPr>
+        <p:txBody>
+          <a:bodyPr/>
+          <a:lstStyle/>
+          <a:p>
+            <a:endParaRPr lang="en-US"/>
+          </a:p>
+        </p:txBody>
       </p:sp>
       <p:sp>
         <p:nvSpPr>
@@ -6906,6 +7116,13 @@
             <a:prstDash val="dash"/>
           </a:ln>
         </p:spPr>
+        <p:txBody>
+          <a:bodyPr/>
+          <a:lstStyle/>
+          <a:p>
+            <a:endParaRPr lang="en-US"/>
+          </a:p>
+        </p:txBody>
       </p:sp>
       <p:sp>
         <p:nvSpPr>
@@ -7462,6 +7679,13 @@
             <a:prstDash val="solid"/>
           </a:ln>
         </p:spPr>
+        <p:txBody>
+          <a:bodyPr/>
+          <a:lstStyle/>
+          <a:p>
+            <a:endParaRPr lang="en-US"/>
+          </a:p>
+        </p:txBody>
       </p:sp>
       <p:sp>
         <p:nvSpPr>
@@ -7493,6 +7717,13 @@
             <a:prstDash val="solid"/>
           </a:ln>
         </p:spPr>
+        <p:txBody>
+          <a:bodyPr/>
+          <a:lstStyle/>
+          <a:p>
+            <a:endParaRPr lang="en-US"/>
+          </a:p>
+        </p:txBody>
       </p:sp>
       <p:sp>
         <p:nvSpPr>
@@ -7524,6 +7755,13 @@
             <a:prstDash val="solid"/>
           </a:ln>
         </p:spPr>
+        <p:txBody>
+          <a:bodyPr/>
+          <a:lstStyle/>
+          <a:p>
+            <a:endParaRPr lang="en-US"/>
+          </a:p>
+        </p:txBody>
       </p:sp>
       <p:sp>
         <p:nvSpPr>
@@ -7555,6 +7793,13 @@
             <a:prstDash val="solid"/>
           </a:ln>
         </p:spPr>
+        <p:txBody>
+          <a:bodyPr/>
+          <a:lstStyle/>
+          <a:p>
+            <a:endParaRPr lang="en-US"/>
+          </a:p>
+        </p:txBody>
       </p:sp>
       <p:sp>
         <p:nvSpPr>
@@ -7586,6 +7831,13 @@
             <a:prstDash val="solid"/>
           </a:ln>
         </p:spPr>
+        <p:txBody>
+          <a:bodyPr/>
+          <a:lstStyle/>
+          <a:p>
+            <a:endParaRPr lang="en-US"/>
+          </a:p>
+        </p:txBody>
       </p:sp>
       <p:sp>
         <p:nvSpPr>
@@ -7617,6 +7869,13 @@
             <a:prstDash val="solid"/>
           </a:ln>
         </p:spPr>
+        <p:txBody>
+          <a:bodyPr/>
+          <a:lstStyle/>
+          <a:p>
+            <a:endParaRPr lang="en-US"/>
+          </a:p>
+        </p:txBody>
       </p:sp>
       <p:sp>
         <p:nvSpPr>
@@ -7648,6 +7907,13 @@
             <a:prstDash val="solid"/>
           </a:ln>
         </p:spPr>
+        <p:txBody>
+          <a:bodyPr/>
+          <a:lstStyle/>
+          <a:p>
+            <a:endParaRPr lang="en-US"/>
+          </a:p>
+        </p:txBody>
       </p:sp>
       <p:sp>
         <p:nvSpPr>
@@ -7679,6 +7945,13 @@
             <a:prstDash val="solid"/>
           </a:ln>
         </p:spPr>
+        <p:txBody>
+          <a:bodyPr/>
+          <a:lstStyle/>
+          <a:p>
+            <a:endParaRPr lang="en-US"/>
+          </a:p>
+        </p:txBody>
       </p:sp>
       <p:sp>
         <p:nvSpPr>
@@ -7710,6 +7983,13 @@
             <a:prstDash val="solid"/>
           </a:ln>
         </p:spPr>
+        <p:txBody>
+          <a:bodyPr/>
+          <a:lstStyle/>
+          <a:p>
+            <a:endParaRPr lang="en-US"/>
+          </a:p>
+        </p:txBody>
       </p:sp>
       <p:sp>
         <p:nvSpPr>
@@ -7741,6 +8021,13 @@
             <a:prstDash val="solid"/>
           </a:ln>
         </p:spPr>
+        <p:txBody>
+          <a:bodyPr/>
+          <a:lstStyle/>
+          <a:p>
+            <a:endParaRPr lang="en-US"/>
+          </a:p>
+        </p:txBody>
       </p:sp>
       <p:sp>
         <p:nvSpPr>
@@ -7815,6 +8102,13 @@
             <a:prstDash val="dash"/>
           </a:ln>
         </p:spPr>
+        <p:txBody>
+          <a:bodyPr/>
+          <a:lstStyle/>
+          <a:p>
+            <a:endParaRPr lang="en-US"/>
+          </a:p>
+        </p:txBody>
       </p:sp>
       <p:sp>
         <p:nvSpPr>
@@ -8680,11 +8974,8 @@
           <a:bodyPr wrap="square" lIns="0" tIns="0" rIns="0" bIns="0" rtlCol="0" anchor="ctr"/>
           <a:lstStyle/>
           <a:p>
-            <a:pPr marL="0" indent="0" algn="l">
-              <a:buNone/>
-            </a:pPr>
-            <a:r>
-              <a:rPr lang="bs-Latn-BA" sz="2600" b="1" dirty="0" err="1">
+            <a:r>
+              <a:rPr lang="bs-Latn-BA" sz="2600" b="1" dirty="0">
                 <a:solidFill>
                   <a:srgbClr val="FFFFFF"/>
                 </a:solidFill>
@@ -8692,18 +8983,7 @@
                 <a:ea typeface="Times New Roman" pitchFamily="34" charset="-122"/>
                 <a:cs typeface="Times New Roman" pitchFamily="34" charset="-120"/>
               </a:rPr>
-              <a:t>Airbnb</a:t>
-            </a:r>
-            <a:r>
-              <a:rPr lang="bs-Latn-BA" sz="2600" b="1" dirty="0">
-                <a:solidFill>
-                  <a:srgbClr val="FFFFFF"/>
-                </a:solidFill>
-                <a:latin typeface="Times New Roman" pitchFamily="34" charset="0"/>
-                <a:ea typeface="Times New Roman" pitchFamily="34" charset="-122"/>
-                <a:cs typeface="Times New Roman" pitchFamily="34" charset="-120"/>
-              </a:rPr>
-              <a:t> cjenovni obrasci u mediteranskim gradovima</a:t>
+              <a:t>Airbnb cjenovni obrasci u mediteranskim gradovima</a:t>
             </a:r>
             <a:endParaRPr lang="en-US" sz="2600" dirty="0"/>
           </a:p>
@@ -8745,10 +9025,10 @@
                 <a:ea typeface="Times New Roman" pitchFamily="34" charset="-122"/>
                 <a:cs typeface="Times New Roman" pitchFamily="34" charset="-120"/>
               </a:rPr>
-              <a:t>Ajnur </a:t>
-            </a:r>
-            <a:r>
-              <a:rPr lang="bs-Latn-BA" sz="1000" i="1" dirty="0" err="1">
+              <a:t>Ajnur Nukić (ajnur.nukic2002@gmail.com) </a:t>
+            </a:r>
+            <a:r>
+              <a:rPr lang="en-US" sz="1000" i="1" dirty="0">
                 <a:solidFill>
                   <a:srgbClr val="CBD5E1"/>
                 </a:solidFill>
@@ -8756,7 +9036,7 @@
                 <a:ea typeface="Times New Roman" pitchFamily="34" charset="-122"/>
                 <a:cs typeface="Times New Roman" pitchFamily="34" charset="-120"/>
               </a:rPr>
-              <a:t>Nukić</a:t>
+              <a:t>|  </a:t>
             </a:r>
             <a:r>
               <a:rPr lang="bs-Latn-BA" sz="1000" i="1" dirty="0">
@@ -8767,7 +9047,7 @@
                 <a:ea typeface="Times New Roman" pitchFamily="34" charset="-122"/>
                 <a:cs typeface="Times New Roman" pitchFamily="34" charset="-120"/>
               </a:rPr>
-              <a:t> (ajnur.nukic2002@gmail.com) </a:t>
+              <a:t>Belma Salkičić </a:t>
             </a:r>
             <a:r>
               <a:rPr lang="en-US" sz="1000" i="1" dirty="0">
@@ -8778,7 +9058,7 @@
                 <a:ea typeface="Times New Roman" pitchFamily="34" charset="-122"/>
                 <a:cs typeface="Times New Roman" pitchFamily="34" charset="-120"/>
               </a:rPr>
-              <a:t>|  </a:t>
+              <a:t>(belma7salkicic@gmail.com)  |  </a:t>
             </a:r>
             <a:r>
               <a:rPr lang="bs-Latn-BA" sz="1000" i="1" dirty="0">
@@ -8789,10 +9069,10 @@
                 <a:ea typeface="Times New Roman" pitchFamily="34" charset="-122"/>
                 <a:cs typeface="Times New Roman" pitchFamily="34" charset="-120"/>
               </a:rPr>
-              <a:t>Belma </a:t>
-            </a:r>
-            <a:r>
-              <a:rPr lang="bs-Latn-BA" sz="1000" i="1" dirty="0" err="1">
+              <a:t>Demir Halilbašić</a:t>
+            </a:r>
+            <a:r>
+              <a:rPr lang="en-US" sz="1000" i="1" dirty="0">
                 <a:solidFill>
                   <a:srgbClr val="CBD5E1"/>
                 </a:solidFill>
@@ -8800,61 +9080,6 @@
                 <a:ea typeface="Times New Roman" pitchFamily="34" charset="-122"/>
                 <a:cs typeface="Times New Roman" pitchFamily="34" charset="-120"/>
               </a:rPr>
-              <a:t>Salkičić</a:t>
-            </a:r>
-            <a:r>
-              <a:rPr lang="en-US" sz="1000" i="1" dirty="0">
-                <a:solidFill>
-                  <a:srgbClr val="CBD5E1"/>
-                </a:solidFill>
-                <a:latin typeface="Times New Roman" pitchFamily="34" charset="0"/>
-                <a:ea typeface="Times New Roman" pitchFamily="34" charset="-122"/>
-                <a:cs typeface="Times New Roman" pitchFamily="34" charset="-120"/>
-              </a:rPr>
-              <a:t>(belma7salkicic@gmail.com)  |  </a:t>
-            </a:r>
-            <a:r>
-              <a:rPr lang="bs-Latn-BA" sz="1000" i="1" dirty="0" err="1">
-                <a:solidFill>
-                  <a:srgbClr val="CBD5E1"/>
-                </a:solidFill>
-                <a:latin typeface="Times New Roman" pitchFamily="34" charset="0"/>
-                <a:ea typeface="Times New Roman" pitchFamily="34" charset="-122"/>
-                <a:cs typeface="Times New Roman" pitchFamily="34" charset="-120"/>
-              </a:rPr>
-              <a:t>Demir</a:t>
-            </a:r>
-            <a:r>
-              <a:rPr lang="bs-Latn-BA" sz="1000" i="1" dirty="0">
-                <a:solidFill>
-                  <a:srgbClr val="CBD5E1"/>
-                </a:solidFill>
-                <a:latin typeface="Times New Roman" pitchFamily="34" charset="0"/>
-                <a:ea typeface="Times New Roman" pitchFamily="34" charset="-122"/>
-                <a:cs typeface="Times New Roman" pitchFamily="34" charset="-120"/>
-              </a:rPr>
-              <a:t> </a:t>
-            </a:r>
-            <a:r>
-              <a:rPr lang="bs-Latn-BA" sz="1000" i="1" dirty="0" err="1">
-                <a:solidFill>
-                  <a:srgbClr val="CBD5E1"/>
-                </a:solidFill>
-                <a:latin typeface="Times New Roman" pitchFamily="34" charset="0"/>
-                <a:ea typeface="Times New Roman" pitchFamily="34" charset="-122"/>
-                <a:cs typeface="Times New Roman" pitchFamily="34" charset="-120"/>
-              </a:rPr>
-              <a:t>Halilbašić</a:t>
-            </a:r>
-            <a:r>
-              <a:rPr lang="en-US" sz="1000" i="1" dirty="0">
-                <a:solidFill>
-                  <a:srgbClr val="CBD5E1"/>
-                </a:solidFill>
-                <a:latin typeface="Times New Roman" pitchFamily="34" charset="0"/>
-                <a:ea typeface="Times New Roman" pitchFamily="34" charset="-122"/>
-                <a:cs typeface="Times New Roman" pitchFamily="34" charset="-120"/>
-              </a:rPr>
               <a:t> (demirhalilbasic@gmail.com)</a:t>
             </a:r>
             <a:endParaRPr lang="en-US" sz="1000" dirty="0"/>
@@ -8876,7 +9101,7 @@
         <p:spPr>
           <a:xfrm>
             <a:off x="160020" y="2788920"/>
-            <a:ext cx="5104638" cy="2148840"/>
+            <a:ext cx="5104638" cy="1770826"/>
           </a:xfrm>
           <a:prstGeom prst="rect">
             <a:avLst/>
@@ -8936,6 +9161,13 @@
             <a:prstDash val="solid"/>
           </a:ln>
         </p:spPr>
+        <p:txBody>
+          <a:bodyPr/>
+          <a:lstStyle/>
+          <a:p>
+            <a:endParaRPr lang="en-US"/>
+          </a:p>
+        </p:txBody>
       </p:sp>
       <p:sp>
         <p:nvSpPr>
@@ -9010,6 +9242,13 @@
             <a:prstDash val="solid"/>
           </a:ln>
         </p:spPr>
+        <p:txBody>
+          <a:bodyPr/>
+          <a:lstStyle/>
+          <a:p>
+            <a:endParaRPr lang="en-US"/>
+          </a:p>
+        </p:txBody>
       </p:sp>
       <p:sp>
         <p:nvSpPr>
@@ -9026,7 +9265,7 @@
         <p:spPr>
           <a:xfrm>
             <a:off x="297180" y="3383279"/>
-            <a:ext cx="4830318" cy="1483993"/>
+            <a:ext cx="4830318" cy="1080392"/>
           </a:xfrm>
           <a:prstGeom prst="rect">
             <a:avLst/>
@@ -9038,61 +9277,83 @@
           <a:bodyPr wrap="square" lIns="0" tIns="0" rIns="0" bIns="0" rtlCol="0" anchor="t"/>
           <a:lstStyle/>
           <a:p>
-            <a:r>
-              <a:rPr lang="bs-Latn-BA" sz="1200" dirty="0" err="1">
-                <a:latin typeface="Times New Roman" panose="02020603050405020304" pitchFamily="18" charset="0"/>
-                <a:cs typeface="Times New Roman" panose="02020603050405020304" pitchFamily="18" charset="0"/>
-              </a:rPr>
-              <a:t>Istraživanje</a:t>
-            </a:r>
+            <a:pPr algn="just"/>
             <a:r>
               <a:rPr lang="bs-Latn-BA" sz="1200" dirty="0">
                 <a:latin typeface="Times New Roman" panose="02020603050405020304" pitchFamily="18" charset="0"/>
                 <a:cs typeface="Times New Roman" panose="02020603050405020304" pitchFamily="18" charset="0"/>
               </a:rPr>
-              <a:t> analizira faktore koji određuju cijenu </a:t>
-            </a:r>
-            <a:r>
-              <a:rPr lang="bs-Latn-BA" sz="1200" dirty="0" err="1">
-                <a:latin typeface="Times New Roman" panose="02020603050405020304" pitchFamily="18" charset="0"/>
-                <a:cs typeface="Times New Roman" panose="02020603050405020304" pitchFamily="18" charset="0"/>
-              </a:rPr>
-              <a:t>Airbnb</a:t>
+              <a:t>Istraživanje analizira faktore koji određuju cijenu Airbnb smještaja u </a:t>
+            </a:r>
+            <a:r>
+              <a:rPr lang="en-US" sz="1200" dirty="0" err="1">
+                <a:latin typeface="Times New Roman" panose="02020603050405020304" pitchFamily="18" charset="0"/>
+                <a:cs typeface="Times New Roman" panose="02020603050405020304" pitchFamily="18" charset="0"/>
+              </a:rPr>
+              <a:t>šest</a:t>
+            </a:r>
+            <a:r>
+              <a:rPr lang="en-US" sz="1200" dirty="0">
+                <a:latin typeface="Times New Roman" panose="02020603050405020304" pitchFamily="18" charset="0"/>
+                <a:cs typeface="Times New Roman" panose="02020603050405020304" pitchFamily="18" charset="0"/>
+              </a:rPr>
+              <a:t> </a:t>
+            </a:r>
+            <a:r>
+              <a:rPr lang="en-US" sz="1200" dirty="0" err="1">
+                <a:latin typeface="Times New Roman" panose="02020603050405020304" pitchFamily="18" charset="0"/>
+                <a:cs typeface="Times New Roman" panose="02020603050405020304" pitchFamily="18" charset="0"/>
+              </a:rPr>
+              <a:t>mediteranskih</a:t>
+            </a:r>
+            <a:r>
+              <a:rPr lang="en-US" sz="1200" dirty="0">
+                <a:latin typeface="Times New Roman" panose="02020603050405020304" pitchFamily="18" charset="0"/>
+                <a:cs typeface="Times New Roman" panose="02020603050405020304" pitchFamily="18" charset="0"/>
+              </a:rPr>
+              <a:t> </a:t>
+            </a:r>
+            <a:r>
+              <a:rPr lang="en-US" sz="1200" dirty="0" err="1">
+                <a:latin typeface="Times New Roman" panose="02020603050405020304" pitchFamily="18" charset="0"/>
+                <a:cs typeface="Times New Roman" panose="02020603050405020304" pitchFamily="18" charset="0"/>
+              </a:rPr>
+              <a:t>i</a:t>
+            </a:r>
+            <a:r>
+              <a:rPr lang="en-US" sz="1200" dirty="0">
+                <a:latin typeface="Times New Roman" panose="02020603050405020304" pitchFamily="18" charset="0"/>
+                <a:cs typeface="Times New Roman" panose="02020603050405020304" pitchFamily="18" charset="0"/>
+              </a:rPr>
+              <a:t> </a:t>
+            </a:r>
+            <a:r>
+              <a:rPr lang="en-US" sz="1200" dirty="0" err="1">
+                <a:latin typeface="Times New Roman" panose="02020603050405020304" pitchFamily="18" charset="0"/>
+                <a:cs typeface="Times New Roman" panose="02020603050405020304" pitchFamily="18" charset="0"/>
+              </a:rPr>
+              <a:t>južnoevropskih</a:t>
+            </a:r>
+            <a:r>
+              <a:rPr lang="en-US" sz="1200" dirty="0">
+                <a:latin typeface="Times New Roman" panose="02020603050405020304" pitchFamily="18" charset="0"/>
+                <a:cs typeface="Times New Roman" panose="02020603050405020304" pitchFamily="18" charset="0"/>
+              </a:rPr>
+              <a:t> </a:t>
+            </a:r>
+            <a:r>
+              <a:rPr lang="en-US" sz="1200" dirty="0" err="1">
+                <a:latin typeface="Times New Roman" panose="02020603050405020304" pitchFamily="18" charset="0"/>
+                <a:cs typeface="Times New Roman" panose="02020603050405020304" pitchFamily="18" charset="0"/>
+              </a:rPr>
+              <a:t>gradova</a:t>
             </a:r>
             <a:r>
               <a:rPr lang="bs-Latn-BA" sz="1200" dirty="0">
                 <a:latin typeface="Times New Roman" panose="02020603050405020304" pitchFamily="18" charset="0"/>
                 <a:cs typeface="Times New Roman" panose="02020603050405020304" pitchFamily="18" charset="0"/>
               </a:rPr>
-              <a:t> smještaja u šest mediteranskih gradova na uzorku od 91.301 oglasa. Primijenjeni su regresijski modeli, </a:t>
-            </a:r>
-            <a:r>
-              <a:rPr lang="bs-Latn-BA" sz="1200" dirty="0" err="1">
-                <a:latin typeface="Times New Roman" panose="02020603050405020304" pitchFamily="18" charset="0"/>
-                <a:cs typeface="Times New Roman" panose="02020603050405020304" pitchFamily="18" charset="0"/>
-              </a:rPr>
-              <a:t>geospacijalna</a:t>
-            </a:r>
-            <a:r>
-              <a:rPr lang="bs-Latn-BA" sz="1200" dirty="0">
-                <a:latin typeface="Times New Roman" panose="02020603050405020304" pitchFamily="18" charset="0"/>
-                <a:cs typeface="Times New Roman" panose="02020603050405020304" pitchFamily="18" charset="0"/>
-              </a:rPr>
-              <a:t> analiza i </a:t>
-            </a:r>
-            <a:r>
-              <a:rPr lang="bs-Latn-BA" sz="1200" dirty="0" err="1">
-                <a:latin typeface="Times New Roman" panose="02020603050405020304" pitchFamily="18" charset="0"/>
-                <a:cs typeface="Times New Roman" panose="02020603050405020304" pitchFamily="18" charset="0"/>
-              </a:rPr>
-              <a:t>klasterizacija</a:t>
-            </a:r>
-            <a:r>
-              <a:rPr lang="bs-Latn-BA" sz="1200" dirty="0">
-                <a:latin typeface="Times New Roman" panose="02020603050405020304" pitchFamily="18" charset="0"/>
-                <a:cs typeface="Times New Roman" panose="02020603050405020304" pitchFamily="18" charset="0"/>
-              </a:rPr>
-              <a:t>. Tip smještaja pokazao se kao dominantniji cjenovni faktor od lokacije u pet od šest gradova. Rim je najskuplje tržište, a Atena i Istanbul nude najbolji omjer cijene i kvalitete.</a:t>
+              <a:t>. Analiza je provedena na uzorku od 91.301 oglasa. Primijenjeni su regresijski modeli, geospacijalna analiza i klasterizacija. Tip smještaja pokazao se kao dominantniji cjenovni faktor od lokacije u pet od šest gradova. Rim je najskuplje tržište, a Atena i Istanbul nude najbolji omjer cijene i kvalitete.</a:t>
             </a:r>
             <a:endParaRPr lang="en-US" sz="1200" dirty="0">
               <a:latin typeface="Times New Roman" panose="02020603050405020304" pitchFamily="18" charset="0"/>
@@ -9115,8 +9376,8 @@
         </p:nvSpPr>
         <p:spPr>
           <a:xfrm>
-            <a:off x="160020" y="5124768"/>
-            <a:ext cx="5104638" cy="2226942"/>
+            <a:off x="160020" y="4724338"/>
+            <a:ext cx="5104638" cy="5059742"/>
           </a:xfrm>
           <a:prstGeom prst="rect">
             <a:avLst/>
@@ -9138,6 +9399,13 @@
             </a:outerShdw>
           </a:effectLst>
         </p:spPr>
+        <p:txBody>
+          <a:bodyPr/>
+          <a:lstStyle/>
+          <a:p>
+            <a:endParaRPr lang="en-US"/>
+          </a:p>
+        </p:txBody>
       </p:sp>
       <p:sp>
         <p:nvSpPr>
@@ -9153,7 +9421,7 @@
         </p:nvSpPr>
         <p:spPr>
           <a:xfrm>
-            <a:off x="159322" y="5134736"/>
+            <a:off x="152067" y="4724338"/>
             <a:ext cx="5104638" cy="109728"/>
           </a:xfrm>
           <a:prstGeom prst="rect">
@@ -9169,6 +9437,13 @@
             <a:prstDash val="solid"/>
           </a:ln>
         </p:spPr>
+        <p:txBody>
+          <a:bodyPr/>
+          <a:lstStyle/>
+          <a:p>
+            <a:endParaRPr lang="en-US"/>
+          </a:p>
+        </p:txBody>
       </p:sp>
       <p:sp>
         <p:nvSpPr>
@@ -9184,7 +9459,7 @@
         </p:nvSpPr>
         <p:spPr>
           <a:xfrm>
-            <a:off x="297180" y="5255892"/>
+            <a:off x="289227" y="4870642"/>
             <a:ext cx="4830318" cy="347472"/>
           </a:xfrm>
           <a:prstGeom prst="rect">
@@ -9229,7 +9504,7 @@
         </p:nvSpPr>
         <p:spPr>
           <a:xfrm>
-            <a:off x="297180" y="5622033"/>
+            <a:off x="289227" y="5254690"/>
             <a:ext cx="4830318" cy="0"/>
           </a:xfrm>
           <a:prstGeom prst="line">
@@ -9247,7 +9522,7 @@
           <a:bodyPr/>
           <a:lstStyle/>
           <a:p>
-            <a:endParaRPr lang="bs-Latn-BA" dirty="0"/>
+            <a:endParaRPr lang="en-US"/>
           </a:p>
         </p:txBody>
       </p:sp>
@@ -9265,8 +9540,8 @@
         </p:nvSpPr>
         <p:spPr>
           <a:xfrm>
-            <a:off x="297180" y="5779008"/>
-            <a:ext cx="4830318" cy="1469514"/>
+            <a:off x="297180" y="5327841"/>
+            <a:ext cx="4830318" cy="4389325"/>
           </a:xfrm>
           <a:prstGeom prst="rect">
             <a:avLst/>
@@ -9278,40 +9553,810 @@
           <a:bodyPr wrap="square" lIns="0" tIns="0" rIns="0" bIns="0" rtlCol="0" anchor="t"/>
           <a:lstStyle/>
           <a:p>
+            <a:pPr algn="just"/>
             <a:r>
               <a:rPr lang="bs-Latn-BA" sz="1200" dirty="0">
                 <a:latin typeface="Times New Roman" panose="02020603050405020304" pitchFamily="18" charset="0"/>
                 <a:cs typeface="Times New Roman" panose="02020603050405020304" pitchFamily="18" charset="0"/>
               </a:rPr>
-              <a:t>Koji faktori određuju cijenu </a:t>
-            </a:r>
-            <a:r>
-              <a:rPr lang="bs-Latn-BA" sz="1200" dirty="0" err="1">
-                <a:latin typeface="Times New Roman" panose="02020603050405020304" pitchFamily="18" charset="0"/>
-                <a:cs typeface="Times New Roman" panose="02020603050405020304" pitchFamily="18" charset="0"/>
-              </a:rPr>
-              <a:t>Airbnb</a:t>
+              <a:t>Digitalne platforme kratkoročnog iznajmljivanja, posebno Airbnb, značajno su transformisale turističko tržište i način na koji se formiraju cijene smještaja u urbanim destinacijama. Razvoj platforme omogućio je turistima širok izbor smještaja, dok je istovremeno otvorio prostor za istraživanje.</a:t>
+            </a:r>
+          </a:p>
+          <a:p>
+            <a:pPr algn="just"/>
+            <a:endParaRPr lang="bs-Latn-BA" sz="1200" dirty="0">
+              <a:latin typeface="Times New Roman" panose="02020603050405020304" pitchFamily="18" charset="0"/>
+              <a:cs typeface="Times New Roman" panose="02020603050405020304" pitchFamily="18" charset="0"/>
+            </a:endParaRPr>
+          </a:p>
+          <a:p>
+            <a:pPr algn="just"/>
+            <a:r>
+              <a:rPr lang="en-US" sz="1200" dirty="0">
+                <a:latin typeface="Times New Roman" panose="02020603050405020304" pitchFamily="18" charset="0"/>
+                <a:cs typeface="Times New Roman" panose="02020603050405020304" pitchFamily="18" charset="0"/>
+              </a:rPr>
+              <a:t>Ovo </a:t>
+            </a:r>
+            <a:r>
+              <a:rPr lang="en-US" sz="1200" dirty="0" err="1">
+                <a:latin typeface="Times New Roman" panose="02020603050405020304" pitchFamily="18" charset="0"/>
+                <a:cs typeface="Times New Roman" panose="02020603050405020304" pitchFamily="18" charset="0"/>
+              </a:rPr>
+              <a:t>istraživanje</a:t>
+            </a:r>
+            <a:r>
+              <a:rPr lang="en-US" sz="1200" dirty="0">
+                <a:latin typeface="Times New Roman" panose="02020603050405020304" pitchFamily="18" charset="0"/>
+                <a:cs typeface="Times New Roman" panose="02020603050405020304" pitchFamily="18" charset="0"/>
+              </a:rPr>
+              <a:t> </a:t>
+            </a:r>
+            <a:r>
+              <a:rPr lang="en-US" sz="1200" dirty="0" err="1">
+                <a:latin typeface="Times New Roman" panose="02020603050405020304" pitchFamily="18" charset="0"/>
+                <a:cs typeface="Times New Roman" panose="02020603050405020304" pitchFamily="18" charset="0"/>
+              </a:rPr>
+              <a:t>analizira</a:t>
+            </a:r>
+            <a:r>
+              <a:rPr lang="en-US" sz="1200" dirty="0">
+                <a:latin typeface="Times New Roman" panose="02020603050405020304" pitchFamily="18" charset="0"/>
+                <a:cs typeface="Times New Roman" panose="02020603050405020304" pitchFamily="18" charset="0"/>
+              </a:rPr>
+              <a:t> </a:t>
+            </a:r>
+            <a:r>
+              <a:rPr lang="en-US" sz="1200" dirty="0" err="1">
+                <a:latin typeface="Times New Roman" panose="02020603050405020304" pitchFamily="18" charset="0"/>
+                <a:cs typeface="Times New Roman" panose="02020603050405020304" pitchFamily="18" charset="0"/>
+              </a:rPr>
+              <a:t>obrasce</a:t>
+            </a:r>
+            <a:r>
+              <a:rPr lang="en-US" sz="1200" dirty="0">
+                <a:latin typeface="Times New Roman" panose="02020603050405020304" pitchFamily="18" charset="0"/>
+                <a:cs typeface="Times New Roman" panose="02020603050405020304" pitchFamily="18" charset="0"/>
+              </a:rPr>
+              <a:t> </a:t>
+            </a:r>
+            <a:r>
+              <a:rPr lang="en-US" sz="1200" dirty="0" err="1">
+                <a:latin typeface="Times New Roman" panose="02020603050405020304" pitchFamily="18" charset="0"/>
+                <a:cs typeface="Times New Roman" panose="02020603050405020304" pitchFamily="18" charset="0"/>
+              </a:rPr>
+              <a:t>formiranja</a:t>
+            </a:r>
+            <a:r>
+              <a:rPr lang="en-US" sz="1200" dirty="0">
+                <a:latin typeface="Times New Roman" panose="02020603050405020304" pitchFamily="18" charset="0"/>
+                <a:cs typeface="Times New Roman" panose="02020603050405020304" pitchFamily="18" charset="0"/>
+              </a:rPr>
+              <a:t> </a:t>
+            </a:r>
+            <a:r>
+              <a:rPr lang="en-US" sz="1200" dirty="0" err="1">
+                <a:latin typeface="Times New Roman" panose="02020603050405020304" pitchFamily="18" charset="0"/>
+                <a:cs typeface="Times New Roman" panose="02020603050405020304" pitchFamily="18" charset="0"/>
+              </a:rPr>
+              <a:t>cijena</a:t>
+            </a:r>
+            <a:r>
+              <a:rPr lang="en-US" sz="1200" dirty="0">
+                <a:latin typeface="Times New Roman" panose="02020603050405020304" pitchFamily="18" charset="0"/>
+                <a:cs typeface="Times New Roman" panose="02020603050405020304" pitchFamily="18" charset="0"/>
+              </a:rPr>
+              <a:t> Airbnb </a:t>
+            </a:r>
+            <a:r>
+              <a:rPr lang="en-US" sz="1200" dirty="0" err="1">
+                <a:latin typeface="Times New Roman" panose="02020603050405020304" pitchFamily="18" charset="0"/>
+                <a:cs typeface="Times New Roman" panose="02020603050405020304" pitchFamily="18" charset="0"/>
+              </a:rPr>
+              <a:t>smještaja</a:t>
+            </a:r>
+            <a:r>
+              <a:rPr lang="en-US" sz="1200" dirty="0">
+                <a:latin typeface="Times New Roman" panose="02020603050405020304" pitchFamily="18" charset="0"/>
+                <a:cs typeface="Times New Roman" panose="02020603050405020304" pitchFamily="18" charset="0"/>
+              </a:rPr>
+              <a:t> u </a:t>
+            </a:r>
+            <a:r>
+              <a:rPr lang="en-US" sz="1200" dirty="0" err="1">
+                <a:latin typeface="Times New Roman" panose="02020603050405020304" pitchFamily="18" charset="0"/>
+                <a:cs typeface="Times New Roman" panose="02020603050405020304" pitchFamily="18" charset="0"/>
+              </a:rPr>
+              <a:t>šest</a:t>
+            </a:r>
+            <a:r>
+              <a:rPr lang="en-US" sz="1200" dirty="0">
+                <a:latin typeface="Times New Roman" panose="02020603050405020304" pitchFamily="18" charset="0"/>
+                <a:cs typeface="Times New Roman" panose="02020603050405020304" pitchFamily="18" charset="0"/>
+              </a:rPr>
+              <a:t> </a:t>
+            </a:r>
+            <a:r>
+              <a:rPr lang="en-US" sz="1200" dirty="0" err="1">
+                <a:latin typeface="Times New Roman" panose="02020603050405020304" pitchFamily="18" charset="0"/>
+                <a:cs typeface="Times New Roman" panose="02020603050405020304" pitchFamily="18" charset="0"/>
+              </a:rPr>
+              <a:t>mediteranskih</a:t>
+            </a:r>
+            <a:r>
+              <a:rPr lang="en-US" sz="1200" dirty="0">
+                <a:latin typeface="Times New Roman" panose="02020603050405020304" pitchFamily="18" charset="0"/>
+                <a:cs typeface="Times New Roman" panose="02020603050405020304" pitchFamily="18" charset="0"/>
+              </a:rPr>
+              <a:t> </a:t>
+            </a:r>
+            <a:r>
+              <a:rPr lang="en-US" sz="1200" dirty="0" err="1">
+                <a:latin typeface="Times New Roman" panose="02020603050405020304" pitchFamily="18" charset="0"/>
+                <a:cs typeface="Times New Roman" panose="02020603050405020304" pitchFamily="18" charset="0"/>
+              </a:rPr>
+              <a:t>i</a:t>
+            </a:r>
+            <a:r>
+              <a:rPr lang="en-US" sz="1200" dirty="0">
+                <a:latin typeface="Times New Roman" panose="02020603050405020304" pitchFamily="18" charset="0"/>
+                <a:cs typeface="Times New Roman" panose="02020603050405020304" pitchFamily="18" charset="0"/>
+              </a:rPr>
+              <a:t> </a:t>
+            </a:r>
+            <a:r>
+              <a:rPr lang="en-US" sz="1200" dirty="0" err="1">
+                <a:latin typeface="Times New Roman" panose="02020603050405020304" pitchFamily="18" charset="0"/>
+                <a:cs typeface="Times New Roman" panose="02020603050405020304" pitchFamily="18" charset="0"/>
+              </a:rPr>
+              <a:t>južnoevropskih</a:t>
+            </a:r>
+            <a:r>
+              <a:rPr lang="en-US" sz="1200" dirty="0">
+                <a:latin typeface="Times New Roman" panose="02020603050405020304" pitchFamily="18" charset="0"/>
+                <a:cs typeface="Times New Roman" panose="02020603050405020304" pitchFamily="18" charset="0"/>
+              </a:rPr>
+              <a:t> </a:t>
+            </a:r>
+            <a:r>
+              <a:rPr lang="en-US" sz="1200" dirty="0" err="1">
+                <a:latin typeface="Times New Roman" panose="02020603050405020304" pitchFamily="18" charset="0"/>
+                <a:cs typeface="Times New Roman" panose="02020603050405020304" pitchFamily="18" charset="0"/>
+              </a:rPr>
+              <a:t>gradova</a:t>
+            </a:r>
+            <a:r>
+              <a:rPr lang="en-US" sz="1200" dirty="0">
+                <a:latin typeface="Times New Roman" panose="02020603050405020304" pitchFamily="18" charset="0"/>
+                <a:cs typeface="Times New Roman" panose="02020603050405020304" pitchFamily="18" charset="0"/>
+              </a:rPr>
+              <a:t>: </a:t>
+            </a:r>
+            <a:r>
+              <a:rPr lang="en-US" sz="1200" dirty="0" err="1">
+                <a:latin typeface="Times New Roman" panose="02020603050405020304" pitchFamily="18" charset="0"/>
+                <a:cs typeface="Times New Roman" panose="02020603050405020304" pitchFamily="18" charset="0"/>
+              </a:rPr>
+              <a:t>Ateni</a:t>
+            </a:r>
+            <a:r>
+              <a:rPr lang="en-US" sz="1200" dirty="0">
+                <a:latin typeface="Times New Roman" panose="02020603050405020304" pitchFamily="18" charset="0"/>
+                <a:cs typeface="Times New Roman" panose="02020603050405020304" pitchFamily="18" charset="0"/>
+              </a:rPr>
+              <a:t>, </a:t>
+            </a:r>
+            <a:r>
+              <a:rPr lang="en-US" sz="1200" dirty="0" err="1">
+                <a:latin typeface="Times New Roman" panose="02020603050405020304" pitchFamily="18" charset="0"/>
+                <a:cs typeface="Times New Roman" panose="02020603050405020304" pitchFamily="18" charset="0"/>
+              </a:rPr>
+              <a:t>Malagi</a:t>
+            </a:r>
+            <a:r>
+              <a:rPr lang="en-US" sz="1200" dirty="0">
+                <a:latin typeface="Times New Roman" panose="02020603050405020304" pitchFamily="18" charset="0"/>
+                <a:cs typeface="Times New Roman" panose="02020603050405020304" pitchFamily="18" charset="0"/>
+              </a:rPr>
+              <a:t>, </a:t>
+            </a:r>
+            <a:r>
+              <a:rPr lang="en-US" sz="1200" dirty="0" err="1">
+                <a:latin typeface="Times New Roman" panose="02020603050405020304" pitchFamily="18" charset="0"/>
+                <a:cs typeface="Times New Roman" panose="02020603050405020304" pitchFamily="18" charset="0"/>
+              </a:rPr>
+              <a:t>Istanbulu</a:t>
+            </a:r>
+            <a:r>
+              <a:rPr lang="en-US" sz="1200" dirty="0">
+                <a:latin typeface="Times New Roman" panose="02020603050405020304" pitchFamily="18" charset="0"/>
+                <a:cs typeface="Times New Roman" panose="02020603050405020304" pitchFamily="18" charset="0"/>
+              </a:rPr>
+              <a:t>, </a:t>
+            </a:r>
+            <a:r>
+              <a:rPr lang="en-US" sz="1200" dirty="0" err="1">
+                <a:latin typeface="Times New Roman" panose="02020603050405020304" pitchFamily="18" charset="0"/>
+                <a:cs typeface="Times New Roman" panose="02020603050405020304" pitchFamily="18" charset="0"/>
+              </a:rPr>
+              <a:t>Napulju</a:t>
+            </a:r>
+            <a:r>
+              <a:rPr lang="en-US" sz="1200" dirty="0">
+                <a:latin typeface="Times New Roman" panose="02020603050405020304" pitchFamily="18" charset="0"/>
+                <a:cs typeface="Times New Roman" panose="02020603050405020304" pitchFamily="18" charset="0"/>
+              </a:rPr>
+              <a:t>, Rimu </a:t>
+            </a:r>
+            <a:r>
+              <a:rPr lang="en-US" sz="1200" dirty="0" err="1">
+                <a:latin typeface="Times New Roman" panose="02020603050405020304" pitchFamily="18" charset="0"/>
+                <a:cs typeface="Times New Roman" panose="02020603050405020304" pitchFamily="18" charset="0"/>
+              </a:rPr>
+              <a:t>i</a:t>
+            </a:r>
+            <a:r>
+              <a:rPr lang="en-US" sz="1200" dirty="0">
+                <a:latin typeface="Times New Roman" panose="02020603050405020304" pitchFamily="18" charset="0"/>
+                <a:cs typeface="Times New Roman" panose="02020603050405020304" pitchFamily="18" charset="0"/>
+              </a:rPr>
+              <a:t> </a:t>
+            </a:r>
+            <a:r>
+              <a:rPr lang="en-US" sz="1200" dirty="0" err="1">
+                <a:latin typeface="Times New Roman" panose="02020603050405020304" pitchFamily="18" charset="0"/>
+                <a:cs typeface="Times New Roman" panose="02020603050405020304" pitchFamily="18" charset="0"/>
+              </a:rPr>
+              <a:t>Valenciji</a:t>
+            </a:r>
+            <a:r>
+              <a:rPr lang="en-US" sz="1200" dirty="0">
+                <a:latin typeface="Times New Roman" panose="02020603050405020304" pitchFamily="18" charset="0"/>
+                <a:cs typeface="Times New Roman" panose="02020603050405020304" pitchFamily="18" charset="0"/>
+              </a:rPr>
+              <a:t>. </a:t>
+            </a:r>
+            <a:r>
+              <a:rPr lang="en-US" sz="1200" dirty="0" err="1">
+                <a:latin typeface="Times New Roman" panose="02020603050405020304" pitchFamily="18" charset="0"/>
+                <a:cs typeface="Times New Roman" panose="02020603050405020304" pitchFamily="18" charset="0"/>
+              </a:rPr>
+              <a:t>Fokus</a:t>
+            </a:r>
+            <a:r>
+              <a:rPr lang="en-US" sz="1200" dirty="0">
+                <a:latin typeface="Times New Roman" panose="02020603050405020304" pitchFamily="18" charset="0"/>
+                <a:cs typeface="Times New Roman" panose="02020603050405020304" pitchFamily="18" charset="0"/>
+              </a:rPr>
+              <a:t> je </a:t>
+            </a:r>
+            <a:r>
+              <a:rPr lang="en-US" sz="1200" dirty="0" err="1">
+                <a:latin typeface="Times New Roman" panose="02020603050405020304" pitchFamily="18" charset="0"/>
+                <a:cs typeface="Times New Roman" panose="02020603050405020304" pitchFamily="18" charset="0"/>
+              </a:rPr>
+              <a:t>na</a:t>
+            </a:r>
+            <a:r>
+              <a:rPr lang="en-US" sz="1200" dirty="0">
+                <a:latin typeface="Times New Roman" panose="02020603050405020304" pitchFamily="18" charset="0"/>
+                <a:cs typeface="Times New Roman" panose="02020603050405020304" pitchFamily="18" charset="0"/>
+              </a:rPr>
+              <a:t> </a:t>
+            </a:r>
+            <a:r>
+              <a:rPr lang="en-US" sz="1200" dirty="0" err="1">
+                <a:latin typeface="Times New Roman" panose="02020603050405020304" pitchFamily="18" charset="0"/>
+                <a:cs typeface="Times New Roman" panose="02020603050405020304" pitchFamily="18" charset="0"/>
+              </a:rPr>
+              <a:t>dva</a:t>
+            </a:r>
+            <a:r>
+              <a:rPr lang="en-US" sz="1200" dirty="0">
+                <a:latin typeface="Times New Roman" panose="02020603050405020304" pitchFamily="18" charset="0"/>
+                <a:cs typeface="Times New Roman" panose="02020603050405020304" pitchFamily="18" charset="0"/>
+              </a:rPr>
+              <a:t> </a:t>
+            </a:r>
+            <a:r>
+              <a:rPr lang="en-US" sz="1200" dirty="0" err="1">
+                <a:latin typeface="Times New Roman" panose="02020603050405020304" pitchFamily="18" charset="0"/>
+                <a:cs typeface="Times New Roman" panose="02020603050405020304" pitchFamily="18" charset="0"/>
+              </a:rPr>
+              <a:t>ključna</a:t>
+            </a:r>
+            <a:r>
+              <a:rPr lang="en-US" sz="1200" dirty="0">
+                <a:latin typeface="Times New Roman" panose="02020603050405020304" pitchFamily="18" charset="0"/>
+                <a:cs typeface="Times New Roman" panose="02020603050405020304" pitchFamily="18" charset="0"/>
+              </a:rPr>
+              <a:t> </a:t>
+            </a:r>
+            <a:r>
+              <a:rPr lang="en-US" sz="1200" dirty="0" err="1">
+                <a:latin typeface="Times New Roman" panose="02020603050405020304" pitchFamily="18" charset="0"/>
+                <a:cs typeface="Times New Roman" panose="02020603050405020304" pitchFamily="18" charset="0"/>
+              </a:rPr>
+              <a:t>faktora</a:t>
             </a:r>
             <a:r>
               <a:rPr lang="bs-Latn-BA" sz="1200" dirty="0">
                 <a:latin typeface="Times New Roman" panose="02020603050405020304" pitchFamily="18" charset="0"/>
                 <a:cs typeface="Times New Roman" panose="02020603050405020304" pitchFamily="18" charset="0"/>
               </a:rPr>
-              <a:t> smještaja i djeluju li jednako u različitim gradovima? Fokus je na geografskoj lokaciji (centar </a:t>
-            </a:r>
-            <a:r>
-              <a:rPr lang="bs-Latn-BA" sz="1200" dirty="0" err="1">
-                <a:latin typeface="Times New Roman" panose="02020603050405020304" pitchFamily="18" charset="0"/>
-                <a:cs typeface="Times New Roman" panose="02020603050405020304" pitchFamily="18" charset="0"/>
-              </a:rPr>
-              <a:t>vs</a:t>
-            </a:r>
+              <a:t> - </a:t>
+            </a:r>
+            <a:r>
+              <a:rPr lang="en-US" sz="1200" dirty="0" err="1">
+                <a:latin typeface="Times New Roman" panose="02020603050405020304" pitchFamily="18" charset="0"/>
+                <a:cs typeface="Times New Roman" panose="02020603050405020304" pitchFamily="18" charset="0"/>
+              </a:rPr>
+              <a:t>geografskoj</a:t>
+            </a:r>
+            <a:r>
+              <a:rPr lang="en-US" sz="1200" dirty="0">
+                <a:latin typeface="Times New Roman" panose="02020603050405020304" pitchFamily="18" charset="0"/>
+                <a:cs typeface="Times New Roman" panose="02020603050405020304" pitchFamily="18" charset="0"/>
+              </a:rPr>
+              <a:t> </a:t>
+            </a:r>
+            <a:r>
+              <a:rPr lang="en-US" sz="1200" dirty="0" err="1">
+                <a:latin typeface="Times New Roman" panose="02020603050405020304" pitchFamily="18" charset="0"/>
+                <a:cs typeface="Times New Roman" panose="02020603050405020304" pitchFamily="18" charset="0"/>
+              </a:rPr>
+              <a:t>lokaciji</a:t>
+            </a:r>
+            <a:r>
+              <a:rPr lang="en-US" sz="1200" dirty="0">
+                <a:latin typeface="Times New Roman" panose="02020603050405020304" pitchFamily="18" charset="0"/>
+                <a:cs typeface="Times New Roman" panose="02020603050405020304" pitchFamily="18" charset="0"/>
+              </a:rPr>
+              <a:t> </a:t>
+            </a:r>
+            <a:r>
+              <a:rPr lang="en-US" sz="1200" dirty="0" err="1">
+                <a:latin typeface="Times New Roman" panose="02020603050405020304" pitchFamily="18" charset="0"/>
+                <a:cs typeface="Times New Roman" panose="02020603050405020304" pitchFamily="18" charset="0"/>
+              </a:rPr>
+              <a:t>smještaja</a:t>
+            </a:r>
+            <a:r>
+              <a:rPr lang="en-US" sz="1200" dirty="0">
+                <a:latin typeface="Times New Roman" panose="02020603050405020304" pitchFamily="18" charset="0"/>
+                <a:cs typeface="Times New Roman" panose="02020603050405020304" pitchFamily="18" charset="0"/>
+              </a:rPr>
+              <a:t> (</a:t>
+            </a:r>
+            <a:r>
+              <a:rPr lang="en-US" sz="1200" dirty="0" err="1">
+                <a:latin typeface="Times New Roman" panose="02020603050405020304" pitchFamily="18" charset="0"/>
+                <a:cs typeface="Times New Roman" panose="02020603050405020304" pitchFamily="18" charset="0"/>
+              </a:rPr>
+              <a:t>centar</a:t>
+            </a:r>
+            <a:r>
+              <a:rPr lang="en-US" sz="1200" dirty="0">
+                <a:latin typeface="Times New Roman" panose="02020603050405020304" pitchFamily="18" charset="0"/>
+                <a:cs typeface="Times New Roman" panose="02020603050405020304" pitchFamily="18" charset="0"/>
+              </a:rPr>
+              <a:t> </a:t>
+            </a:r>
+            <a:r>
+              <a:rPr lang="en-US" sz="1200" dirty="0" err="1">
+                <a:latin typeface="Times New Roman" panose="02020603050405020304" pitchFamily="18" charset="0"/>
+                <a:cs typeface="Times New Roman" panose="02020603050405020304" pitchFamily="18" charset="0"/>
+              </a:rPr>
+              <a:t>naspram</a:t>
+            </a:r>
+            <a:r>
+              <a:rPr lang="en-US" sz="1200" dirty="0">
+                <a:latin typeface="Times New Roman" panose="02020603050405020304" pitchFamily="18" charset="0"/>
+                <a:cs typeface="Times New Roman" panose="02020603050405020304" pitchFamily="18" charset="0"/>
+              </a:rPr>
+              <a:t> </a:t>
+            </a:r>
+            <a:r>
+              <a:rPr lang="en-US" sz="1200" dirty="0" err="1">
+                <a:latin typeface="Times New Roman" panose="02020603050405020304" pitchFamily="18" charset="0"/>
+                <a:cs typeface="Times New Roman" panose="02020603050405020304" pitchFamily="18" charset="0"/>
+              </a:rPr>
+              <a:t>periferije</a:t>
+            </a:r>
+            <a:r>
+              <a:rPr lang="en-US" sz="1200" dirty="0">
+                <a:latin typeface="Times New Roman" panose="02020603050405020304" pitchFamily="18" charset="0"/>
+                <a:cs typeface="Times New Roman" panose="02020603050405020304" pitchFamily="18" charset="0"/>
+              </a:rPr>
+              <a:t>) </a:t>
+            </a:r>
+            <a:r>
+              <a:rPr lang="en-US" sz="1200" dirty="0" err="1">
+                <a:latin typeface="Times New Roman" panose="02020603050405020304" pitchFamily="18" charset="0"/>
+                <a:cs typeface="Times New Roman" panose="02020603050405020304" pitchFamily="18" charset="0"/>
+              </a:rPr>
+              <a:t>i</a:t>
+            </a:r>
+            <a:r>
+              <a:rPr lang="en-US" sz="1200" dirty="0">
+                <a:latin typeface="Times New Roman" panose="02020603050405020304" pitchFamily="18" charset="0"/>
+                <a:cs typeface="Times New Roman" panose="02020603050405020304" pitchFamily="18" charset="0"/>
+              </a:rPr>
+              <a:t> </a:t>
+            </a:r>
+            <a:r>
+              <a:rPr lang="en-US" sz="1200" dirty="0" err="1">
+                <a:latin typeface="Times New Roman" panose="02020603050405020304" pitchFamily="18" charset="0"/>
+                <a:cs typeface="Times New Roman" panose="02020603050405020304" pitchFamily="18" charset="0"/>
+              </a:rPr>
+              <a:t>tipu</a:t>
+            </a:r>
+            <a:r>
+              <a:rPr lang="en-US" sz="1200" dirty="0">
+                <a:latin typeface="Times New Roman" panose="02020603050405020304" pitchFamily="18" charset="0"/>
+                <a:cs typeface="Times New Roman" panose="02020603050405020304" pitchFamily="18" charset="0"/>
+              </a:rPr>
+              <a:t> </a:t>
+            </a:r>
+            <a:r>
+              <a:rPr lang="en-US" sz="1200" dirty="0" err="1">
+                <a:latin typeface="Times New Roman" panose="02020603050405020304" pitchFamily="18" charset="0"/>
+                <a:cs typeface="Times New Roman" panose="02020603050405020304" pitchFamily="18" charset="0"/>
+              </a:rPr>
+              <a:t>smještaja</a:t>
+            </a:r>
+            <a:r>
+              <a:rPr lang="en-US" sz="1200" dirty="0">
+                <a:latin typeface="Times New Roman" panose="02020603050405020304" pitchFamily="18" charset="0"/>
+                <a:cs typeface="Times New Roman" panose="02020603050405020304" pitchFamily="18" charset="0"/>
+              </a:rPr>
+              <a:t> (</a:t>
+            </a:r>
+            <a:r>
+              <a:rPr lang="en-US" sz="1200" dirty="0" err="1">
+                <a:latin typeface="Times New Roman" panose="02020603050405020304" pitchFamily="18" charset="0"/>
+                <a:cs typeface="Times New Roman" panose="02020603050405020304" pitchFamily="18" charset="0"/>
+              </a:rPr>
+              <a:t>cijeli</a:t>
+            </a:r>
+            <a:r>
+              <a:rPr lang="en-US" sz="1200" dirty="0">
+                <a:latin typeface="Times New Roman" panose="02020603050405020304" pitchFamily="18" charset="0"/>
+                <a:cs typeface="Times New Roman" panose="02020603050405020304" pitchFamily="18" charset="0"/>
+              </a:rPr>
+              <a:t> stan/</a:t>
+            </a:r>
+            <a:r>
+              <a:rPr lang="en-US" sz="1200" dirty="0" err="1">
+                <a:latin typeface="Times New Roman" panose="02020603050405020304" pitchFamily="18" charset="0"/>
+                <a:cs typeface="Times New Roman" panose="02020603050405020304" pitchFamily="18" charset="0"/>
+              </a:rPr>
+              <a:t>kuća</a:t>
+            </a:r>
+            <a:r>
+              <a:rPr lang="en-US" sz="1200" dirty="0">
+                <a:latin typeface="Times New Roman" panose="02020603050405020304" pitchFamily="18" charset="0"/>
+                <a:cs typeface="Times New Roman" panose="02020603050405020304" pitchFamily="18" charset="0"/>
+              </a:rPr>
+              <a:t>, </a:t>
+            </a:r>
+            <a:r>
+              <a:rPr lang="en-US" sz="1200" dirty="0" err="1">
+                <a:latin typeface="Times New Roman" panose="02020603050405020304" pitchFamily="18" charset="0"/>
+                <a:cs typeface="Times New Roman" panose="02020603050405020304" pitchFamily="18" charset="0"/>
+              </a:rPr>
+              <a:t>privatna</a:t>
+            </a:r>
+            <a:r>
+              <a:rPr lang="en-US" sz="1200" dirty="0">
+                <a:latin typeface="Times New Roman" panose="02020603050405020304" pitchFamily="18" charset="0"/>
+                <a:cs typeface="Times New Roman" panose="02020603050405020304" pitchFamily="18" charset="0"/>
+              </a:rPr>
+              <a:t> soba </a:t>
+            </a:r>
+            <a:r>
+              <a:rPr lang="en-US" sz="1200" dirty="0" err="1">
+                <a:latin typeface="Times New Roman" panose="02020603050405020304" pitchFamily="18" charset="0"/>
+                <a:cs typeface="Times New Roman" panose="02020603050405020304" pitchFamily="18" charset="0"/>
+              </a:rPr>
+              <a:t>i</a:t>
+            </a:r>
+            <a:r>
+              <a:rPr lang="en-US" sz="1200" dirty="0">
+                <a:latin typeface="Times New Roman" panose="02020603050405020304" pitchFamily="18" charset="0"/>
+                <a:cs typeface="Times New Roman" panose="02020603050405020304" pitchFamily="18" charset="0"/>
+              </a:rPr>
+              <a:t> </a:t>
+            </a:r>
+            <a:r>
+              <a:rPr lang="en-US" sz="1200" dirty="0" err="1">
+                <a:latin typeface="Times New Roman" panose="02020603050405020304" pitchFamily="18" charset="0"/>
+                <a:cs typeface="Times New Roman" panose="02020603050405020304" pitchFamily="18" charset="0"/>
+              </a:rPr>
+              <a:t>zajednička</a:t>
+            </a:r>
+            <a:r>
+              <a:rPr lang="en-US" sz="1200" dirty="0">
+                <a:latin typeface="Times New Roman" panose="02020603050405020304" pitchFamily="18" charset="0"/>
+                <a:cs typeface="Times New Roman" panose="02020603050405020304" pitchFamily="18" charset="0"/>
+              </a:rPr>
+              <a:t> soba). </a:t>
+            </a:r>
+            <a:r>
+              <a:rPr lang="en-US" sz="1200" dirty="0" err="1">
+                <a:latin typeface="Times New Roman" panose="02020603050405020304" pitchFamily="18" charset="0"/>
+                <a:cs typeface="Times New Roman" panose="02020603050405020304" pitchFamily="18" charset="0"/>
+              </a:rPr>
+              <a:t>Cilj</a:t>
+            </a:r>
+            <a:r>
+              <a:rPr lang="en-US" sz="1200" dirty="0">
+                <a:latin typeface="Times New Roman" panose="02020603050405020304" pitchFamily="18" charset="0"/>
+                <a:cs typeface="Times New Roman" panose="02020603050405020304" pitchFamily="18" charset="0"/>
+              </a:rPr>
+              <a:t> rada je </a:t>
+            </a:r>
+            <a:r>
+              <a:rPr lang="en-US" sz="1200" dirty="0" err="1">
+                <a:latin typeface="Times New Roman" panose="02020603050405020304" pitchFamily="18" charset="0"/>
+                <a:cs typeface="Times New Roman" panose="02020603050405020304" pitchFamily="18" charset="0"/>
+              </a:rPr>
+              <a:t>utvrditi</a:t>
+            </a:r>
+            <a:r>
+              <a:rPr lang="en-US" sz="1200" dirty="0">
+                <a:latin typeface="Times New Roman" panose="02020603050405020304" pitchFamily="18" charset="0"/>
+                <a:cs typeface="Times New Roman" panose="02020603050405020304" pitchFamily="18" charset="0"/>
+              </a:rPr>
+              <a:t> </a:t>
+            </a:r>
+            <a:r>
+              <a:rPr lang="en-US" sz="1200" dirty="0" err="1">
+                <a:latin typeface="Times New Roman" panose="02020603050405020304" pitchFamily="18" charset="0"/>
+                <a:cs typeface="Times New Roman" panose="02020603050405020304" pitchFamily="18" charset="0"/>
+              </a:rPr>
+              <a:t>djeluju</a:t>
+            </a:r>
+            <a:r>
+              <a:rPr lang="en-US" sz="1200" dirty="0">
+                <a:latin typeface="Times New Roman" panose="02020603050405020304" pitchFamily="18" charset="0"/>
+                <a:cs typeface="Times New Roman" panose="02020603050405020304" pitchFamily="18" charset="0"/>
+              </a:rPr>
+              <a:t> li </a:t>
+            </a:r>
+            <a:r>
+              <a:rPr lang="en-US" sz="1200" dirty="0" err="1">
+                <a:latin typeface="Times New Roman" panose="02020603050405020304" pitchFamily="18" charset="0"/>
+                <a:cs typeface="Times New Roman" panose="02020603050405020304" pitchFamily="18" charset="0"/>
+              </a:rPr>
+              <a:t>ovi</a:t>
+            </a:r>
+            <a:r>
+              <a:rPr lang="en-US" sz="1200" dirty="0">
+                <a:latin typeface="Times New Roman" panose="02020603050405020304" pitchFamily="18" charset="0"/>
+                <a:cs typeface="Times New Roman" panose="02020603050405020304" pitchFamily="18" charset="0"/>
+              </a:rPr>
+              <a:t> </a:t>
+            </a:r>
+            <a:r>
+              <a:rPr lang="en-US" sz="1200" dirty="0" err="1">
+                <a:latin typeface="Times New Roman" panose="02020603050405020304" pitchFamily="18" charset="0"/>
+                <a:cs typeface="Times New Roman" panose="02020603050405020304" pitchFamily="18" charset="0"/>
+              </a:rPr>
+              <a:t>faktori</a:t>
+            </a:r>
+            <a:r>
+              <a:rPr lang="en-US" sz="1200" dirty="0">
+                <a:latin typeface="Times New Roman" panose="02020603050405020304" pitchFamily="18" charset="0"/>
+                <a:cs typeface="Times New Roman" panose="02020603050405020304" pitchFamily="18" charset="0"/>
+              </a:rPr>
+              <a:t> </a:t>
+            </a:r>
+            <a:r>
+              <a:rPr lang="en-US" sz="1200" dirty="0" err="1">
+                <a:latin typeface="Times New Roman" panose="02020603050405020304" pitchFamily="18" charset="0"/>
+                <a:cs typeface="Times New Roman" panose="02020603050405020304" pitchFamily="18" charset="0"/>
+              </a:rPr>
+              <a:t>jednako</a:t>
+            </a:r>
+            <a:r>
+              <a:rPr lang="en-US" sz="1200" dirty="0">
+                <a:latin typeface="Times New Roman" panose="02020603050405020304" pitchFamily="18" charset="0"/>
+                <a:cs typeface="Times New Roman" panose="02020603050405020304" pitchFamily="18" charset="0"/>
+              </a:rPr>
+              <a:t> </a:t>
+            </a:r>
+            <a:r>
+              <a:rPr lang="en-US" sz="1200" dirty="0" err="1">
+                <a:latin typeface="Times New Roman" panose="02020603050405020304" pitchFamily="18" charset="0"/>
+                <a:cs typeface="Times New Roman" panose="02020603050405020304" pitchFamily="18" charset="0"/>
+              </a:rPr>
+              <a:t>na</a:t>
+            </a:r>
+            <a:r>
+              <a:rPr lang="en-US" sz="1200" dirty="0">
+                <a:latin typeface="Times New Roman" panose="02020603050405020304" pitchFamily="18" charset="0"/>
+                <a:cs typeface="Times New Roman" panose="02020603050405020304" pitchFamily="18" charset="0"/>
+              </a:rPr>
+              <a:t> </a:t>
+            </a:r>
+            <a:r>
+              <a:rPr lang="en-US" sz="1200" dirty="0" err="1">
+                <a:latin typeface="Times New Roman" panose="02020603050405020304" pitchFamily="18" charset="0"/>
+                <a:cs typeface="Times New Roman" panose="02020603050405020304" pitchFamily="18" charset="0"/>
+              </a:rPr>
+              <a:t>svim</a:t>
+            </a:r>
+            <a:r>
+              <a:rPr lang="en-US" sz="1200" dirty="0">
+                <a:latin typeface="Times New Roman" panose="02020603050405020304" pitchFamily="18" charset="0"/>
+                <a:cs typeface="Times New Roman" panose="02020603050405020304" pitchFamily="18" charset="0"/>
+              </a:rPr>
+              <a:t> </a:t>
+            </a:r>
+            <a:r>
+              <a:rPr lang="en-US" sz="1200" dirty="0" err="1">
+                <a:latin typeface="Times New Roman" panose="02020603050405020304" pitchFamily="18" charset="0"/>
+                <a:cs typeface="Times New Roman" panose="02020603050405020304" pitchFamily="18" charset="0"/>
+              </a:rPr>
+              <a:t>tržištima</a:t>
+            </a:r>
+            <a:r>
+              <a:rPr lang="en-US" sz="1200" dirty="0">
+                <a:latin typeface="Times New Roman" panose="02020603050405020304" pitchFamily="18" charset="0"/>
+                <a:cs typeface="Times New Roman" panose="02020603050405020304" pitchFamily="18" charset="0"/>
+              </a:rPr>
+              <a:t> </a:t>
+            </a:r>
+            <a:r>
+              <a:rPr lang="en-US" sz="1200" dirty="0" err="1">
+                <a:latin typeface="Times New Roman" panose="02020603050405020304" pitchFamily="18" charset="0"/>
+                <a:cs typeface="Times New Roman" panose="02020603050405020304" pitchFamily="18" charset="0"/>
+              </a:rPr>
+              <a:t>ili</a:t>
+            </a:r>
+            <a:r>
+              <a:rPr lang="en-US" sz="1200" dirty="0">
+                <a:latin typeface="Times New Roman" panose="02020603050405020304" pitchFamily="18" charset="0"/>
+                <a:cs typeface="Times New Roman" panose="02020603050405020304" pitchFamily="18" charset="0"/>
+              </a:rPr>
+              <a:t> </a:t>
+            </a:r>
+            <a:r>
+              <a:rPr lang="en-US" sz="1200" dirty="0" err="1">
+                <a:latin typeface="Times New Roman" panose="02020603050405020304" pitchFamily="18" charset="0"/>
+                <a:cs typeface="Times New Roman" panose="02020603050405020304" pitchFamily="18" charset="0"/>
+              </a:rPr>
+              <a:t>postoje</a:t>
+            </a:r>
+            <a:r>
+              <a:rPr lang="en-US" sz="1200" dirty="0">
+                <a:latin typeface="Times New Roman" panose="02020603050405020304" pitchFamily="18" charset="0"/>
+                <a:cs typeface="Times New Roman" panose="02020603050405020304" pitchFamily="18" charset="0"/>
+              </a:rPr>
+              <a:t> </a:t>
+            </a:r>
+            <a:r>
+              <a:rPr lang="en-US" sz="1200" dirty="0" err="1">
+                <a:latin typeface="Times New Roman" panose="02020603050405020304" pitchFamily="18" charset="0"/>
+                <a:cs typeface="Times New Roman" panose="02020603050405020304" pitchFamily="18" charset="0"/>
+              </a:rPr>
+              <a:t>specifični</a:t>
+            </a:r>
+            <a:r>
+              <a:rPr lang="en-US" sz="1200" dirty="0">
+                <a:latin typeface="Times New Roman" panose="02020603050405020304" pitchFamily="18" charset="0"/>
+                <a:cs typeface="Times New Roman" panose="02020603050405020304" pitchFamily="18" charset="0"/>
+              </a:rPr>
+              <a:t> </a:t>
+            </a:r>
+            <a:r>
+              <a:rPr lang="en-US" sz="1200" dirty="0" err="1">
+                <a:latin typeface="Times New Roman" panose="02020603050405020304" pitchFamily="18" charset="0"/>
+                <a:cs typeface="Times New Roman" panose="02020603050405020304" pitchFamily="18" charset="0"/>
+              </a:rPr>
+              <a:t>lokalni</a:t>
+            </a:r>
+            <a:r>
+              <a:rPr lang="en-US" sz="1200" dirty="0">
+                <a:latin typeface="Times New Roman" panose="02020603050405020304" pitchFamily="18" charset="0"/>
+                <a:cs typeface="Times New Roman" panose="02020603050405020304" pitchFamily="18" charset="0"/>
+              </a:rPr>
+              <a:t> </a:t>
+            </a:r>
+            <a:r>
+              <a:rPr lang="en-US" sz="1200" dirty="0" err="1">
+                <a:latin typeface="Times New Roman" panose="02020603050405020304" pitchFamily="18" charset="0"/>
+                <a:cs typeface="Times New Roman" panose="02020603050405020304" pitchFamily="18" charset="0"/>
+              </a:rPr>
+              <a:t>obrasci</a:t>
+            </a:r>
+            <a:r>
+              <a:rPr lang="en-US" sz="1200" dirty="0">
+                <a:latin typeface="Times New Roman" panose="02020603050405020304" pitchFamily="18" charset="0"/>
+                <a:cs typeface="Times New Roman" panose="02020603050405020304" pitchFamily="18" charset="0"/>
+              </a:rPr>
+              <a:t> koji </a:t>
+            </a:r>
+            <a:r>
+              <a:rPr lang="en-US" sz="1200" dirty="0" err="1">
+                <a:latin typeface="Times New Roman" panose="02020603050405020304" pitchFamily="18" charset="0"/>
+                <a:cs typeface="Times New Roman" panose="02020603050405020304" pitchFamily="18" charset="0"/>
+              </a:rPr>
+              <a:t>mijenjaju</a:t>
+            </a:r>
+            <a:r>
+              <a:rPr lang="en-US" sz="1200" dirty="0">
+                <a:latin typeface="Times New Roman" panose="02020603050405020304" pitchFamily="18" charset="0"/>
+                <a:cs typeface="Times New Roman" panose="02020603050405020304" pitchFamily="18" charset="0"/>
+              </a:rPr>
+              <a:t> </a:t>
+            </a:r>
+            <a:r>
+              <a:rPr lang="en-US" sz="1200" dirty="0" err="1">
+                <a:latin typeface="Times New Roman" panose="02020603050405020304" pitchFamily="18" charset="0"/>
+                <a:cs typeface="Times New Roman" panose="02020603050405020304" pitchFamily="18" charset="0"/>
+              </a:rPr>
+              <a:t>njihovu</a:t>
+            </a:r>
+            <a:r>
+              <a:rPr lang="en-US" sz="1200" dirty="0">
+                <a:latin typeface="Times New Roman" panose="02020603050405020304" pitchFamily="18" charset="0"/>
+                <a:cs typeface="Times New Roman" panose="02020603050405020304" pitchFamily="18" charset="0"/>
+              </a:rPr>
+              <a:t> </a:t>
+            </a:r>
+            <a:r>
+              <a:rPr lang="en-US" sz="1200" dirty="0" err="1">
+                <a:latin typeface="Times New Roman" panose="02020603050405020304" pitchFamily="18" charset="0"/>
+                <a:cs typeface="Times New Roman" panose="02020603050405020304" pitchFamily="18" charset="0"/>
+              </a:rPr>
+              <a:t>važnost</a:t>
+            </a:r>
+            <a:r>
+              <a:rPr lang="en-US" sz="1200" dirty="0">
+                <a:latin typeface="Times New Roman" panose="02020603050405020304" pitchFamily="18" charset="0"/>
+                <a:cs typeface="Times New Roman" panose="02020603050405020304" pitchFamily="18" charset="0"/>
+              </a:rPr>
+              <a:t>.</a:t>
+            </a:r>
+            <a:endParaRPr lang="bs-Latn-BA" sz="1200" dirty="0">
+              <a:latin typeface="Times New Roman" panose="02020603050405020304" pitchFamily="18" charset="0"/>
+              <a:cs typeface="Times New Roman" panose="02020603050405020304" pitchFamily="18" charset="0"/>
+            </a:endParaRPr>
+          </a:p>
+          <a:p>
+            <a:pPr algn="just"/>
+            <a:endParaRPr lang="bs-Latn-BA" sz="1200" dirty="0">
+              <a:latin typeface="Times New Roman" panose="02020603050405020304" pitchFamily="18" charset="0"/>
+              <a:cs typeface="Times New Roman" panose="02020603050405020304" pitchFamily="18" charset="0"/>
+            </a:endParaRPr>
+          </a:p>
+          <a:p>
+            <a:pPr algn="just"/>
             <a:r>
               <a:rPr lang="bs-Latn-BA" sz="1200" dirty="0">
                 <a:latin typeface="Times New Roman" panose="02020603050405020304" pitchFamily="18" charset="0"/>
                 <a:cs typeface="Times New Roman" panose="02020603050405020304" pitchFamily="18" charset="0"/>
               </a:rPr>
-              <a:t>. periferija) i tipu smještaja (cijeli stan, privatna soba, zajednička soba) u Ateni, Malagi, Istanbulu, Napulju, Rimu i Valenciji.</a:t>
+              <a:t>Analiza je provedena na uzorku od preko 91.000 Airbnb oglasa preuzetih sa platforme Inside Airbnb za period septembar – oktobar 2025. godine. Korištene su metode deskriptivne statistike, geospacijalne analize, regresijskih modela i klasterizacije kako bi se identifikovali dominantni obrasci cijena i razlike između gradova.</a:t>
+            </a:r>
+          </a:p>
+          <a:p>
+            <a:pPr algn="just"/>
+            <a:endParaRPr lang="bs-Latn-BA" sz="1200" dirty="0">
+              <a:latin typeface="Times New Roman" panose="02020603050405020304" pitchFamily="18" charset="0"/>
+              <a:cs typeface="Times New Roman" panose="02020603050405020304" pitchFamily="18" charset="0"/>
+            </a:endParaRPr>
+          </a:p>
+          <a:p>
+            <a:pPr algn="just"/>
+            <a:r>
+              <a:rPr lang="bs-Latn-BA" sz="1200" dirty="0">
+                <a:latin typeface="Times New Roman" panose="02020603050405020304" pitchFamily="18" charset="0"/>
+                <a:cs typeface="Times New Roman" panose="02020603050405020304" pitchFamily="18" charset="0"/>
+              </a:rPr>
+              <a:t>Rezultati pokazuju da tip smještaja u većini gradova ima jači uticaj na cijenu od same lokacije, dok Rim predstavlja izuzetak u kojem su oba faktora podjednako važna. Istraživanje također otktiva da odnos između udaljenost od centra i cijene nije univerzalan, jer pojedini gradovi poput Istanbula i Napulja pokazuju atipične obrasce formiranja cijena.</a:t>
             </a:r>
             <a:endParaRPr lang="en-US" sz="1000" dirty="0">
               <a:latin typeface="Times New Roman" panose="02020603050405020304" pitchFamily="18" charset="0"/>
@@ -9334,8 +10379,8 @@
         </p:nvSpPr>
         <p:spPr>
           <a:xfrm>
-            <a:off x="160020" y="7470584"/>
-            <a:ext cx="5104638" cy="6784912"/>
+            <a:off x="160020" y="9991493"/>
+            <a:ext cx="5104638" cy="4264002"/>
           </a:xfrm>
           <a:prstGeom prst="rect">
             <a:avLst/>
@@ -9357,6 +10402,13 @@
             </a:outerShdw>
           </a:effectLst>
         </p:spPr>
+        <p:txBody>
+          <a:bodyPr/>
+          <a:lstStyle/>
+          <a:p>
+            <a:endParaRPr lang="en-US"/>
+          </a:p>
+        </p:txBody>
       </p:sp>
       <p:sp>
         <p:nvSpPr>
@@ -9372,7 +10424,7 @@
         </p:nvSpPr>
         <p:spPr>
           <a:xfrm>
-            <a:off x="160020" y="7470584"/>
+            <a:off x="152067" y="9991493"/>
             <a:ext cx="5104638" cy="109728"/>
           </a:xfrm>
           <a:prstGeom prst="rect">
@@ -9388,6 +10440,13 @@
             <a:prstDash val="solid"/>
           </a:ln>
         </p:spPr>
+        <p:txBody>
+          <a:bodyPr/>
+          <a:lstStyle/>
+          <a:p>
+            <a:endParaRPr lang="en-US"/>
+          </a:p>
+        </p:txBody>
       </p:sp>
       <p:sp>
         <p:nvSpPr>
@@ -9403,7 +10462,7 @@
         </p:nvSpPr>
         <p:spPr>
           <a:xfrm>
-            <a:off x="297180" y="7598664"/>
+            <a:off x="289227" y="10137797"/>
             <a:ext cx="4830318" cy="347472"/>
           </a:xfrm>
           <a:prstGeom prst="rect">
@@ -9448,7 +10507,7 @@
         </p:nvSpPr>
         <p:spPr>
           <a:xfrm>
-            <a:off x="297180" y="7961376"/>
+            <a:off x="289227" y="10521845"/>
             <a:ext cx="4830318" cy="0"/>
           </a:xfrm>
           <a:prstGeom prst="line">
@@ -9462,6 +10521,13 @@
             <a:prstDash val="solid"/>
           </a:ln>
         </p:spPr>
+        <p:txBody>
+          <a:bodyPr/>
+          <a:lstStyle/>
+          <a:p>
+            <a:endParaRPr lang="en-US"/>
+          </a:p>
+        </p:txBody>
       </p:sp>
       <p:sp>
         <p:nvSpPr>
@@ -9477,8 +10543,8 @@
         </p:nvSpPr>
         <p:spPr>
           <a:xfrm>
-            <a:off x="297180" y="8077200"/>
-            <a:ext cx="4830318" cy="6059423"/>
+            <a:off x="297180" y="10654433"/>
+            <a:ext cx="4830318" cy="3502077"/>
           </a:xfrm>
           <a:prstGeom prst="rect">
             <a:avLst/>
@@ -9490,115 +10556,100 @@
           <a:bodyPr wrap="square" lIns="0" tIns="0" rIns="0" bIns="0" rtlCol="0" anchor="t"/>
           <a:lstStyle/>
           <a:p>
-            <a:r>
-              <a:rPr lang="bs-Latn-BA" sz="1200" dirty="0"/>
-              <a:t>Izvor: </a:t>
-            </a:r>
-            <a:r>
-              <a:rPr lang="bs-Latn-BA" sz="1200" dirty="0" err="1"/>
-              <a:t>Inside</a:t>
-            </a:r>
-            <a:r>
-              <a:rPr lang="bs-Latn-BA" sz="1200" dirty="0"/>
-              <a:t> </a:t>
-            </a:r>
-            <a:r>
-              <a:rPr lang="bs-Latn-BA" sz="1200" dirty="0" err="1"/>
-              <a:t>Airbnb</a:t>
-            </a:r>
-            <a:r>
-              <a:rPr lang="bs-Latn-BA" sz="1200" dirty="0"/>
-              <a:t> (insideairbnb.com), septembar–oktobar 2025. </a:t>
-            </a:r>
-          </a:p>
-          <a:p>
-            <a:endParaRPr lang="bs-Latn-BA" sz="1200" dirty="0"/>
-          </a:p>
-          <a:p>
-            <a:r>
-              <a:rPr lang="bs-Latn-BA" sz="1200" dirty="0"/>
-              <a:t>Veličina: 91.301 oglasa iz 6 gradova. </a:t>
-            </a:r>
-          </a:p>
-          <a:p>
-            <a:endParaRPr lang="bs-Latn-BA" sz="1200" dirty="0"/>
-          </a:p>
-          <a:p>
-            <a:r>
-              <a:rPr lang="bs-Latn-BA" sz="1200" dirty="0"/>
-              <a:t>Ključne varijable: cijena, tip smještaja, lokacija/kvart, udaljenost od centra, ocjene. </a:t>
-            </a:r>
-          </a:p>
-          <a:p>
-            <a:endParaRPr lang="bs-Latn-BA" sz="1200" dirty="0"/>
-          </a:p>
-          <a:p>
-            <a:r>
-              <a:rPr lang="bs-Latn-BA" sz="1200" dirty="0" err="1"/>
-              <a:t>Preprocesiranje</a:t>
-            </a:r>
-            <a:r>
-              <a:rPr lang="bs-Latn-BA" sz="1200" dirty="0"/>
-              <a:t>: uklanjanje </a:t>
-            </a:r>
-            <a:r>
-              <a:rPr lang="bs-Latn-BA" sz="1200" dirty="0" err="1"/>
-              <a:t>outliera</a:t>
-            </a:r>
-            <a:r>
-              <a:rPr lang="bs-Latn-BA" sz="1200" dirty="0"/>
-              <a:t> (IQR), konverzija valuta u USD. </a:t>
-            </a:r>
-          </a:p>
-          <a:p>
-            <a:endParaRPr lang="bs-Latn-BA" sz="1200" dirty="0"/>
-          </a:p>
-          <a:p>
-            <a:r>
-              <a:rPr lang="bs-Latn-BA" sz="1200" dirty="0"/>
-              <a:t>Metode: deskriptivna statistika, OLS regresija, </a:t>
-            </a:r>
-            <a:r>
-              <a:rPr lang="bs-Latn-BA" sz="1200" dirty="0" err="1"/>
-              <a:t>KMeans</a:t>
-            </a:r>
-            <a:r>
-              <a:rPr lang="bs-Latn-BA" sz="1200" dirty="0"/>
-              <a:t> </a:t>
-            </a:r>
-            <a:r>
-              <a:rPr lang="bs-Latn-BA" sz="1200" dirty="0" err="1"/>
-              <a:t>klasterizacija</a:t>
-            </a:r>
-            <a:r>
-              <a:rPr lang="bs-Latn-BA" sz="1200" dirty="0"/>
-              <a:t>, </a:t>
-            </a:r>
-            <a:r>
-              <a:rPr lang="bs-Latn-BA" sz="1200" dirty="0" err="1"/>
-              <a:t>geospacijalna</a:t>
-            </a:r>
-            <a:r>
-              <a:rPr lang="bs-Latn-BA" sz="1200" dirty="0"/>
-              <a:t> analiza (</a:t>
-            </a:r>
-            <a:r>
-              <a:rPr lang="bs-Latn-BA" sz="1200" dirty="0" err="1"/>
-              <a:t>Folium</a:t>
-            </a:r>
-            <a:r>
-              <a:rPr lang="bs-Latn-BA" sz="1200" dirty="0"/>
-              <a:t>, </a:t>
-            </a:r>
-            <a:r>
-              <a:rPr lang="bs-Latn-BA" sz="1200" dirty="0" err="1"/>
-              <a:t>Plotly</a:t>
-            </a:r>
-            <a:r>
-              <a:rPr lang="bs-Latn-BA" sz="1200" dirty="0"/>
-              <a:t>).</a:t>
-            </a:r>
-            <a:endParaRPr lang="en-US" sz="1200" dirty="0"/>
+            <a:pPr algn="just"/>
+            <a:r>
+              <a:rPr lang="bs-Latn-BA" sz="1200" dirty="0">
+                <a:latin typeface="Times New Roman" panose="02020603050405020304" pitchFamily="18" charset="0"/>
+                <a:cs typeface="Times New Roman" panose="02020603050405020304" pitchFamily="18" charset="0"/>
+              </a:rPr>
+              <a:t>Izvor: Inside Airbnb (insideairbnb.com), septembar – oktobar 2025. </a:t>
+            </a:r>
+          </a:p>
+          <a:p>
+            <a:pPr algn="just"/>
+            <a:endParaRPr lang="bs-Latn-BA" sz="1200" dirty="0">
+              <a:latin typeface="Times New Roman" panose="02020603050405020304" pitchFamily="18" charset="0"/>
+              <a:cs typeface="Times New Roman" panose="02020603050405020304" pitchFamily="18" charset="0"/>
+            </a:endParaRPr>
+          </a:p>
+          <a:p>
+            <a:pPr algn="just"/>
+            <a:r>
+              <a:rPr lang="bs-Latn-BA" sz="1200" dirty="0">
+                <a:latin typeface="Times New Roman" panose="02020603050405020304" pitchFamily="18" charset="0"/>
+                <a:cs typeface="Times New Roman" panose="02020603050405020304" pitchFamily="18" charset="0"/>
+              </a:rPr>
+              <a:t>Analizirano je 91.301 oglasa iz šest gradova: Atena, Malaga, Istanbul, Napulj, Rim i Valencia. Korišteni su podaci iz listing.csv i </a:t>
+            </a:r>
+            <a:r>
+              <a:rPr lang="en-US" sz="1200" dirty="0" err="1">
+                <a:latin typeface="Times New Roman" panose="02020603050405020304" pitchFamily="18" charset="0"/>
+                <a:cs typeface="Times New Roman" panose="02020603050405020304" pitchFamily="18" charset="0"/>
+              </a:rPr>
+              <a:t>neighbourhoods.geojson</a:t>
+            </a:r>
+            <a:r>
+              <a:rPr lang="bs-Latn-BA" sz="1200" dirty="0">
+                <a:latin typeface="Times New Roman" panose="02020603050405020304" pitchFamily="18" charset="0"/>
+                <a:cs typeface="Times New Roman" panose="02020603050405020304" pitchFamily="18" charset="0"/>
+              </a:rPr>
+              <a:t> datoteka koje sadrže informacije o cijeni, tipu smještaja, lokaciji, recenzijama i kvartovima.</a:t>
+            </a:r>
+          </a:p>
+          <a:p>
+            <a:pPr algn="just"/>
+            <a:endParaRPr lang="bs-Latn-BA" sz="1200" dirty="0">
+              <a:latin typeface="Times New Roman" panose="02020603050405020304" pitchFamily="18" charset="0"/>
+              <a:cs typeface="Times New Roman" panose="02020603050405020304" pitchFamily="18" charset="0"/>
+            </a:endParaRPr>
+          </a:p>
+          <a:p>
+            <a:pPr algn="just"/>
+            <a:r>
+              <a:rPr lang="bs-Latn-BA" sz="1200" dirty="0">
+                <a:latin typeface="Times New Roman" panose="02020603050405020304" pitchFamily="18" charset="0"/>
+                <a:cs typeface="Times New Roman" panose="02020603050405020304" pitchFamily="18" charset="0"/>
+              </a:rPr>
+              <a:t>Ključne varijable uključuju cijenu, tip smještaja, lokaciju/kvart, udaljenost od centra, broj recenzija, ocjene gostiju i kapacitet smještaja (accommodates).</a:t>
+            </a:r>
+          </a:p>
+          <a:p>
+            <a:pPr algn="just"/>
+            <a:endParaRPr lang="bs-Latn-BA" sz="1200" dirty="0">
+              <a:latin typeface="Times New Roman" panose="02020603050405020304" pitchFamily="18" charset="0"/>
+              <a:cs typeface="Times New Roman" panose="02020603050405020304" pitchFamily="18" charset="0"/>
+            </a:endParaRPr>
+          </a:p>
+          <a:p>
+            <a:pPr algn="just"/>
+            <a:r>
+              <a:rPr lang="bs-Latn-BA" sz="1200" dirty="0">
+                <a:latin typeface="Times New Roman" panose="02020603050405020304" pitchFamily="18" charset="0"/>
+                <a:cs typeface="Times New Roman" panose="02020603050405020304" pitchFamily="18" charset="0"/>
+              </a:rPr>
+              <a:t>Preprocesiranje podataka obuhvatilo je uklanjanje nedostajućih vrijednosti i outliera (IQR metoda), konverziju valuta u USD, te računanje udaljenosti smještaja od centra grada korištenjem geografskih koordinata.</a:t>
+            </a:r>
+          </a:p>
+          <a:p>
+            <a:pPr algn="just"/>
+            <a:endParaRPr lang="bs-Latn-BA" sz="1200" dirty="0">
+              <a:latin typeface="Times New Roman" panose="02020603050405020304" pitchFamily="18" charset="0"/>
+              <a:cs typeface="Times New Roman" panose="02020603050405020304" pitchFamily="18" charset="0"/>
+            </a:endParaRPr>
+          </a:p>
+          <a:p>
+            <a:pPr algn="just"/>
+            <a:r>
+              <a:rPr lang="bs-Latn-BA" sz="1200" dirty="0">
+                <a:latin typeface="Times New Roman" panose="02020603050405020304" pitchFamily="18" charset="0"/>
+                <a:cs typeface="Times New Roman" panose="02020603050405020304" pitchFamily="18" charset="0"/>
+              </a:rPr>
+              <a:t>Metodološki pristup uključuje deskriptivnu statistiku, geospacijalnu analizu, OLS regresiju, korelacijsku analizu i Kmeans klasterizaciju. Vizualizacije su kreirane pomoću biblioteka Matplotlib, Seaborn, Plotly i Folium, dok su za obradu podataka korišteni pandas i NumPy.</a:t>
+            </a:r>
+            <a:endParaRPr lang="en-US" sz="1200" dirty="0">
+              <a:latin typeface="Times New Roman" panose="02020603050405020304" pitchFamily="18" charset="0"/>
+              <a:cs typeface="Times New Roman" panose="02020603050405020304" pitchFamily="18" charset="0"/>
+            </a:endParaRPr>
           </a:p>
         </p:txBody>
       </p:sp>
@@ -9616,8 +10667,8 @@
         </p:nvSpPr>
         <p:spPr>
           <a:xfrm>
-            <a:off x="5424678" y="2898647"/>
-            <a:ext cx="5104638" cy="7027475"/>
+            <a:off x="5424678" y="2788919"/>
+            <a:ext cx="5104638" cy="6726606"/>
           </a:xfrm>
           <a:prstGeom prst="rect">
             <a:avLst/>
@@ -9643,7 +10694,7 @@
           <a:bodyPr/>
           <a:lstStyle/>
           <a:p>
-            <a:endParaRPr lang="bs-Latn-BA" dirty="0"/>
+            <a:endParaRPr lang="en-US"/>
           </a:p>
         </p:txBody>
       </p:sp>
@@ -9677,6 +10728,13 @@
             <a:prstDash val="solid"/>
           </a:ln>
         </p:spPr>
+        <p:txBody>
+          <a:bodyPr/>
+          <a:lstStyle/>
+          <a:p>
+            <a:endParaRPr lang="en-US"/>
+          </a:p>
+        </p:txBody>
       </p:sp>
       <p:sp>
         <p:nvSpPr>
@@ -9751,13 +10809,20 @@
             <a:prstDash val="solid"/>
           </a:ln>
         </p:spPr>
-      </p:sp>
-      <p:sp>
-        <p:nvSpPr>
-          <p:cNvPr id="33" name="Text 78">
-            <a:extLst>
-              <a:ext uri="{FF2B5EF4-FFF2-40B4-BE49-F238E27FC236}">
-                <a16:creationId xmlns:a16="http://schemas.microsoft.com/office/drawing/2014/main" id="{5900DD09-7ECB-5BE3-EEBB-CB2340EC702F}"/>
+        <p:txBody>
+          <a:bodyPr/>
+          <a:lstStyle/>
+          <a:p>
+            <a:endParaRPr lang="en-US"/>
+          </a:p>
+        </p:txBody>
+      </p:sp>
+      <p:sp>
+        <p:nvSpPr>
+          <p:cNvPr id="36" name="Shape 81">
+            <a:extLst>
+              <a:ext uri="{FF2B5EF4-FFF2-40B4-BE49-F238E27FC236}">
+                <a16:creationId xmlns:a16="http://schemas.microsoft.com/office/drawing/2014/main" id="{D98B04CC-70A7-F66E-20AF-89F43CFB5497}"/>
               </a:ext>
             </a:extLst>
           </p:cNvPr>
@@ -9766,42 +10831,8 @@
         </p:nvSpPr>
         <p:spPr>
           <a:xfrm>
-            <a:off x="5446452" y="3481980"/>
-            <a:ext cx="5104638" cy="2468880"/>
-          </a:xfrm>
-          <a:prstGeom prst="rect">
-            <a:avLst/>
-          </a:prstGeom>
-          <a:noFill/>
-          <a:ln/>
-        </p:spPr>
-        <p:txBody>
-          <a:bodyPr wrap="square" rtlCol="0" anchor="ctr"/>
-          <a:lstStyle/>
-          <a:p>
-            <a:pPr marL="0" indent="0" algn="ctr">
-              <a:buNone/>
-            </a:pPr>
-            <a:endParaRPr lang="en-US" sz="1000" dirty="0"/>
-          </a:p>
-        </p:txBody>
-      </p:sp>
-      <p:sp>
-        <p:nvSpPr>
-          <p:cNvPr id="36" name="Shape 81">
-            <a:extLst>
-              <a:ext uri="{FF2B5EF4-FFF2-40B4-BE49-F238E27FC236}">
-                <a16:creationId xmlns:a16="http://schemas.microsoft.com/office/drawing/2014/main" id="{D98B04CC-70A7-F66E-20AF-89F43CFB5497}"/>
-              </a:ext>
-            </a:extLst>
-          </p:cNvPr>
-          <p:cNvSpPr/>
-          <p:nvPr/>
-        </p:nvSpPr>
-        <p:spPr>
-          <a:xfrm>
-            <a:off x="5424678" y="9991126"/>
-            <a:ext cx="5104638" cy="2549678"/>
+            <a:off x="5424678" y="9626719"/>
+            <a:ext cx="5104638" cy="2843568"/>
           </a:xfrm>
           <a:prstGeom prst="rect">
             <a:avLst/>
@@ -9827,7 +10858,7 @@
           <a:bodyPr/>
           <a:lstStyle/>
           <a:p>
-            <a:endParaRPr lang="bs-Latn-BA" dirty="0"/>
+            <a:endParaRPr lang="en-US"/>
           </a:p>
         </p:txBody>
       </p:sp>
@@ -9845,7 +10876,7 @@
         </p:nvSpPr>
         <p:spPr>
           <a:xfrm>
-            <a:off x="5446452" y="10006039"/>
+            <a:off x="5424678" y="9626719"/>
             <a:ext cx="5104638" cy="109728"/>
           </a:xfrm>
           <a:prstGeom prst="rect">
@@ -9861,6 +10892,13 @@
             <a:prstDash val="solid"/>
           </a:ln>
         </p:spPr>
+        <p:txBody>
+          <a:bodyPr/>
+          <a:lstStyle/>
+          <a:p>
+            <a:endParaRPr lang="en-US"/>
+          </a:p>
+        </p:txBody>
       </p:sp>
       <p:sp>
         <p:nvSpPr>
@@ -9876,7 +10914,7 @@
         </p:nvSpPr>
         <p:spPr>
           <a:xfrm>
-            <a:off x="5561140" y="10117059"/>
+            <a:off x="5561838" y="9749401"/>
             <a:ext cx="4830318" cy="347472"/>
           </a:xfrm>
           <a:prstGeom prst="rect">
@@ -9921,7 +10959,7 @@
         </p:nvSpPr>
         <p:spPr>
           <a:xfrm>
-            <a:off x="5561140" y="10483596"/>
+            <a:off x="5561140" y="10101221"/>
             <a:ext cx="4830318" cy="0"/>
           </a:xfrm>
           <a:prstGeom prst="line">
@@ -9935,6 +10973,13 @@
             <a:prstDash val="solid"/>
           </a:ln>
         </p:spPr>
+        <p:txBody>
+          <a:bodyPr/>
+          <a:lstStyle/>
+          <a:p>
+            <a:endParaRPr lang="en-US" dirty="0"/>
+          </a:p>
+        </p:txBody>
       </p:sp>
       <p:sp>
         <p:nvSpPr>
@@ -9950,8 +10995,8 @@
         </p:nvSpPr>
         <p:spPr>
           <a:xfrm>
-            <a:off x="5561838" y="10645141"/>
-            <a:ext cx="4830318" cy="1830659"/>
+            <a:off x="5560442" y="10159963"/>
+            <a:ext cx="4830318" cy="2161529"/>
           </a:xfrm>
           <a:prstGeom prst="rect">
             <a:avLst/>
@@ -9963,44 +11008,76 @@
           <a:bodyPr wrap="square" lIns="0" tIns="0" rIns="0" bIns="0" rtlCol="0" anchor="t"/>
           <a:lstStyle/>
           <a:p>
-            <a:pPr marL="0" indent="0" algn="l">
-              <a:buNone/>
-            </a:pPr>
-            <a:r>
-              <a:rPr lang="bs-Latn-BA" sz="1200" dirty="0"/>
-              <a:t>✓ Tip smještaja dominira nad lokacijom kao cjenovni faktor u 5/6 gradova (najizraženije u Malagi i Valenciji). </a:t>
-            </a:r>
-          </a:p>
-          <a:p>
-            <a:pPr marL="0" indent="0" algn="l">
-              <a:buNone/>
-            </a:pPr>
-            <a:endParaRPr lang="bs-Latn-BA" sz="1200" dirty="0"/>
-          </a:p>
-          <a:p>
-            <a:pPr marL="0" indent="0" algn="l">
-              <a:buNone/>
-            </a:pPr>
-            <a:r>
-              <a:rPr lang="bs-Latn-BA" sz="1200" dirty="0"/>
-              <a:t>✓ Cijeli stan/kuća dosljedno postiže višu cijenu od privatne sobe u svim gradovima (H2 potvrđena). </a:t>
-            </a:r>
-          </a:p>
-          <a:p>
-            <a:pPr marL="0" indent="0" algn="l">
-              <a:buNone/>
-            </a:pPr>
-            <a:endParaRPr lang="bs-Latn-BA" sz="1200" dirty="0"/>
-          </a:p>
-          <a:p>
-            <a:pPr marL="0" indent="0" algn="l">
-              <a:buNone/>
-            </a:pPr>
-            <a:r>
-              <a:rPr lang="bs-Latn-BA" sz="1200" dirty="0"/>
-              <a:t>✓ Atena i Istanbul nude najbolji omjer cijene i kvalitete; Istanbul i Valencia imaju visok udio nelicenciranog poslovanja (~40%). Ograničenje: jedan vremenski presjek, bez sezonskih podataka.</a:t>
-            </a:r>
-            <a:endParaRPr lang="en-US" sz="1200" dirty="0"/>
+            <a:pPr algn="just"/>
+            <a:r>
+              <a:rPr lang="bs-Latn-BA" sz="1200" dirty="0">
+                <a:latin typeface="Times New Roman" panose="02020603050405020304" pitchFamily="18" charset="0"/>
+                <a:cs typeface="Times New Roman" panose="02020603050405020304" pitchFamily="18" charset="0"/>
+              </a:rPr>
+              <a:t>✓ Tip smještaja dominira nad lokacijom kao cjenovni faktor u 5 od 6 analiziranih gradova, naizraženiji u Malagi i Valenciji</a:t>
+            </a:r>
+          </a:p>
+          <a:p>
+            <a:pPr algn="just"/>
+            <a:endParaRPr lang="bs-Latn-BA" sz="1200" dirty="0">
+              <a:latin typeface="Times New Roman" panose="02020603050405020304" pitchFamily="18" charset="0"/>
+              <a:cs typeface="Times New Roman" panose="02020603050405020304" pitchFamily="18" charset="0"/>
+            </a:endParaRPr>
+          </a:p>
+          <a:p>
+            <a:pPr algn="just"/>
+            <a:r>
+              <a:rPr lang="bs-Latn-BA" sz="1200" dirty="0">
+                <a:latin typeface="Times New Roman" panose="02020603050405020304" pitchFamily="18" charset="0"/>
+                <a:cs typeface="Times New Roman" panose="02020603050405020304" pitchFamily="18" charset="0"/>
+              </a:rPr>
+              <a:t>✓ Cijeli stan/kuća dosljedno postiže višu cijenu od privatne sobe u gradovima, čime je potvrđena hipoteza o cjenovnoj premiji kompletnog smještaja. </a:t>
+            </a:r>
+          </a:p>
+          <a:p>
+            <a:pPr algn="just"/>
+            <a:endParaRPr lang="bs-Latn-BA" sz="1200" dirty="0">
+              <a:latin typeface="Times New Roman" panose="02020603050405020304" pitchFamily="18" charset="0"/>
+              <a:cs typeface="Times New Roman" panose="02020603050405020304" pitchFamily="18" charset="0"/>
+            </a:endParaRPr>
+          </a:p>
+          <a:p>
+            <a:pPr algn="just"/>
+            <a:r>
+              <a:rPr lang="bs-Latn-BA" sz="1200" dirty="0">
+                <a:latin typeface="Times New Roman" panose="02020603050405020304" pitchFamily="18" charset="0"/>
+                <a:cs typeface="Times New Roman" panose="02020603050405020304" pitchFamily="18" charset="0"/>
+              </a:rPr>
+              <a:t>✓ Atena i Istanbul izdvajaju se kao gradovi s najboljim omjerom cijene i kvalitete; Istanbul i Valencia imaju visok udio nelicenciranog poslovanja (~40%). </a:t>
+            </a:r>
+          </a:p>
+          <a:p>
+            <a:pPr algn="just"/>
+            <a:endParaRPr lang="bs-Latn-BA" sz="1200" dirty="0">
+              <a:latin typeface="Times New Roman" panose="02020603050405020304" pitchFamily="18" charset="0"/>
+              <a:cs typeface="Times New Roman" panose="02020603050405020304" pitchFamily="18" charset="0"/>
+            </a:endParaRPr>
+          </a:p>
+          <a:p>
+            <a:pPr algn="just"/>
+            <a:r>
+              <a:rPr lang="pl-PL" sz="1200" dirty="0">
+                <a:latin typeface="Times New Roman" panose="02020603050405020304" pitchFamily="18" charset="0"/>
+                <a:cs typeface="Times New Roman" panose="02020603050405020304" pitchFamily="18" charset="0"/>
+              </a:rPr>
+              <a:t>Ograničenje: jedan vremenski presjek podataka. Buduća istraživanja mogu uključiti poređenje Airbnb tržišta sa hotelskim sektorom</a:t>
+            </a:r>
+            <a:endParaRPr lang="bs-Latn-BA" sz="1200" dirty="0">
+              <a:latin typeface="Times New Roman" panose="02020603050405020304" pitchFamily="18" charset="0"/>
+              <a:cs typeface="Times New Roman" panose="02020603050405020304" pitchFamily="18" charset="0"/>
+            </a:endParaRPr>
+          </a:p>
+          <a:p>
+            <a:pPr algn="just"/>
+            <a:endParaRPr lang="en-US" sz="1200" dirty="0">
+              <a:latin typeface="Times New Roman" panose="02020603050405020304" pitchFamily="18" charset="0"/>
+              <a:cs typeface="Times New Roman" panose="02020603050405020304" pitchFamily="18" charset="0"/>
+            </a:endParaRPr>
           </a:p>
         </p:txBody>
       </p:sp>
@@ -10018,8 +11095,8 @@
         </p:nvSpPr>
         <p:spPr>
           <a:xfrm>
-            <a:off x="5424678" y="12574266"/>
-            <a:ext cx="5104638" cy="1681229"/>
+            <a:off x="5424678" y="12646686"/>
+            <a:ext cx="5104638" cy="1608810"/>
           </a:xfrm>
           <a:prstGeom prst="rect">
             <a:avLst/>
@@ -10041,6 +11118,13 @@
             </a:outerShdw>
           </a:effectLst>
         </p:spPr>
+        <p:txBody>
+          <a:bodyPr/>
+          <a:lstStyle/>
+          <a:p>
+            <a:endParaRPr lang="en-US"/>
+          </a:p>
+        </p:txBody>
       </p:sp>
       <p:sp>
         <p:nvSpPr>
@@ -10056,7 +11140,7 @@
         </p:nvSpPr>
         <p:spPr>
           <a:xfrm>
-            <a:off x="5431933" y="12610555"/>
+            <a:off x="5423980" y="12646686"/>
             <a:ext cx="5104638" cy="109728"/>
           </a:xfrm>
           <a:prstGeom prst="rect">
@@ -10072,6 +11156,13 @@
             <a:prstDash val="solid"/>
           </a:ln>
         </p:spPr>
+        <p:txBody>
+          <a:bodyPr/>
+          <a:lstStyle/>
+          <a:p>
+            <a:endParaRPr lang="en-US"/>
+          </a:p>
+        </p:txBody>
       </p:sp>
       <p:sp>
         <p:nvSpPr>
@@ -10087,7 +11178,7 @@
         </p:nvSpPr>
         <p:spPr>
           <a:xfrm>
-            <a:off x="5561140" y="12682150"/>
+            <a:off x="5561140" y="12762254"/>
             <a:ext cx="4830318" cy="347472"/>
           </a:xfrm>
           <a:prstGeom prst="rect">
@@ -10132,7 +11223,7 @@
         </p:nvSpPr>
         <p:spPr>
           <a:xfrm>
-            <a:off x="5561838" y="13063084"/>
+            <a:off x="5561140" y="13115566"/>
             <a:ext cx="4830318" cy="0"/>
           </a:xfrm>
           <a:prstGeom prst="line">
@@ -10150,7 +11241,7 @@
           <a:bodyPr/>
           <a:lstStyle/>
           <a:p>
-            <a:endParaRPr lang="bs-Latn-BA" dirty="0"/>
+            <a:endParaRPr lang="en-US"/>
           </a:p>
         </p:txBody>
       </p:sp>
@@ -10168,8 +11259,8 @@
         </p:nvSpPr>
         <p:spPr>
           <a:xfrm>
-            <a:off x="5561838" y="13197840"/>
-            <a:ext cx="4830318" cy="938784"/>
+            <a:off x="5560442" y="13216551"/>
+            <a:ext cx="4830318" cy="953850"/>
           </a:xfrm>
           <a:prstGeom prst="rect">
             <a:avLst/>
@@ -10183,7 +11274,6 @@
           <a:p>
             <a:r>
               <a:rPr lang="hr-BA" sz="1200" kern="100" dirty="0">
-                <a:effectLst/>
                 <a:latin typeface="Times New Roman" panose="02020603050405020304" pitchFamily="18" charset="0"/>
                 <a:ea typeface="Aptos"/>
                 <a:cs typeface="Times New Roman" panose="02020603050405020304" pitchFamily="18" charset="0"/>
@@ -10192,7 +11282,6 @@
             </a:r>
             <a:r>
               <a:rPr lang="hr-BA" sz="1200" i="1" kern="100" dirty="0">
-                <a:effectLst/>
                 <a:latin typeface="Times New Roman" panose="02020603050405020304" pitchFamily="18" charset="0"/>
                 <a:ea typeface="Aptos"/>
                 <a:cs typeface="Times New Roman" panose="02020603050405020304" pitchFamily="18" charset="0"/>
@@ -10201,7 +11290,6 @@
             </a:r>
             <a:r>
               <a:rPr lang="hr-BA" sz="1200" kern="100" dirty="0">
-                <a:effectLst/>
                 <a:latin typeface="Times New Roman" panose="02020603050405020304" pitchFamily="18" charset="0"/>
                 <a:ea typeface="Aptos"/>
                 <a:cs typeface="Times New Roman" panose="02020603050405020304" pitchFamily="18" charset="0"/>
@@ -10213,7 +11301,6 @@
                 <a:solidFill>
                   <a:srgbClr val="467886"/>
                 </a:solidFill>
-                <a:effectLst/>
                 <a:latin typeface="Times New Roman" panose="02020603050405020304" pitchFamily="18" charset="0"/>
                 <a:ea typeface="Aptos"/>
                 <a:cs typeface="Times New Roman" panose="02020603050405020304" pitchFamily="18" charset="0"/>
@@ -10223,7 +11310,6 @@
             </a:r>
             <a:r>
               <a:rPr lang="hr-BA" sz="1200" kern="100" dirty="0">
-                <a:effectLst/>
                 <a:latin typeface="Times New Roman" panose="02020603050405020304" pitchFamily="18" charset="0"/>
                 <a:ea typeface="Aptos"/>
                 <a:cs typeface="Times New Roman" panose="02020603050405020304" pitchFamily="18" charset="0"/>
@@ -10231,26 +11317,22 @@
               <a:t> [Pristupljeno: maj 2026.].</a:t>
             </a:r>
             <a:endParaRPr lang="bs-Latn-BA" sz="1200" kern="100" dirty="0">
-              <a:effectLst/>
               <a:latin typeface="Times New Roman" panose="02020603050405020304" pitchFamily="18" charset="0"/>
               <a:ea typeface="Aptos"/>
               <a:cs typeface="Times New Roman" panose="02020603050405020304" pitchFamily="18" charset="0"/>
             </a:endParaRPr>
           </a:p>
           <a:p>
-            <a:pPr marL="0" indent="0" algn="l">
-              <a:buNone/>
-            </a:pPr>
             <a:endParaRPr lang="en-US" sz="1000" dirty="0"/>
           </a:p>
         </p:txBody>
       </p:sp>
       <p:pic>
         <p:nvPicPr>
-          <p:cNvPr id="48" name="Picture 47">
-            <a:extLst>
-              <a:ext uri="{FF2B5EF4-FFF2-40B4-BE49-F238E27FC236}">
-                <a16:creationId xmlns:a16="http://schemas.microsoft.com/office/drawing/2014/main" id="{A3A8BF48-8414-4AE3-856C-E7FA274F3197}"/>
+          <p:cNvPr id="46" name="Picture 45">
+            <a:extLst>
+              <a:ext uri="{FF2B5EF4-FFF2-40B4-BE49-F238E27FC236}">
+                <a16:creationId xmlns:a16="http://schemas.microsoft.com/office/drawing/2014/main" id="{6CC85171-A4D2-4155-B7B5-C66A23BBC759}"/>
               </a:ext>
             </a:extLst>
           </p:cNvPr>
@@ -10272,7 +11354,7 @@
         </p:blipFill>
         <p:spPr bwMode="auto">
           <a:xfrm>
-            <a:off x="5561140" y="3494215"/>
+            <a:off x="5560442" y="3409593"/>
             <a:ext cx="4831016" cy="2768898"/>
           </a:xfrm>
           <a:prstGeom prst="rect">
@@ -10284,68 +11366,12 @@
           </a:ln>
         </p:spPr>
       </p:pic>
-      <p:sp>
-        <p:nvSpPr>
-          <p:cNvPr id="49" name="Text 67">
-            <a:extLst>
-              <a:ext uri="{FF2B5EF4-FFF2-40B4-BE49-F238E27FC236}">
-                <a16:creationId xmlns:a16="http://schemas.microsoft.com/office/drawing/2014/main" id="{5BAAA7EC-6DC7-42CB-B9BC-501C9234E175}"/>
-              </a:ext>
-            </a:extLst>
-          </p:cNvPr>
-          <p:cNvSpPr/>
-          <p:nvPr/>
-        </p:nvSpPr>
-        <p:spPr>
-          <a:xfrm>
-            <a:off x="5446452" y="6397868"/>
-            <a:ext cx="4830318" cy="238594"/>
-          </a:xfrm>
-          <a:prstGeom prst="rect">
-            <a:avLst/>
-          </a:prstGeom>
-          <a:noFill/>
-          <a:ln/>
-        </p:spPr>
-        <p:txBody>
-          <a:bodyPr wrap="square" lIns="0" tIns="0" rIns="0" bIns="0" rtlCol="0" anchor="t"/>
-          <a:lstStyle/>
-          <a:p>
-            <a:pPr algn="ctr"/>
-            <a:r>
-              <a:rPr lang="bs-Latn-BA" sz="1000" dirty="0">
-                <a:latin typeface="Times New Roman" panose="02020603050405020304" pitchFamily="18" charset="0"/>
-                <a:cs typeface="Times New Roman" panose="02020603050405020304" pitchFamily="18" charset="0"/>
-              </a:rPr>
-              <a:t>Slika 1 – Distribucija cijena </a:t>
-            </a:r>
-            <a:r>
-              <a:rPr lang="bs-Latn-BA" sz="1000" dirty="0" err="1">
-                <a:latin typeface="Times New Roman" panose="02020603050405020304" pitchFamily="18" charset="0"/>
-                <a:cs typeface="Times New Roman" panose="02020603050405020304" pitchFamily="18" charset="0"/>
-              </a:rPr>
-              <a:t>Airbnb</a:t>
-            </a:r>
-            <a:r>
-              <a:rPr lang="bs-Latn-BA" sz="1000" dirty="0">
-                <a:latin typeface="Times New Roman" panose="02020603050405020304" pitchFamily="18" charset="0"/>
-                <a:cs typeface="Times New Roman" panose="02020603050405020304" pitchFamily="18" charset="0"/>
-              </a:rPr>
-              <a:t> smještaja po gradu</a:t>
-            </a:r>
-            <a:endParaRPr lang="en-US" sz="700" dirty="0">
-              <a:latin typeface="Times New Roman" panose="02020603050405020304" pitchFamily="18" charset="0"/>
-              <a:cs typeface="Times New Roman" panose="02020603050405020304" pitchFamily="18" charset="0"/>
-            </a:endParaRPr>
-          </a:p>
-        </p:txBody>
-      </p:sp>
       <p:pic>
         <p:nvPicPr>
-          <p:cNvPr id="50" name="Picture 49">
-            <a:extLst>
-              <a:ext uri="{FF2B5EF4-FFF2-40B4-BE49-F238E27FC236}">
-                <a16:creationId xmlns:a16="http://schemas.microsoft.com/office/drawing/2014/main" id="{2535768D-594C-40EC-815F-489FE34C92DC}"/>
+          <p:cNvPr id="48" name="Picture 47">
+            <a:extLst>
+              <a:ext uri="{FF2B5EF4-FFF2-40B4-BE49-F238E27FC236}">
+                <a16:creationId xmlns:a16="http://schemas.microsoft.com/office/drawing/2014/main" id="{A3C40A6B-2E25-4892-B390-8268E4874192}"/>
               </a:ext>
             </a:extLst>
           </p:cNvPr>
@@ -10367,7 +11393,7 @@
         </p:blipFill>
         <p:spPr bwMode="auto">
           <a:xfrm>
-            <a:off x="5561140" y="6771217"/>
+            <a:off x="5482718" y="6539680"/>
             <a:ext cx="4908740" cy="2799446"/>
           </a:xfrm>
           <a:prstGeom prst="rect">
@@ -10381,10 +11407,66 @@
       </p:pic>
       <p:sp>
         <p:nvSpPr>
+          <p:cNvPr id="50" name="Text 67">
+            <a:extLst>
+              <a:ext uri="{FF2B5EF4-FFF2-40B4-BE49-F238E27FC236}">
+                <a16:creationId xmlns:a16="http://schemas.microsoft.com/office/drawing/2014/main" id="{C4640956-D2BB-4028-A254-0CD913DCC1F0}"/>
+              </a:ext>
+            </a:extLst>
+          </p:cNvPr>
+          <p:cNvSpPr/>
+          <p:nvPr/>
+        </p:nvSpPr>
+        <p:spPr>
+          <a:xfrm>
+            <a:off x="5521929" y="6301086"/>
+            <a:ext cx="4830318" cy="238594"/>
+          </a:xfrm>
+          <a:prstGeom prst="rect">
+            <a:avLst/>
+          </a:prstGeom>
+          <a:noFill/>
+          <a:ln/>
+        </p:spPr>
+        <p:txBody>
+          <a:bodyPr wrap="square" lIns="0" tIns="0" rIns="0" bIns="0" rtlCol="0" anchor="t"/>
+          <a:lstStyle/>
+          <a:p>
+            <a:pPr algn="ctr"/>
+            <a:r>
+              <a:rPr lang="bs-Latn-BA" sz="1000" dirty="0">
+                <a:latin typeface="Times New Roman" panose="02020603050405020304" pitchFamily="18" charset="0"/>
+                <a:cs typeface="Times New Roman" panose="02020603050405020304" pitchFamily="18" charset="0"/>
+              </a:rPr>
+              <a:t>Slika 1 – Distribucija cijena </a:t>
+            </a:r>
+            <a:r>
+              <a:rPr lang="bs-Latn-BA" sz="1000" dirty="0" err="1">
+                <a:latin typeface="Times New Roman" panose="02020603050405020304" pitchFamily="18" charset="0"/>
+                <a:cs typeface="Times New Roman" panose="02020603050405020304" pitchFamily="18" charset="0"/>
+              </a:rPr>
+              <a:t>Airbnb</a:t>
+            </a:r>
+            <a:r>
+              <a:rPr lang="bs-Latn-BA" sz="1000" dirty="0">
+                <a:latin typeface="Times New Roman" panose="02020603050405020304" pitchFamily="18" charset="0"/>
+                <a:cs typeface="Times New Roman" panose="02020603050405020304" pitchFamily="18" charset="0"/>
+              </a:rPr>
+              <a:t> smještaja po gradu</a:t>
+            </a:r>
+            <a:endParaRPr lang="en-US" sz="700" dirty="0">
+              <a:latin typeface="Times New Roman" panose="02020603050405020304" pitchFamily="18" charset="0"/>
+              <a:cs typeface="Times New Roman" panose="02020603050405020304" pitchFamily="18" charset="0"/>
+            </a:endParaRPr>
+          </a:p>
+        </p:txBody>
+      </p:sp>
+      <p:sp>
+        <p:nvSpPr>
           <p:cNvPr id="51" name="Text 67">
             <a:extLst>
               <a:ext uri="{FF2B5EF4-FFF2-40B4-BE49-F238E27FC236}">
-                <a16:creationId xmlns:a16="http://schemas.microsoft.com/office/drawing/2014/main" id="{50248480-3B58-4497-9F85-80DA1CD9CA53}"/>
+                <a16:creationId xmlns:a16="http://schemas.microsoft.com/office/drawing/2014/main" id="{B73B810F-83CA-4F9A-94CC-F634A4401B56}"/>
               </a:ext>
             </a:extLst>
           </p:cNvPr>
@@ -10393,7 +11475,7 @@
         </p:nvSpPr>
         <p:spPr>
           <a:xfrm>
-            <a:off x="5561838" y="9651585"/>
+            <a:off x="5597406" y="9325035"/>
             <a:ext cx="4830318" cy="238594"/>
           </a:xfrm>
           <a:prstGeom prst="rect">

--- a/Salkicic_Nukic_Halilbasic.pptx
+++ b/Salkicic_Nukic_Halilbasic.pptx
@@ -8975,7 +8975,7 @@
           <a:lstStyle/>
           <a:p>
             <a:r>
-              <a:rPr lang="bs-Latn-BA" sz="2600" b="1" dirty="0">
+              <a:rPr lang="hr-BA" sz="2600" b="1" noProof="1">
                 <a:solidFill>
                   <a:srgbClr val="FFFFFF"/>
                 </a:solidFill>
@@ -8985,7 +8985,7 @@
               </a:rPr>
               <a:t>Airbnb cjenovni obrasci u mediteranskim gradovima</a:t>
             </a:r>
-            <a:endParaRPr lang="en-US" sz="2600" dirty="0"/>
+            <a:endParaRPr lang="hr-BA" sz="2600" noProof="1"/>
           </a:p>
         </p:txBody>
       </p:sp>
@@ -9017,72 +9017,17 @@
           <a:lstStyle/>
           <a:p>
             <a:r>
-              <a:rPr lang="bs-Latn-BA" sz="1000" i="1" dirty="0">
-                <a:solidFill>
-                  <a:srgbClr val="CBD5E1"/>
-                </a:solidFill>
-                <a:latin typeface="Times New Roman" pitchFamily="34" charset="0"/>
-                <a:ea typeface="Times New Roman" pitchFamily="34" charset="-122"/>
-                <a:cs typeface="Times New Roman" pitchFamily="34" charset="-120"/>
-              </a:rPr>
-              <a:t>Ajnur Nukić (ajnur.nukic2002@gmail.com) </a:t>
-            </a:r>
-            <a:r>
-              <a:rPr lang="en-US" sz="1000" i="1" dirty="0">
-                <a:solidFill>
-                  <a:srgbClr val="CBD5E1"/>
-                </a:solidFill>
-                <a:latin typeface="Times New Roman" pitchFamily="34" charset="0"/>
-                <a:ea typeface="Times New Roman" pitchFamily="34" charset="-122"/>
-                <a:cs typeface="Times New Roman" pitchFamily="34" charset="-120"/>
-              </a:rPr>
-              <a:t>|  </a:t>
-            </a:r>
-            <a:r>
-              <a:rPr lang="bs-Latn-BA" sz="1000" i="1" dirty="0">
-                <a:solidFill>
-                  <a:srgbClr val="CBD5E1"/>
-                </a:solidFill>
-                <a:latin typeface="Times New Roman" pitchFamily="34" charset="0"/>
-                <a:ea typeface="Times New Roman" pitchFamily="34" charset="-122"/>
-                <a:cs typeface="Times New Roman" pitchFamily="34" charset="-120"/>
-              </a:rPr>
-              <a:t>Belma Salkičić </a:t>
-            </a:r>
-            <a:r>
-              <a:rPr lang="en-US" sz="1000" i="1" dirty="0">
-                <a:solidFill>
-                  <a:srgbClr val="CBD5E1"/>
-                </a:solidFill>
-                <a:latin typeface="Times New Roman" pitchFamily="34" charset="0"/>
-                <a:ea typeface="Times New Roman" pitchFamily="34" charset="-122"/>
-                <a:cs typeface="Times New Roman" pitchFamily="34" charset="-120"/>
-              </a:rPr>
-              <a:t>(belma7salkicic@gmail.com)  |  </a:t>
-            </a:r>
-            <a:r>
-              <a:rPr lang="bs-Latn-BA" sz="1000" i="1" dirty="0">
-                <a:solidFill>
-                  <a:srgbClr val="CBD5E1"/>
-                </a:solidFill>
-                <a:latin typeface="Times New Roman" pitchFamily="34" charset="0"/>
-                <a:ea typeface="Times New Roman" pitchFamily="34" charset="-122"/>
-                <a:cs typeface="Times New Roman" pitchFamily="34" charset="-120"/>
-              </a:rPr>
-              <a:t>Demir Halilbašić</a:t>
-            </a:r>
-            <a:r>
-              <a:rPr lang="en-US" sz="1000" i="1" dirty="0">
-                <a:solidFill>
-                  <a:srgbClr val="CBD5E1"/>
-                </a:solidFill>
-                <a:latin typeface="Times New Roman" pitchFamily="34" charset="0"/>
-                <a:ea typeface="Times New Roman" pitchFamily="34" charset="-122"/>
-                <a:cs typeface="Times New Roman" pitchFamily="34" charset="-120"/>
-              </a:rPr>
-              <a:t> (demirhalilbasic@gmail.com)</a:t>
-            </a:r>
-            <a:endParaRPr lang="en-US" sz="1000" dirty="0"/>
+              <a:rPr lang="hr-BA" sz="1000" i="1" noProof="1">
+                <a:solidFill>
+                  <a:srgbClr val="CBD5E1"/>
+                </a:solidFill>
+                <a:latin typeface="Times New Roman" pitchFamily="34" charset="0"/>
+                <a:ea typeface="Times New Roman" pitchFamily="34" charset="-122"/>
+                <a:cs typeface="Times New Roman" pitchFamily="34" charset="-120"/>
+              </a:rPr>
+              <a:t>Belma Salkičić (belma7salkicic@gmail.com)  |  Ajnur Nukić (ajnur.nukic2002@gmail.com)  |  Demir Halilbašić (demir.halilbasic@gmail.com)</a:t>
+            </a:r>
+            <a:endParaRPr lang="hr-BA" sz="1000" noProof="1"/>
           </a:p>
         </p:txBody>
       </p:sp>
@@ -9127,7 +9072,7 @@
           <a:bodyPr/>
           <a:lstStyle/>
           <a:p>
-            <a:endParaRPr lang="en-US"/>
+            <a:endParaRPr lang="hr-BA" noProof="1"/>
           </a:p>
         </p:txBody>
       </p:sp>
@@ -9165,7 +9110,7 @@
           <a:bodyPr/>
           <a:lstStyle/>
           <a:p>
-            <a:endParaRPr lang="en-US"/>
+            <a:endParaRPr lang="hr-BA" noProof="1"/>
           </a:p>
         </p:txBody>
       </p:sp>
@@ -9200,7 +9145,7 @@
               <a:buNone/>
             </a:pPr>
             <a:r>
-              <a:rPr lang="en-US" sz="1400" b="1" dirty="0">
+              <a:rPr lang="hr-BA" sz="1400" b="1" noProof="1">
                 <a:solidFill>
                   <a:srgbClr val="0891B2"/>
                 </a:solidFill>
@@ -9210,7 +9155,7 @@
               </a:rPr>
               <a:t>SAŽETAK</a:t>
             </a:r>
-            <a:endParaRPr lang="en-US" sz="1400" dirty="0"/>
+            <a:endParaRPr lang="hr-BA" sz="1400" noProof="1"/>
           </a:p>
         </p:txBody>
       </p:sp>
@@ -9246,7 +9191,7 @@
           <a:bodyPr/>
           <a:lstStyle/>
           <a:p>
-            <a:endParaRPr lang="en-US"/>
+            <a:endParaRPr lang="hr-BA" noProof="1"/>
           </a:p>
         </p:txBody>
       </p:sp>
@@ -9279,86 +9224,12 @@
           <a:p>
             <a:pPr algn="just"/>
             <a:r>
-              <a:rPr lang="bs-Latn-BA" sz="1200" dirty="0">
+              <a:rPr lang="hr-BA" sz="1200" noProof="1">
                 <a:latin typeface="Times New Roman" panose="02020603050405020304" pitchFamily="18" charset="0"/>
                 <a:cs typeface="Times New Roman" panose="02020603050405020304" pitchFamily="18" charset="0"/>
               </a:rPr>
-              <a:t>Istraživanje analizira faktore koji određuju cijenu Airbnb smještaja u </a:t>
-            </a:r>
-            <a:r>
-              <a:rPr lang="en-US" sz="1200" dirty="0" err="1">
-                <a:latin typeface="Times New Roman" panose="02020603050405020304" pitchFamily="18" charset="0"/>
-                <a:cs typeface="Times New Roman" panose="02020603050405020304" pitchFamily="18" charset="0"/>
-              </a:rPr>
-              <a:t>šest</a:t>
-            </a:r>
-            <a:r>
-              <a:rPr lang="en-US" sz="1200" dirty="0">
-                <a:latin typeface="Times New Roman" panose="02020603050405020304" pitchFamily="18" charset="0"/>
-                <a:cs typeface="Times New Roman" panose="02020603050405020304" pitchFamily="18" charset="0"/>
-              </a:rPr>
-              <a:t> </a:t>
-            </a:r>
-            <a:r>
-              <a:rPr lang="en-US" sz="1200" dirty="0" err="1">
-                <a:latin typeface="Times New Roman" panose="02020603050405020304" pitchFamily="18" charset="0"/>
-                <a:cs typeface="Times New Roman" panose="02020603050405020304" pitchFamily="18" charset="0"/>
-              </a:rPr>
-              <a:t>mediteranskih</a:t>
-            </a:r>
-            <a:r>
-              <a:rPr lang="en-US" sz="1200" dirty="0">
-                <a:latin typeface="Times New Roman" panose="02020603050405020304" pitchFamily="18" charset="0"/>
-                <a:cs typeface="Times New Roman" panose="02020603050405020304" pitchFamily="18" charset="0"/>
-              </a:rPr>
-              <a:t> </a:t>
-            </a:r>
-            <a:r>
-              <a:rPr lang="en-US" sz="1200" dirty="0" err="1">
-                <a:latin typeface="Times New Roman" panose="02020603050405020304" pitchFamily="18" charset="0"/>
-                <a:cs typeface="Times New Roman" panose="02020603050405020304" pitchFamily="18" charset="0"/>
-              </a:rPr>
-              <a:t>i</a:t>
-            </a:r>
-            <a:r>
-              <a:rPr lang="en-US" sz="1200" dirty="0">
-                <a:latin typeface="Times New Roman" panose="02020603050405020304" pitchFamily="18" charset="0"/>
-                <a:cs typeface="Times New Roman" panose="02020603050405020304" pitchFamily="18" charset="0"/>
-              </a:rPr>
-              <a:t> </a:t>
-            </a:r>
-            <a:r>
-              <a:rPr lang="en-US" sz="1200" dirty="0" err="1">
-                <a:latin typeface="Times New Roman" panose="02020603050405020304" pitchFamily="18" charset="0"/>
-                <a:cs typeface="Times New Roman" panose="02020603050405020304" pitchFamily="18" charset="0"/>
-              </a:rPr>
-              <a:t>južnoevropskih</a:t>
-            </a:r>
-            <a:r>
-              <a:rPr lang="en-US" sz="1200" dirty="0">
-                <a:latin typeface="Times New Roman" panose="02020603050405020304" pitchFamily="18" charset="0"/>
-                <a:cs typeface="Times New Roman" panose="02020603050405020304" pitchFamily="18" charset="0"/>
-              </a:rPr>
-              <a:t> </a:t>
-            </a:r>
-            <a:r>
-              <a:rPr lang="en-US" sz="1200" dirty="0" err="1">
-                <a:latin typeface="Times New Roman" panose="02020603050405020304" pitchFamily="18" charset="0"/>
-                <a:cs typeface="Times New Roman" panose="02020603050405020304" pitchFamily="18" charset="0"/>
-              </a:rPr>
-              <a:t>gradova</a:t>
-            </a:r>
-            <a:r>
-              <a:rPr lang="bs-Latn-BA" sz="1200" dirty="0">
-                <a:latin typeface="Times New Roman" panose="02020603050405020304" pitchFamily="18" charset="0"/>
-                <a:cs typeface="Times New Roman" panose="02020603050405020304" pitchFamily="18" charset="0"/>
-              </a:rPr>
-              <a:t>. Analiza je provedena na uzorku od 91.301 oglasa. Primijenjeni su regresijski modeli, geospacijalna analiza i klasterizacija. Tip smještaja pokazao se kao dominantniji cjenovni faktor od lokacije u pet od šest gradova. Rim je najskuplje tržište, a Atena i Istanbul nude najbolji omjer cijene i kvalitete.</a:t>
-            </a:r>
-            <a:endParaRPr lang="en-US" sz="1200" dirty="0">
-              <a:latin typeface="Times New Roman" panose="02020603050405020304" pitchFamily="18" charset="0"/>
-              <a:cs typeface="Times New Roman" panose="02020603050405020304" pitchFamily="18" charset="0"/>
-            </a:endParaRPr>
+              <a:t>Istraživanje analizira faktore koji određuju cijenu Airbnb smještaja u šest mediteranskih i južnoevropskih gradova. Analiza je provedena na uzorku od 91.301 oglasa. Primijenjeni su regresijski modeli, geospacijalna analiza i klasterizacija. Tip smještaja pokazao se kao dominantniji cjenovni faktor od lokacije u pet od šest gradova. Rim je najskuplje tržište, dok Atena i Istanbul nude najbolji omjer cijene i kvalitete.</a:t>
+            </a:r>
           </a:p>
         </p:txBody>
       </p:sp>
@@ -9403,7 +9274,7 @@
           <a:bodyPr/>
           <a:lstStyle/>
           <a:p>
-            <a:endParaRPr lang="en-US"/>
+            <a:endParaRPr lang="hr-BA" noProof="1"/>
           </a:p>
         </p:txBody>
       </p:sp>
@@ -9441,7 +9312,7 @@
           <a:bodyPr/>
           <a:lstStyle/>
           <a:p>
-            <a:endParaRPr lang="en-US"/>
+            <a:endParaRPr lang="hr-BA" noProof="1"/>
           </a:p>
         </p:txBody>
       </p:sp>
@@ -9476,7 +9347,7 @@
               <a:buNone/>
             </a:pPr>
             <a:r>
-              <a:rPr lang="en-US" sz="1400" b="1" dirty="0">
+              <a:rPr lang="hr-BA" sz="1400" b="1" noProof="1">
                 <a:solidFill>
                   <a:srgbClr val="0891B2"/>
                 </a:solidFill>
@@ -9486,7 +9357,7 @@
               </a:rPr>
               <a:t>UVOD I ISTRAŽIVAČKO PITANJE</a:t>
             </a:r>
-            <a:endParaRPr lang="en-US" sz="1400" dirty="0"/>
+            <a:endParaRPr lang="hr-BA" sz="1400" noProof="1"/>
           </a:p>
         </p:txBody>
       </p:sp>
@@ -9522,7 +9393,7 @@
           <a:bodyPr/>
           <a:lstStyle/>
           <a:p>
-            <a:endParaRPr lang="en-US"/>
+            <a:endParaRPr lang="hr-BA" noProof="1"/>
           </a:p>
         </p:txBody>
       </p:sp>
@@ -9555,7 +9426,7 @@
           <a:p>
             <a:pPr algn="just"/>
             <a:r>
-              <a:rPr lang="bs-Latn-BA" sz="1200" dirty="0">
+              <a:rPr lang="hr-BA" sz="1200" noProof="1">
                 <a:latin typeface="Times New Roman" panose="02020603050405020304" pitchFamily="18" charset="0"/>
                 <a:cs typeface="Times New Roman" panose="02020603050405020304" pitchFamily="18" charset="0"/>
               </a:rPr>
@@ -9564,7 +9435,7 @@
           </a:p>
           <a:p>
             <a:pPr algn="just"/>
-            <a:endParaRPr lang="bs-Latn-BA" sz="1200" dirty="0">
+            <a:endParaRPr lang="hr-BA" sz="1200" noProof="1">
               <a:latin typeface="Times New Roman" panose="02020603050405020304" pitchFamily="18" charset="0"/>
               <a:cs typeface="Times New Roman" panose="02020603050405020304" pitchFamily="18" charset="0"/>
             </a:endParaRPr>
@@ -9572,762 +9443,33 @@
           <a:p>
             <a:pPr algn="just"/>
             <a:r>
-              <a:rPr lang="en-US" sz="1200" dirty="0">
+              <a:rPr lang="hr-BA" sz="1200" noProof="1">
                 <a:latin typeface="Times New Roman" panose="02020603050405020304" pitchFamily="18" charset="0"/>
                 <a:cs typeface="Times New Roman" panose="02020603050405020304" pitchFamily="18" charset="0"/>
               </a:rPr>
-              <a:t>Ovo </a:t>
-            </a:r>
-            <a:r>
-              <a:rPr lang="en-US" sz="1200" dirty="0" err="1">
-                <a:latin typeface="Times New Roman" panose="02020603050405020304" pitchFamily="18" charset="0"/>
-                <a:cs typeface="Times New Roman" panose="02020603050405020304" pitchFamily="18" charset="0"/>
-              </a:rPr>
-              <a:t>istraživanje</a:t>
-            </a:r>
-            <a:r>
-              <a:rPr lang="en-US" sz="1200" dirty="0">
-                <a:latin typeface="Times New Roman" panose="02020603050405020304" pitchFamily="18" charset="0"/>
-                <a:cs typeface="Times New Roman" panose="02020603050405020304" pitchFamily="18" charset="0"/>
-              </a:rPr>
-              <a:t> </a:t>
-            </a:r>
-            <a:r>
-              <a:rPr lang="en-US" sz="1200" dirty="0" err="1">
-                <a:latin typeface="Times New Roman" panose="02020603050405020304" pitchFamily="18" charset="0"/>
-                <a:cs typeface="Times New Roman" panose="02020603050405020304" pitchFamily="18" charset="0"/>
-              </a:rPr>
-              <a:t>analizira</a:t>
-            </a:r>
-            <a:r>
-              <a:rPr lang="en-US" sz="1200" dirty="0">
-                <a:latin typeface="Times New Roman" panose="02020603050405020304" pitchFamily="18" charset="0"/>
-                <a:cs typeface="Times New Roman" panose="02020603050405020304" pitchFamily="18" charset="0"/>
-              </a:rPr>
-              <a:t> </a:t>
-            </a:r>
-            <a:r>
-              <a:rPr lang="en-US" sz="1200" dirty="0" err="1">
-                <a:latin typeface="Times New Roman" panose="02020603050405020304" pitchFamily="18" charset="0"/>
-                <a:cs typeface="Times New Roman" panose="02020603050405020304" pitchFamily="18" charset="0"/>
-              </a:rPr>
-              <a:t>obrasce</a:t>
-            </a:r>
-            <a:r>
-              <a:rPr lang="en-US" sz="1200" dirty="0">
-                <a:latin typeface="Times New Roman" panose="02020603050405020304" pitchFamily="18" charset="0"/>
-                <a:cs typeface="Times New Roman" panose="02020603050405020304" pitchFamily="18" charset="0"/>
-              </a:rPr>
-              <a:t> </a:t>
-            </a:r>
-            <a:r>
-              <a:rPr lang="en-US" sz="1200" dirty="0" err="1">
-                <a:latin typeface="Times New Roman" panose="02020603050405020304" pitchFamily="18" charset="0"/>
-                <a:cs typeface="Times New Roman" panose="02020603050405020304" pitchFamily="18" charset="0"/>
-              </a:rPr>
-              <a:t>formiranja</a:t>
-            </a:r>
-            <a:r>
-              <a:rPr lang="en-US" sz="1200" dirty="0">
-                <a:latin typeface="Times New Roman" panose="02020603050405020304" pitchFamily="18" charset="0"/>
-                <a:cs typeface="Times New Roman" panose="02020603050405020304" pitchFamily="18" charset="0"/>
-              </a:rPr>
-              <a:t> </a:t>
-            </a:r>
-            <a:r>
-              <a:rPr lang="en-US" sz="1200" dirty="0" err="1">
-                <a:latin typeface="Times New Roman" panose="02020603050405020304" pitchFamily="18" charset="0"/>
-                <a:cs typeface="Times New Roman" panose="02020603050405020304" pitchFamily="18" charset="0"/>
-              </a:rPr>
-              <a:t>cijena</a:t>
-            </a:r>
-            <a:r>
-              <a:rPr lang="en-US" sz="1200" dirty="0">
-                <a:latin typeface="Times New Roman" panose="02020603050405020304" pitchFamily="18" charset="0"/>
-                <a:cs typeface="Times New Roman" panose="02020603050405020304" pitchFamily="18" charset="0"/>
-              </a:rPr>
-              <a:t> Airbnb </a:t>
-            </a:r>
-            <a:r>
-              <a:rPr lang="en-US" sz="1200" dirty="0" err="1">
-                <a:latin typeface="Times New Roman" panose="02020603050405020304" pitchFamily="18" charset="0"/>
-                <a:cs typeface="Times New Roman" panose="02020603050405020304" pitchFamily="18" charset="0"/>
-              </a:rPr>
-              <a:t>smještaja</a:t>
-            </a:r>
-            <a:r>
-              <a:rPr lang="en-US" sz="1200" dirty="0">
-                <a:latin typeface="Times New Roman" panose="02020603050405020304" pitchFamily="18" charset="0"/>
-                <a:cs typeface="Times New Roman" panose="02020603050405020304" pitchFamily="18" charset="0"/>
-              </a:rPr>
-              <a:t> u </a:t>
-            </a:r>
-            <a:r>
-              <a:rPr lang="en-US" sz="1200" dirty="0" err="1">
-                <a:latin typeface="Times New Roman" panose="02020603050405020304" pitchFamily="18" charset="0"/>
-                <a:cs typeface="Times New Roman" panose="02020603050405020304" pitchFamily="18" charset="0"/>
-              </a:rPr>
-              <a:t>šest</a:t>
-            </a:r>
-            <a:r>
-              <a:rPr lang="en-US" sz="1200" dirty="0">
-                <a:latin typeface="Times New Roman" panose="02020603050405020304" pitchFamily="18" charset="0"/>
-                <a:cs typeface="Times New Roman" panose="02020603050405020304" pitchFamily="18" charset="0"/>
-              </a:rPr>
-              <a:t> </a:t>
-            </a:r>
-            <a:r>
-              <a:rPr lang="en-US" sz="1200" dirty="0" err="1">
-                <a:latin typeface="Times New Roman" panose="02020603050405020304" pitchFamily="18" charset="0"/>
-                <a:cs typeface="Times New Roman" panose="02020603050405020304" pitchFamily="18" charset="0"/>
-              </a:rPr>
-              <a:t>mediteranskih</a:t>
-            </a:r>
-            <a:r>
-              <a:rPr lang="en-US" sz="1200" dirty="0">
-                <a:latin typeface="Times New Roman" panose="02020603050405020304" pitchFamily="18" charset="0"/>
-                <a:cs typeface="Times New Roman" panose="02020603050405020304" pitchFamily="18" charset="0"/>
-              </a:rPr>
-              <a:t> </a:t>
-            </a:r>
-            <a:r>
-              <a:rPr lang="en-US" sz="1200" dirty="0" err="1">
-                <a:latin typeface="Times New Roman" panose="02020603050405020304" pitchFamily="18" charset="0"/>
-                <a:cs typeface="Times New Roman" panose="02020603050405020304" pitchFamily="18" charset="0"/>
-              </a:rPr>
-              <a:t>i</a:t>
-            </a:r>
-            <a:r>
-              <a:rPr lang="en-US" sz="1200" dirty="0">
-                <a:latin typeface="Times New Roman" panose="02020603050405020304" pitchFamily="18" charset="0"/>
-                <a:cs typeface="Times New Roman" panose="02020603050405020304" pitchFamily="18" charset="0"/>
-              </a:rPr>
-              <a:t> </a:t>
-            </a:r>
-            <a:r>
-              <a:rPr lang="en-US" sz="1200" dirty="0" err="1">
-                <a:latin typeface="Times New Roman" panose="02020603050405020304" pitchFamily="18" charset="0"/>
-                <a:cs typeface="Times New Roman" panose="02020603050405020304" pitchFamily="18" charset="0"/>
-              </a:rPr>
-              <a:t>južnoevropskih</a:t>
-            </a:r>
-            <a:r>
-              <a:rPr lang="en-US" sz="1200" dirty="0">
-                <a:latin typeface="Times New Roman" panose="02020603050405020304" pitchFamily="18" charset="0"/>
-                <a:cs typeface="Times New Roman" panose="02020603050405020304" pitchFamily="18" charset="0"/>
-              </a:rPr>
-              <a:t> </a:t>
-            </a:r>
-            <a:r>
-              <a:rPr lang="en-US" sz="1200" dirty="0" err="1">
-                <a:latin typeface="Times New Roman" panose="02020603050405020304" pitchFamily="18" charset="0"/>
-                <a:cs typeface="Times New Roman" panose="02020603050405020304" pitchFamily="18" charset="0"/>
-              </a:rPr>
-              <a:t>gradova</a:t>
-            </a:r>
-            <a:r>
-              <a:rPr lang="en-US" sz="1200" dirty="0">
-                <a:latin typeface="Times New Roman" panose="02020603050405020304" pitchFamily="18" charset="0"/>
-                <a:cs typeface="Times New Roman" panose="02020603050405020304" pitchFamily="18" charset="0"/>
-              </a:rPr>
-              <a:t>: </a:t>
-            </a:r>
-            <a:r>
-              <a:rPr lang="en-US" sz="1200" dirty="0" err="1">
-                <a:latin typeface="Times New Roman" panose="02020603050405020304" pitchFamily="18" charset="0"/>
-                <a:cs typeface="Times New Roman" panose="02020603050405020304" pitchFamily="18" charset="0"/>
-              </a:rPr>
-              <a:t>Ateni</a:t>
-            </a:r>
-            <a:r>
-              <a:rPr lang="en-US" sz="1200" dirty="0">
-                <a:latin typeface="Times New Roman" panose="02020603050405020304" pitchFamily="18" charset="0"/>
-                <a:cs typeface="Times New Roman" panose="02020603050405020304" pitchFamily="18" charset="0"/>
-              </a:rPr>
-              <a:t>, </a:t>
-            </a:r>
-            <a:r>
-              <a:rPr lang="en-US" sz="1200" dirty="0" err="1">
-                <a:latin typeface="Times New Roman" panose="02020603050405020304" pitchFamily="18" charset="0"/>
-                <a:cs typeface="Times New Roman" panose="02020603050405020304" pitchFamily="18" charset="0"/>
-              </a:rPr>
-              <a:t>Malagi</a:t>
-            </a:r>
-            <a:r>
-              <a:rPr lang="en-US" sz="1200" dirty="0">
-                <a:latin typeface="Times New Roman" panose="02020603050405020304" pitchFamily="18" charset="0"/>
-                <a:cs typeface="Times New Roman" panose="02020603050405020304" pitchFamily="18" charset="0"/>
-              </a:rPr>
-              <a:t>, </a:t>
-            </a:r>
-            <a:r>
-              <a:rPr lang="en-US" sz="1200" dirty="0" err="1">
-                <a:latin typeface="Times New Roman" panose="02020603050405020304" pitchFamily="18" charset="0"/>
-                <a:cs typeface="Times New Roman" panose="02020603050405020304" pitchFamily="18" charset="0"/>
-              </a:rPr>
-              <a:t>Istanbulu</a:t>
-            </a:r>
-            <a:r>
-              <a:rPr lang="en-US" sz="1200" dirty="0">
-                <a:latin typeface="Times New Roman" panose="02020603050405020304" pitchFamily="18" charset="0"/>
-                <a:cs typeface="Times New Roman" panose="02020603050405020304" pitchFamily="18" charset="0"/>
-              </a:rPr>
-              <a:t>, </a:t>
-            </a:r>
-            <a:r>
-              <a:rPr lang="en-US" sz="1200" dirty="0" err="1">
-                <a:latin typeface="Times New Roman" panose="02020603050405020304" pitchFamily="18" charset="0"/>
-                <a:cs typeface="Times New Roman" panose="02020603050405020304" pitchFamily="18" charset="0"/>
-              </a:rPr>
-              <a:t>Napulju</a:t>
-            </a:r>
-            <a:r>
-              <a:rPr lang="en-US" sz="1200" dirty="0">
-                <a:latin typeface="Times New Roman" panose="02020603050405020304" pitchFamily="18" charset="0"/>
-                <a:cs typeface="Times New Roman" panose="02020603050405020304" pitchFamily="18" charset="0"/>
-              </a:rPr>
-              <a:t>, Rimu </a:t>
-            </a:r>
-            <a:r>
-              <a:rPr lang="en-US" sz="1200" dirty="0" err="1">
-                <a:latin typeface="Times New Roman" panose="02020603050405020304" pitchFamily="18" charset="0"/>
-                <a:cs typeface="Times New Roman" panose="02020603050405020304" pitchFamily="18" charset="0"/>
-              </a:rPr>
-              <a:t>i</a:t>
-            </a:r>
-            <a:r>
-              <a:rPr lang="en-US" sz="1200" dirty="0">
-                <a:latin typeface="Times New Roman" panose="02020603050405020304" pitchFamily="18" charset="0"/>
-                <a:cs typeface="Times New Roman" panose="02020603050405020304" pitchFamily="18" charset="0"/>
-              </a:rPr>
-              <a:t> </a:t>
-            </a:r>
-            <a:r>
-              <a:rPr lang="en-US" sz="1200" dirty="0" err="1">
-                <a:latin typeface="Times New Roman" panose="02020603050405020304" pitchFamily="18" charset="0"/>
-                <a:cs typeface="Times New Roman" panose="02020603050405020304" pitchFamily="18" charset="0"/>
-              </a:rPr>
-              <a:t>Valenciji</a:t>
-            </a:r>
-            <a:r>
-              <a:rPr lang="en-US" sz="1200" dirty="0">
-                <a:latin typeface="Times New Roman" panose="02020603050405020304" pitchFamily="18" charset="0"/>
-                <a:cs typeface="Times New Roman" panose="02020603050405020304" pitchFamily="18" charset="0"/>
-              </a:rPr>
-              <a:t>. </a:t>
-            </a:r>
-            <a:r>
-              <a:rPr lang="en-US" sz="1200" dirty="0" err="1">
-                <a:latin typeface="Times New Roman" panose="02020603050405020304" pitchFamily="18" charset="0"/>
-                <a:cs typeface="Times New Roman" panose="02020603050405020304" pitchFamily="18" charset="0"/>
-              </a:rPr>
-              <a:t>Fokus</a:t>
-            </a:r>
-            <a:r>
-              <a:rPr lang="en-US" sz="1200" dirty="0">
-                <a:latin typeface="Times New Roman" panose="02020603050405020304" pitchFamily="18" charset="0"/>
-                <a:cs typeface="Times New Roman" panose="02020603050405020304" pitchFamily="18" charset="0"/>
-              </a:rPr>
-              <a:t> je </a:t>
-            </a:r>
-            <a:r>
-              <a:rPr lang="en-US" sz="1200" dirty="0" err="1">
-                <a:latin typeface="Times New Roman" panose="02020603050405020304" pitchFamily="18" charset="0"/>
-                <a:cs typeface="Times New Roman" panose="02020603050405020304" pitchFamily="18" charset="0"/>
-              </a:rPr>
-              <a:t>na</a:t>
-            </a:r>
-            <a:r>
-              <a:rPr lang="en-US" sz="1200" dirty="0">
-                <a:latin typeface="Times New Roman" panose="02020603050405020304" pitchFamily="18" charset="0"/>
-                <a:cs typeface="Times New Roman" panose="02020603050405020304" pitchFamily="18" charset="0"/>
-              </a:rPr>
-              <a:t> </a:t>
-            </a:r>
-            <a:r>
-              <a:rPr lang="en-US" sz="1200" dirty="0" err="1">
-                <a:latin typeface="Times New Roman" panose="02020603050405020304" pitchFamily="18" charset="0"/>
-                <a:cs typeface="Times New Roman" panose="02020603050405020304" pitchFamily="18" charset="0"/>
-              </a:rPr>
-              <a:t>dva</a:t>
-            </a:r>
-            <a:r>
-              <a:rPr lang="en-US" sz="1200" dirty="0">
-                <a:latin typeface="Times New Roman" panose="02020603050405020304" pitchFamily="18" charset="0"/>
-                <a:cs typeface="Times New Roman" panose="02020603050405020304" pitchFamily="18" charset="0"/>
-              </a:rPr>
-              <a:t> </a:t>
-            </a:r>
-            <a:r>
-              <a:rPr lang="en-US" sz="1200" dirty="0" err="1">
-                <a:latin typeface="Times New Roman" panose="02020603050405020304" pitchFamily="18" charset="0"/>
-                <a:cs typeface="Times New Roman" panose="02020603050405020304" pitchFamily="18" charset="0"/>
-              </a:rPr>
-              <a:t>ključna</a:t>
-            </a:r>
-            <a:r>
-              <a:rPr lang="en-US" sz="1200" dirty="0">
-                <a:latin typeface="Times New Roman" panose="02020603050405020304" pitchFamily="18" charset="0"/>
-                <a:cs typeface="Times New Roman" panose="02020603050405020304" pitchFamily="18" charset="0"/>
-              </a:rPr>
-              <a:t> </a:t>
-            </a:r>
-            <a:r>
-              <a:rPr lang="en-US" sz="1200" dirty="0" err="1">
-                <a:latin typeface="Times New Roman" panose="02020603050405020304" pitchFamily="18" charset="0"/>
-                <a:cs typeface="Times New Roman" panose="02020603050405020304" pitchFamily="18" charset="0"/>
-              </a:rPr>
-              <a:t>faktora</a:t>
-            </a:r>
-            <a:r>
-              <a:rPr lang="bs-Latn-BA" sz="1200" dirty="0">
-                <a:latin typeface="Times New Roman" panose="02020603050405020304" pitchFamily="18" charset="0"/>
-                <a:cs typeface="Times New Roman" panose="02020603050405020304" pitchFamily="18" charset="0"/>
-              </a:rPr>
-              <a:t> - </a:t>
-            </a:r>
-            <a:r>
-              <a:rPr lang="en-US" sz="1200" dirty="0" err="1">
-                <a:latin typeface="Times New Roman" panose="02020603050405020304" pitchFamily="18" charset="0"/>
-                <a:cs typeface="Times New Roman" panose="02020603050405020304" pitchFamily="18" charset="0"/>
-              </a:rPr>
-              <a:t>geografskoj</a:t>
-            </a:r>
-            <a:r>
-              <a:rPr lang="en-US" sz="1200" dirty="0">
-                <a:latin typeface="Times New Roman" panose="02020603050405020304" pitchFamily="18" charset="0"/>
-                <a:cs typeface="Times New Roman" panose="02020603050405020304" pitchFamily="18" charset="0"/>
-              </a:rPr>
-              <a:t> </a:t>
-            </a:r>
-            <a:r>
-              <a:rPr lang="en-US" sz="1200" dirty="0" err="1">
-                <a:latin typeface="Times New Roman" panose="02020603050405020304" pitchFamily="18" charset="0"/>
-                <a:cs typeface="Times New Roman" panose="02020603050405020304" pitchFamily="18" charset="0"/>
-              </a:rPr>
-              <a:t>lokaciji</a:t>
-            </a:r>
-            <a:r>
-              <a:rPr lang="en-US" sz="1200" dirty="0">
-                <a:latin typeface="Times New Roman" panose="02020603050405020304" pitchFamily="18" charset="0"/>
-                <a:cs typeface="Times New Roman" panose="02020603050405020304" pitchFamily="18" charset="0"/>
-              </a:rPr>
-              <a:t> </a:t>
-            </a:r>
-            <a:r>
-              <a:rPr lang="en-US" sz="1200" dirty="0" err="1">
-                <a:latin typeface="Times New Roman" panose="02020603050405020304" pitchFamily="18" charset="0"/>
-                <a:cs typeface="Times New Roman" panose="02020603050405020304" pitchFamily="18" charset="0"/>
-              </a:rPr>
-              <a:t>smještaja</a:t>
-            </a:r>
-            <a:r>
-              <a:rPr lang="en-US" sz="1200" dirty="0">
-                <a:latin typeface="Times New Roman" panose="02020603050405020304" pitchFamily="18" charset="0"/>
-                <a:cs typeface="Times New Roman" panose="02020603050405020304" pitchFamily="18" charset="0"/>
-              </a:rPr>
-              <a:t> (</a:t>
-            </a:r>
-            <a:r>
-              <a:rPr lang="en-US" sz="1200" dirty="0" err="1">
-                <a:latin typeface="Times New Roman" panose="02020603050405020304" pitchFamily="18" charset="0"/>
-                <a:cs typeface="Times New Roman" panose="02020603050405020304" pitchFamily="18" charset="0"/>
-              </a:rPr>
-              <a:t>centar</a:t>
-            </a:r>
-            <a:r>
-              <a:rPr lang="en-US" sz="1200" dirty="0">
-                <a:latin typeface="Times New Roman" panose="02020603050405020304" pitchFamily="18" charset="0"/>
-                <a:cs typeface="Times New Roman" panose="02020603050405020304" pitchFamily="18" charset="0"/>
-              </a:rPr>
-              <a:t> </a:t>
-            </a:r>
-            <a:r>
-              <a:rPr lang="en-US" sz="1200" dirty="0" err="1">
-                <a:latin typeface="Times New Roman" panose="02020603050405020304" pitchFamily="18" charset="0"/>
-                <a:cs typeface="Times New Roman" panose="02020603050405020304" pitchFamily="18" charset="0"/>
-              </a:rPr>
-              <a:t>naspram</a:t>
-            </a:r>
-            <a:r>
-              <a:rPr lang="en-US" sz="1200" dirty="0">
-                <a:latin typeface="Times New Roman" panose="02020603050405020304" pitchFamily="18" charset="0"/>
-                <a:cs typeface="Times New Roman" panose="02020603050405020304" pitchFamily="18" charset="0"/>
-              </a:rPr>
-              <a:t> </a:t>
-            </a:r>
-            <a:r>
-              <a:rPr lang="en-US" sz="1200" dirty="0" err="1">
-                <a:latin typeface="Times New Roman" panose="02020603050405020304" pitchFamily="18" charset="0"/>
-                <a:cs typeface="Times New Roman" panose="02020603050405020304" pitchFamily="18" charset="0"/>
-              </a:rPr>
-              <a:t>periferije</a:t>
-            </a:r>
-            <a:r>
-              <a:rPr lang="en-US" sz="1200" dirty="0">
-                <a:latin typeface="Times New Roman" panose="02020603050405020304" pitchFamily="18" charset="0"/>
-                <a:cs typeface="Times New Roman" panose="02020603050405020304" pitchFamily="18" charset="0"/>
-              </a:rPr>
-              <a:t>) </a:t>
-            </a:r>
-            <a:r>
-              <a:rPr lang="en-US" sz="1200" dirty="0" err="1">
-                <a:latin typeface="Times New Roman" panose="02020603050405020304" pitchFamily="18" charset="0"/>
-                <a:cs typeface="Times New Roman" panose="02020603050405020304" pitchFamily="18" charset="0"/>
-              </a:rPr>
-              <a:t>i</a:t>
-            </a:r>
-            <a:r>
-              <a:rPr lang="en-US" sz="1200" dirty="0">
-                <a:latin typeface="Times New Roman" panose="02020603050405020304" pitchFamily="18" charset="0"/>
-                <a:cs typeface="Times New Roman" panose="02020603050405020304" pitchFamily="18" charset="0"/>
-              </a:rPr>
-              <a:t> </a:t>
-            </a:r>
-            <a:r>
-              <a:rPr lang="en-US" sz="1200" dirty="0" err="1">
-                <a:latin typeface="Times New Roman" panose="02020603050405020304" pitchFamily="18" charset="0"/>
-                <a:cs typeface="Times New Roman" panose="02020603050405020304" pitchFamily="18" charset="0"/>
-              </a:rPr>
-              <a:t>tipu</a:t>
-            </a:r>
-            <a:r>
-              <a:rPr lang="en-US" sz="1200" dirty="0">
-                <a:latin typeface="Times New Roman" panose="02020603050405020304" pitchFamily="18" charset="0"/>
-                <a:cs typeface="Times New Roman" panose="02020603050405020304" pitchFamily="18" charset="0"/>
-              </a:rPr>
-              <a:t> </a:t>
-            </a:r>
-            <a:r>
-              <a:rPr lang="en-US" sz="1200" dirty="0" err="1">
-                <a:latin typeface="Times New Roman" panose="02020603050405020304" pitchFamily="18" charset="0"/>
-                <a:cs typeface="Times New Roman" panose="02020603050405020304" pitchFamily="18" charset="0"/>
-              </a:rPr>
-              <a:t>smještaja</a:t>
-            </a:r>
-            <a:r>
-              <a:rPr lang="en-US" sz="1200" dirty="0">
-                <a:latin typeface="Times New Roman" panose="02020603050405020304" pitchFamily="18" charset="0"/>
-                <a:cs typeface="Times New Roman" panose="02020603050405020304" pitchFamily="18" charset="0"/>
-              </a:rPr>
-              <a:t> (</a:t>
-            </a:r>
-            <a:r>
-              <a:rPr lang="en-US" sz="1200" dirty="0" err="1">
-                <a:latin typeface="Times New Roman" panose="02020603050405020304" pitchFamily="18" charset="0"/>
-                <a:cs typeface="Times New Roman" panose="02020603050405020304" pitchFamily="18" charset="0"/>
-              </a:rPr>
-              <a:t>cijeli</a:t>
-            </a:r>
-            <a:r>
-              <a:rPr lang="en-US" sz="1200" dirty="0">
-                <a:latin typeface="Times New Roman" panose="02020603050405020304" pitchFamily="18" charset="0"/>
-                <a:cs typeface="Times New Roman" panose="02020603050405020304" pitchFamily="18" charset="0"/>
-              </a:rPr>
-              <a:t> stan/</a:t>
-            </a:r>
-            <a:r>
-              <a:rPr lang="en-US" sz="1200" dirty="0" err="1">
-                <a:latin typeface="Times New Roman" panose="02020603050405020304" pitchFamily="18" charset="0"/>
-                <a:cs typeface="Times New Roman" panose="02020603050405020304" pitchFamily="18" charset="0"/>
-              </a:rPr>
-              <a:t>kuća</a:t>
-            </a:r>
-            <a:r>
-              <a:rPr lang="en-US" sz="1200" dirty="0">
-                <a:latin typeface="Times New Roman" panose="02020603050405020304" pitchFamily="18" charset="0"/>
-                <a:cs typeface="Times New Roman" panose="02020603050405020304" pitchFamily="18" charset="0"/>
-              </a:rPr>
-              <a:t>, </a:t>
-            </a:r>
-            <a:r>
-              <a:rPr lang="en-US" sz="1200" dirty="0" err="1">
-                <a:latin typeface="Times New Roman" panose="02020603050405020304" pitchFamily="18" charset="0"/>
-                <a:cs typeface="Times New Roman" panose="02020603050405020304" pitchFamily="18" charset="0"/>
-              </a:rPr>
-              <a:t>privatna</a:t>
-            </a:r>
-            <a:r>
-              <a:rPr lang="en-US" sz="1200" dirty="0">
-                <a:latin typeface="Times New Roman" panose="02020603050405020304" pitchFamily="18" charset="0"/>
-                <a:cs typeface="Times New Roman" panose="02020603050405020304" pitchFamily="18" charset="0"/>
-              </a:rPr>
-              <a:t> soba </a:t>
-            </a:r>
-            <a:r>
-              <a:rPr lang="en-US" sz="1200" dirty="0" err="1">
-                <a:latin typeface="Times New Roman" panose="02020603050405020304" pitchFamily="18" charset="0"/>
-                <a:cs typeface="Times New Roman" panose="02020603050405020304" pitchFamily="18" charset="0"/>
-              </a:rPr>
-              <a:t>i</a:t>
-            </a:r>
-            <a:r>
-              <a:rPr lang="en-US" sz="1200" dirty="0">
-                <a:latin typeface="Times New Roman" panose="02020603050405020304" pitchFamily="18" charset="0"/>
-                <a:cs typeface="Times New Roman" panose="02020603050405020304" pitchFamily="18" charset="0"/>
-              </a:rPr>
-              <a:t> </a:t>
-            </a:r>
-            <a:r>
-              <a:rPr lang="en-US" sz="1200" dirty="0" err="1">
-                <a:latin typeface="Times New Roman" panose="02020603050405020304" pitchFamily="18" charset="0"/>
-                <a:cs typeface="Times New Roman" panose="02020603050405020304" pitchFamily="18" charset="0"/>
-              </a:rPr>
-              <a:t>zajednička</a:t>
-            </a:r>
-            <a:r>
-              <a:rPr lang="en-US" sz="1200" dirty="0">
-                <a:latin typeface="Times New Roman" panose="02020603050405020304" pitchFamily="18" charset="0"/>
-                <a:cs typeface="Times New Roman" panose="02020603050405020304" pitchFamily="18" charset="0"/>
-              </a:rPr>
-              <a:t> soba). </a:t>
-            </a:r>
-            <a:r>
-              <a:rPr lang="en-US" sz="1200" dirty="0" err="1">
-                <a:latin typeface="Times New Roman" panose="02020603050405020304" pitchFamily="18" charset="0"/>
-                <a:cs typeface="Times New Roman" panose="02020603050405020304" pitchFamily="18" charset="0"/>
-              </a:rPr>
-              <a:t>Cilj</a:t>
-            </a:r>
-            <a:r>
-              <a:rPr lang="en-US" sz="1200" dirty="0">
-                <a:latin typeface="Times New Roman" panose="02020603050405020304" pitchFamily="18" charset="0"/>
-                <a:cs typeface="Times New Roman" panose="02020603050405020304" pitchFamily="18" charset="0"/>
-              </a:rPr>
-              <a:t> rada je </a:t>
-            </a:r>
-            <a:r>
-              <a:rPr lang="en-US" sz="1200" dirty="0" err="1">
-                <a:latin typeface="Times New Roman" panose="02020603050405020304" pitchFamily="18" charset="0"/>
-                <a:cs typeface="Times New Roman" panose="02020603050405020304" pitchFamily="18" charset="0"/>
-              </a:rPr>
-              <a:t>utvrditi</a:t>
-            </a:r>
-            <a:r>
-              <a:rPr lang="en-US" sz="1200" dirty="0">
-                <a:latin typeface="Times New Roman" panose="02020603050405020304" pitchFamily="18" charset="0"/>
-                <a:cs typeface="Times New Roman" panose="02020603050405020304" pitchFamily="18" charset="0"/>
-              </a:rPr>
-              <a:t> </a:t>
-            </a:r>
-            <a:r>
-              <a:rPr lang="en-US" sz="1200" dirty="0" err="1">
-                <a:latin typeface="Times New Roman" panose="02020603050405020304" pitchFamily="18" charset="0"/>
-                <a:cs typeface="Times New Roman" panose="02020603050405020304" pitchFamily="18" charset="0"/>
-              </a:rPr>
-              <a:t>djeluju</a:t>
-            </a:r>
-            <a:r>
-              <a:rPr lang="en-US" sz="1200" dirty="0">
-                <a:latin typeface="Times New Roman" panose="02020603050405020304" pitchFamily="18" charset="0"/>
-                <a:cs typeface="Times New Roman" panose="02020603050405020304" pitchFamily="18" charset="0"/>
-              </a:rPr>
-              <a:t> li </a:t>
-            </a:r>
-            <a:r>
-              <a:rPr lang="en-US" sz="1200" dirty="0" err="1">
-                <a:latin typeface="Times New Roman" panose="02020603050405020304" pitchFamily="18" charset="0"/>
-                <a:cs typeface="Times New Roman" panose="02020603050405020304" pitchFamily="18" charset="0"/>
-              </a:rPr>
-              <a:t>ovi</a:t>
-            </a:r>
-            <a:r>
-              <a:rPr lang="en-US" sz="1200" dirty="0">
-                <a:latin typeface="Times New Roman" panose="02020603050405020304" pitchFamily="18" charset="0"/>
-                <a:cs typeface="Times New Roman" panose="02020603050405020304" pitchFamily="18" charset="0"/>
-              </a:rPr>
-              <a:t> </a:t>
-            </a:r>
-            <a:r>
-              <a:rPr lang="en-US" sz="1200" dirty="0" err="1">
-                <a:latin typeface="Times New Roman" panose="02020603050405020304" pitchFamily="18" charset="0"/>
-                <a:cs typeface="Times New Roman" panose="02020603050405020304" pitchFamily="18" charset="0"/>
-              </a:rPr>
-              <a:t>faktori</a:t>
-            </a:r>
-            <a:r>
-              <a:rPr lang="en-US" sz="1200" dirty="0">
-                <a:latin typeface="Times New Roman" panose="02020603050405020304" pitchFamily="18" charset="0"/>
-                <a:cs typeface="Times New Roman" panose="02020603050405020304" pitchFamily="18" charset="0"/>
-              </a:rPr>
-              <a:t> </a:t>
-            </a:r>
-            <a:r>
-              <a:rPr lang="en-US" sz="1200" dirty="0" err="1">
-                <a:latin typeface="Times New Roman" panose="02020603050405020304" pitchFamily="18" charset="0"/>
-                <a:cs typeface="Times New Roman" panose="02020603050405020304" pitchFamily="18" charset="0"/>
-              </a:rPr>
-              <a:t>jednako</a:t>
-            </a:r>
-            <a:r>
-              <a:rPr lang="en-US" sz="1200" dirty="0">
-                <a:latin typeface="Times New Roman" panose="02020603050405020304" pitchFamily="18" charset="0"/>
-                <a:cs typeface="Times New Roman" panose="02020603050405020304" pitchFamily="18" charset="0"/>
-              </a:rPr>
-              <a:t> </a:t>
-            </a:r>
-            <a:r>
-              <a:rPr lang="en-US" sz="1200" dirty="0" err="1">
-                <a:latin typeface="Times New Roman" panose="02020603050405020304" pitchFamily="18" charset="0"/>
-                <a:cs typeface="Times New Roman" panose="02020603050405020304" pitchFamily="18" charset="0"/>
-              </a:rPr>
-              <a:t>na</a:t>
-            </a:r>
-            <a:r>
-              <a:rPr lang="en-US" sz="1200" dirty="0">
-                <a:latin typeface="Times New Roman" panose="02020603050405020304" pitchFamily="18" charset="0"/>
-                <a:cs typeface="Times New Roman" panose="02020603050405020304" pitchFamily="18" charset="0"/>
-              </a:rPr>
-              <a:t> </a:t>
-            </a:r>
-            <a:r>
-              <a:rPr lang="en-US" sz="1200" dirty="0" err="1">
-                <a:latin typeface="Times New Roman" panose="02020603050405020304" pitchFamily="18" charset="0"/>
-                <a:cs typeface="Times New Roman" panose="02020603050405020304" pitchFamily="18" charset="0"/>
-              </a:rPr>
-              <a:t>svim</a:t>
-            </a:r>
-            <a:r>
-              <a:rPr lang="en-US" sz="1200" dirty="0">
-                <a:latin typeface="Times New Roman" panose="02020603050405020304" pitchFamily="18" charset="0"/>
-                <a:cs typeface="Times New Roman" panose="02020603050405020304" pitchFamily="18" charset="0"/>
-              </a:rPr>
-              <a:t> </a:t>
-            </a:r>
-            <a:r>
-              <a:rPr lang="en-US" sz="1200" dirty="0" err="1">
-                <a:latin typeface="Times New Roman" panose="02020603050405020304" pitchFamily="18" charset="0"/>
-                <a:cs typeface="Times New Roman" panose="02020603050405020304" pitchFamily="18" charset="0"/>
-              </a:rPr>
-              <a:t>tržištima</a:t>
-            </a:r>
-            <a:r>
-              <a:rPr lang="en-US" sz="1200" dirty="0">
-                <a:latin typeface="Times New Roman" panose="02020603050405020304" pitchFamily="18" charset="0"/>
-                <a:cs typeface="Times New Roman" panose="02020603050405020304" pitchFamily="18" charset="0"/>
-              </a:rPr>
-              <a:t> </a:t>
-            </a:r>
-            <a:r>
-              <a:rPr lang="en-US" sz="1200" dirty="0" err="1">
-                <a:latin typeface="Times New Roman" panose="02020603050405020304" pitchFamily="18" charset="0"/>
-                <a:cs typeface="Times New Roman" panose="02020603050405020304" pitchFamily="18" charset="0"/>
-              </a:rPr>
-              <a:t>ili</a:t>
-            </a:r>
-            <a:r>
-              <a:rPr lang="en-US" sz="1200" dirty="0">
-                <a:latin typeface="Times New Roman" panose="02020603050405020304" pitchFamily="18" charset="0"/>
-                <a:cs typeface="Times New Roman" panose="02020603050405020304" pitchFamily="18" charset="0"/>
-              </a:rPr>
-              <a:t> </a:t>
-            </a:r>
-            <a:r>
-              <a:rPr lang="en-US" sz="1200" dirty="0" err="1">
-                <a:latin typeface="Times New Roman" panose="02020603050405020304" pitchFamily="18" charset="0"/>
-                <a:cs typeface="Times New Roman" panose="02020603050405020304" pitchFamily="18" charset="0"/>
-              </a:rPr>
-              <a:t>postoje</a:t>
-            </a:r>
-            <a:r>
-              <a:rPr lang="en-US" sz="1200" dirty="0">
-                <a:latin typeface="Times New Roman" panose="02020603050405020304" pitchFamily="18" charset="0"/>
-                <a:cs typeface="Times New Roman" panose="02020603050405020304" pitchFamily="18" charset="0"/>
-              </a:rPr>
-              <a:t> </a:t>
-            </a:r>
-            <a:r>
-              <a:rPr lang="en-US" sz="1200" dirty="0" err="1">
-                <a:latin typeface="Times New Roman" panose="02020603050405020304" pitchFamily="18" charset="0"/>
-                <a:cs typeface="Times New Roman" panose="02020603050405020304" pitchFamily="18" charset="0"/>
-              </a:rPr>
-              <a:t>specifični</a:t>
-            </a:r>
-            <a:r>
-              <a:rPr lang="en-US" sz="1200" dirty="0">
-                <a:latin typeface="Times New Roman" panose="02020603050405020304" pitchFamily="18" charset="0"/>
-                <a:cs typeface="Times New Roman" panose="02020603050405020304" pitchFamily="18" charset="0"/>
-              </a:rPr>
-              <a:t> </a:t>
-            </a:r>
-            <a:r>
-              <a:rPr lang="en-US" sz="1200" dirty="0" err="1">
-                <a:latin typeface="Times New Roman" panose="02020603050405020304" pitchFamily="18" charset="0"/>
-                <a:cs typeface="Times New Roman" panose="02020603050405020304" pitchFamily="18" charset="0"/>
-              </a:rPr>
-              <a:t>lokalni</a:t>
-            </a:r>
-            <a:r>
-              <a:rPr lang="en-US" sz="1200" dirty="0">
-                <a:latin typeface="Times New Roman" panose="02020603050405020304" pitchFamily="18" charset="0"/>
-                <a:cs typeface="Times New Roman" panose="02020603050405020304" pitchFamily="18" charset="0"/>
-              </a:rPr>
-              <a:t> </a:t>
-            </a:r>
-            <a:r>
-              <a:rPr lang="en-US" sz="1200" dirty="0" err="1">
-                <a:latin typeface="Times New Roman" panose="02020603050405020304" pitchFamily="18" charset="0"/>
-                <a:cs typeface="Times New Roman" panose="02020603050405020304" pitchFamily="18" charset="0"/>
-              </a:rPr>
-              <a:t>obrasci</a:t>
-            </a:r>
-            <a:r>
-              <a:rPr lang="en-US" sz="1200" dirty="0">
-                <a:latin typeface="Times New Roman" panose="02020603050405020304" pitchFamily="18" charset="0"/>
-                <a:cs typeface="Times New Roman" panose="02020603050405020304" pitchFamily="18" charset="0"/>
-              </a:rPr>
-              <a:t> koji </a:t>
-            </a:r>
-            <a:r>
-              <a:rPr lang="en-US" sz="1200" dirty="0" err="1">
-                <a:latin typeface="Times New Roman" panose="02020603050405020304" pitchFamily="18" charset="0"/>
-                <a:cs typeface="Times New Roman" panose="02020603050405020304" pitchFamily="18" charset="0"/>
-              </a:rPr>
-              <a:t>mijenjaju</a:t>
-            </a:r>
-            <a:r>
-              <a:rPr lang="en-US" sz="1200" dirty="0">
-                <a:latin typeface="Times New Roman" panose="02020603050405020304" pitchFamily="18" charset="0"/>
-                <a:cs typeface="Times New Roman" panose="02020603050405020304" pitchFamily="18" charset="0"/>
-              </a:rPr>
-              <a:t> </a:t>
-            </a:r>
-            <a:r>
-              <a:rPr lang="en-US" sz="1200" dirty="0" err="1">
-                <a:latin typeface="Times New Roman" panose="02020603050405020304" pitchFamily="18" charset="0"/>
-                <a:cs typeface="Times New Roman" panose="02020603050405020304" pitchFamily="18" charset="0"/>
-              </a:rPr>
-              <a:t>njihovu</a:t>
-            </a:r>
-            <a:r>
-              <a:rPr lang="en-US" sz="1200" dirty="0">
-                <a:latin typeface="Times New Roman" panose="02020603050405020304" pitchFamily="18" charset="0"/>
-                <a:cs typeface="Times New Roman" panose="02020603050405020304" pitchFamily="18" charset="0"/>
-              </a:rPr>
-              <a:t> </a:t>
-            </a:r>
-            <a:r>
-              <a:rPr lang="en-US" sz="1200" dirty="0" err="1">
-                <a:latin typeface="Times New Roman" panose="02020603050405020304" pitchFamily="18" charset="0"/>
-                <a:cs typeface="Times New Roman" panose="02020603050405020304" pitchFamily="18" charset="0"/>
-              </a:rPr>
-              <a:t>važnost</a:t>
-            </a:r>
-            <a:r>
-              <a:rPr lang="en-US" sz="1200" dirty="0">
-                <a:latin typeface="Times New Roman" panose="02020603050405020304" pitchFamily="18" charset="0"/>
-                <a:cs typeface="Times New Roman" panose="02020603050405020304" pitchFamily="18" charset="0"/>
-              </a:rPr>
-              <a:t>.</a:t>
-            </a:r>
-            <a:endParaRPr lang="bs-Latn-BA" sz="1200" dirty="0">
+              <a:t>Istraživanje analizira obrasce formiranja cijena Airbnb smještaja u šest mediteranskih i južnoevropskih gradova: Ateni, Malagi, Istanbulu, Napulju, Rimu i Valenciji. Fokus je na dva važna faktora - geografskoj lokaciji smještaja (centar naspram periferije) i tipu smještaja (cijeli stan/kuća, privatna soba i zajednička soba). Cilj rada je utvrditi djeluju li ovi faktori jednako na svim tržištima ili postoje specifični lokalni obrasci koji mijenjaju njihovu važnost.</a:t>
+            </a:r>
+          </a:p>
+          <a:p>
+            <a:pPr algn="just"/>
+            <a:endParaRPr lang="hr-BA" sz="1200" noProof="1">
               <a:latin typeface="Times New Roman" panose="02020603050405020304" pitchFamily="18" charset="0"/>
               <a:cs typeface="Times New Roman" panose="02020603050405020304" pitchFamily="18" charset="0"/>
             </a:endParaRPr>
           </a:p>
           <a:p>
             <a:pPr algn="just"/>
-            <a:endParaRPr lang="bs-Latn-BA" sz="1200" dirty="0">
+            <a:r>
+              <a:rPr lang="hr-BA" sz="1200" noProof="1">
+                <a:latin typeface="Times New Roman" panose="02020603050405020304" pitchFamily="18" charset="0"/>
+                <a:cs typeface="Times New Roman" panose="02020603050405020304" pitchFamily="18" charset="0"/>
+              </a:rPr>
+              <a:t>Analiza je provedena na uzorku od preko 91.000 Airbnb oglasa preuzetih sa platforme Inside Airbnb za period septembar – oktobar 2025. godine. Korištene su metode deskriptivne statistike, geospacijalne analize, regresijskih modela i klasterizacije kako bi se identifikovali dominantni obrasci cijena i razlike između gradova.</a:t>
+            </a:r>
+          </a:p>
+          <a:p>
+            <a:pPr algn="just"/>
+            <a:endParaRPr lang="hr-BA" sz="1200" noProof="1">
               <a:latin typeface="Times New Roman" panose="02020603050405020304" pitchFamily="18" charset="0"/>
               <a:cs typeface="Times New Roman" panose="02020603050405020304" pitchFamily="18" charset="0"/>
             </a:endParaRPr>
@@ -10335,30 +9477,13 @@
           <a:p>
             <a:pPr algn="just"/>
             <a:r>
-              <a:rPr lang="bs-Latn-BA" sz="1200" dirty="0">
+              <a:rPr lang="hr-BA" sz="1200" noProof="1">
                 <a:latin typeface="Times New Roman" panose="02020603050405020304" pitchFamily="18" charset="0"/>
                 <a:cs typeface="Times New Roman" panose="02020603050405020304" pitchFamily="18" charset="0"/>
               </a:rPr>
-              <a:t>Analiza je provedena na uzorku od preko 91.000 Airbnb oglasa preuzetih sa platforme Inside Airbnb za period septembar – oktobar 2025. godine. Korištene su metode deskriptivne statistike, geospacijalne analize, regresijskih modela i klasterizacije kako bi se identifikovali dominantni obrasci cijena i razlike između gradova.</a:t>
-            </a:r>
-          </a:p>
-          <a:p>
-            <a:pPr algn="just"/>
-            <a:endParaRPr lang="bs-Latn-BA" sz="1200" dirty="0">
-              <a:latin typeface="Times New Roman" panose="02020603050405020304" pitchFamily="18" charset="0"/>
-              <a:cs typeface="Times New Roman" panose="02020603050405020304" pitchFamily="18" charset="0"/>
-            </a:endParaRPr>
-          </a:p>
-          <a:p>
-            <a:pPr algn="just"/>
-            <a:r>
-              <a:rPr lang="bs-Latn-BA" sz="1200" dirty="0">
-                <a:latin typeface="Times New Roman" panose="02020603050405020304" pitchFamily="18" charset="0"/>
-                <a:cs typeface="Times New Roman" panose="02020603050405020304" pitchFamily="18" charset="0"/>
-              </a:rPr>
               <a:t>Rezultati pokazuju da tip smještaja u većini gradova ima jači uticaj na cijenu od same lokacije, dok Rim predstavlja izuzetak u kojem su oba faktora podjednako važna. Istraživanje također otktiva da odnos između udaljenost od centra i cijene nije univerzalan, jer pojedini gradovi poput Istanbula i Napulja pokazuju atipične obrasce formiranja cijena.</a:t>
             </a:r>
-            <a:endParaRPr lang="en-US" sz="1000" dirty="0">
+            <a:endParaRPr lang="hr-BA" sz="1000" noProof="1">
               <a:latin typeface="Times New Roman" panose="02020603050405020304" pitchFamily="18" charset="0"/>
               <a:cs typeface="Times New Roman" panose="02020603050405020304" pitchFamily="18" charset="0"/>
             </a:endParaRPr>
@@ -10406,7 +9531,7 @@
           <a:bodyPr/>
           <a:lstStyle/>
           <a:p>
-            <a:endParaRPr lang="en-US"/>
+            <a:endParaRPr lang="hr-BA" noProof="1"/>
           </a:p>
         </p:txBody>
       </p:sp>
@@ -10444,7 +9569,7 @@
           <a:bodyPr/>
           <a:lstStyle/>
           <a:p>
-            <a:endParaRPr lang="en-US"/>
+            <a:endParaRPr lang="hr-BA" noProof="1"/>
           </a:p>
         </p:txBody>
       </p:sp>
@@ -10479,7 +9604,7 @@
               <a:buNone/>
             </a:pPr>
             <a:r>
-              <a:rPr lang="en-US" sz="1400" b="1" dirty="0">
+              <a:rPr lang="hr-BA" sz="1400" b="1" noProof="1">
                 <a:solidFill>
                   <a:srgbClr val="0891B2"/>
                 </a:solidFill>
@@ -10489,7 +9614,7 @@
               </a:rPr>
               <a:t>DATASET &amp; METODOLOGIJA</a:t>
             </a:r>
-            <a:endParaRPr lang="en-US" sz="1400" dirty="0"/>
+            <a:endParaRPr lang="hr-BA" sz="1400" noProof="1"/>
           </a:p>
         </p:txBody>
       </p:sp>
@@ -10525,7 +9650,7 @@
           <a:bodyPr/>
           <a:lstStyle/>
           <a:p>
-            <a:endParaRPr lang="en-US"/>
+            <a:endParaRPr lang="hr-BA" noProof="1"/>
           </a:p>
         </p:txBody>
       </p:sp>
@@ -10558,7 +9683,7 @@
           <a:p>
             <a:pPr algn="just"/>
             <a:r>
-              <a:rPr lang="bs-Latn-BA" sz="1200" dirty="0">
+              <a:rPr lang="hr-BA" sz="1200" noProof="1">
                 <a:latin typeface="Times New Roman" panose="02020603050405020304" pitchFamily="18" charset="0"/>
                 <a:cs typeface="Times New Roman" panose="02020603050405020304" pitchFamily="18" charset="0"/>
               </a:rPr>
@@ -10567,7 +9692,7 @@
           </a:p>
           <a:p>
             <a:pPr algn="just"/>
-            <a:endParaRPr lang="bs-Latn-BA" sz="1200" dirty="0">
+            <a:endParaRPr lang="hr-BA" sz="1200" noProof="1">
               <a:latin typeface="Times New Roman" panose="02020603050405020304" pitchFamily="18" charset="0"/>
               <a:cs typeface="Times New Roman" panose="02020603050405020304" pitchFamily="18" charset="0"/>
             </a:endParaRPr>
@@ -10575,30 +9700,16 @@
           <a:p>
             <a:pPr algn="just"/>
             <a:r>
-              <a:rPr lang="bs-Latn-BA" sz="1200" dirty="0">
+              <a:rPr lang="hr-BA" sz="1200" noProof="1">
                 <a:latin typeface="Times New Roman" panose="02020603050405020304" pitchFamily="18" charset="0"/>
                 <a:cs typeface="Times New Roman" panose="02020603050405020304" pitchFamily="18" charset="0"/>
               </a:rPr>
-              <a:t>Analizirano je 91.301 oglasa iz šest gradova: Atena, Malaga, Istanbul, Napulj, Rim i Valencia. Korišteni su podaci iz listing.csv i </a:t>
-            </a:r>
-            <a:r>
-              <a:rPr lang="en-US" sz="1200" dirty="0" err="1">
-                <a:latin typeface="Times New Roman" panose="02020603050405020304" pitchFamily="18" charset="0"/>
-                <a:cs typeface="Times New Roman" panose="02020603050405020304" pitchFamily="18" charset="0"/>
-              </a:rPr>
-              <a:t>neighbourhoods.geojson</a:t>
-            </a:r>
-            <a:r>
-              <a:rPr lang="bs-Latn-BA" sz="1200" dirty="0">
-                <a:latin typeface="Times New Roman" panose="02020603050405020304" pitchFamily="18" charset="0"/>
-                <a:cs typeface="Times New Roman" panose="02020603050405020304" pitchFamily="18" charset="0"/>
-              </a:rPr>
-              <a:t> datoteka koje sadrže informacije o cijeni, tipu smještaja, lokaciji, recenzijama i kvartovima.</a:t>
+              <a:t>Analizirano je 91.301 oglasa iz šest gradova: Atena, Malaga, Istanbul, Napulj, Rim i Valencia. Korišteni su podaci iz listings.csv i neighbourhoods.geojson datoteka koje sadrže informacije o cijeni, tipu smještaja, lokaciji, recenzijama i kvartovima.</a:t>
             </a:r>
           </a:p>
           <a:p>
             <a:pPr algn="just"/>
-            <a:endParaRPr lang="bs-Latn-BA" sz="1200" dirty="0">
+            <a:endParaRPr lang="hr-BA" sz="1200" noProof="1">
               <a:latin typeface="Times New Roman" panose="02020603050405020304" pitchFamily="18" charset="0"/>
               <a:cs typeface="Times New Roman" panose="02020603050405020304" pitchFamily="18" charset="0"/>
             </a:endParaRPr>
@@ -10606,16 +9717,16 @@
           <a:p>
             <a:pPr algn="just"/>
             <a:r>
-              <a:rPr lang="bs-Latn-BA" sz="1200" dirty="0">
+              <a:rPr lang="hr-BA" sz="1200" noProof="1">
                 <a:latin typeface="Times New Roman" panose="02020603050405020304" pitchFamily="18" charset="0"/>
                 <a:cs typeface="Times New Roman" panose="02020603050405020304" pitchFamily="18" charset="0"/>
               </a:rPr>
-              <a:t>Ključne varijable uključuju cijenu, tip smještaja, lokaciju/kvart, udaljenost od centra, broj recenzija, ocjene gostiju i kapacitet smještaja (accommodates).</a:t>
+              <a:t>Najvažnije varijable uključuju cijenu, tip smještaja, lokaciju/kvart, udaljenost od centra, broj recenzija, ocjene gostiju i kapacitet smještaja (accommodates).</a:t>
             </a:r>
           </a:p>
           <a:p>
             <a:pPr algn="just"/>
-            <a:endParaRPr lang="bs-Latn-BA" sz="1200" dirty="0">
+            <a:endParaRPr lang="hr-BA" sz="1200" noProof="1">
               <a:latin typeface="Times New Roman" panose="02020603050405020304" pitchFamily="18" charset="0"/>
               <a:cs typeface="Times New Roman" panose="02020603050405020304" pitchFamily="18" charset="0"/>
             </a:endParaRPr>
@@ -10623,16 +9734,16 @@
           <a:p>
             <a:pPr algn="just"/>
             <a:r>
-              <a:rPr lang="bs-Latn-BA" sz="1200" dirty="0">
+              <a:rPr lang="hr-BA" sz="1200" noProof="1">
                 <a:latin typeface="Times New Roman" panose="02020603050405020304" pitchFamily="18" charset="0"/>
                 <a:cs typeface="Times New Roman" panose="02020603050405020304" pitchFamily="18" charset="0"/>
               </a:rPr>
-              <a:t>Preprocesiranje podataka obuhvatilo je uklanjanje nedostajućih vrijednosti i outliera (IQR metoda), konverziju valuta u USD, te računanje udaljenosti smještaja od centra grada korištenjem geografskih koordinata.</a:t>
+              <a:t>Preprocesiranje podataka obuhvatilo je uklanjanje nedostajućih vrijednosti i outliera (IQR metoda), konverziju valuta u USD, kao i računanje udaljenosti smještaja od centra grada korištenjem geografskih koordinata.</a:t>
             </a:r>
           </a:p>
           <a:p>
             <a:pPr algn="just"/>
-            <a:endParaRPr lang="bs-Latn-BA" sz="1200" dirty="0">
+            <a:endParaRPr lang="hr-BA" sz="1200" noProof="1">
               <a:latin typeface="Times New Roman" panose="02020603050405020304" pitchFamily="18" charset="0"/>
               <a:cs typeface="Times New Roman" panose="02020603050405020304" pitchFamily="18" charset="0"/>
             </a:endParaRPr>
@@ -10640,16 +9751,12 @@
           <a:p>
             <a:pPr algn="just"/>
             <a:r>
-              <a:rPr lang="bs-Latn-BA" sz="1200" dirty="0">
+              <a:rPr lang="hr-BA" sz="1200" noProof="1">
                 <a:latin typeface="Times New Roman" panose="02020603050405020304" pitchFamily="18" charset="0"/>
                 <a:cs typeface="Times New Roman" panose="02020603050405020304" pitchFamily="18" charset="0"/>
               </a:rPr>
-              <a:t>Metodološki pristup uključuje deskriptivnu statistiku, geospacijalnu analizu, OLS regresiju, korelacijsku analizu i Kmeans klasterizaciju. Vizualizacije su kreirane pomoću biblioteka Matplotlib, Seaborn, Plotly i Folium, dok su za obradu podataka korišteni pandas i NumPy.</a:t>
-            </a:r>
-            <a:endParaRPr lang="en-US" sz="1200" dirty="0">
-              <a:latin typeface="Times New Roman" panose="02020603050405020304" pitchFamily="18" charset="0"/>
-              <a:cs typeface="Times New Roman" panose="02020603050405020304" pitchFamily="18" charset="0"/>
-            </a:endParaRPr>
+              <a:t>Metodološki pristup uključuje deskriptivnu statistiku, geospacijalnu analizu, OLS regresiju, korelacijsku analizu i KMeans klasterizaciju. Vizualizacije su kreirane pomoću biblioteka Matplotlib, Seaborn, Plotly i Folium, dok su za obradu podataka korišteni pandas i NumPy.</a:t>
+            </a:r>
           </a:p>
         </p:txBody>
       </p:sp>
@@ -10694,7 +9801,7 @@
           <a:bodyPr/>
           <a:lstStyle/>
           <a:p>
-            <a:endParaRPr lang="en-US"/>
+            <a:endParaRPr lang="hr-BA" noProof="1"/>
           </a:p>
         </p:txBody>
       </p:sp>
@@ -10732,7 +9839,7 @@
           <a:bodyPr/>
           <a:lstStyle/>
           <a:p>
-            <a:endParaRPr lang="en-US"/>
+            <a:endParaRPr lang="hr-BA" noProof="1"/>
           </a:p>
         </p:txBody>
       </p:sp>
@@ -10767,7 +9874,7 @@
               <a:buNone/>
             </a:pPr>
             <a:r>
-              <a:rPr lang="en-US" sz="1400" b="1" dirty="0">
+              <a:rPr lang="hr-BA" sz="1400" b="1" noProof="1">
                 <a:solidFill>
                   <a:srgbClr val="0891B2"/>
                 </a:solidFill>
@@ -10777,7 +9884,7 @@
               </a:rPr>
               <a:t>VIZUALIZACIJA PODATAKA</a:t>
             </a:r>
-            <a:endParaRPr lang="en-US" sz="1400" dirty="0"/>
+            <a:endParaRPr lang="hr-BA" sz="1400" noProof="1"/>
           </a:p>
         </p:txBody>
       </p:sp>
@@ -10813,7 +9920,7 @@
           <a:bodyPr/>
           <a:lstStyle/>
           <a:p>
-            <a:endParaRPr lang="en-US"/>
+            <a:endParaRPr lang="hr-BA" noProof="1"/>
           </a:p>
         </p:txBody>
       </p:sp>
@@ -10858,7 +9965,7 @@
           <a:bodyPr/>
           <a:lstStyle/>
           <a:p>
-            <a:endParaRPr lang="en-US"/>
+            <a:endParaRPr lang="hr-BA" noProof="1"/>
           </a:p>
         </p:txBody>
       </p:sp>
@@ -10896,7 +10003,7 @@
           <a:bodyPr/>
           <a:lstStyle/>
           <a:p>
-            <a:endParaRPr lang="en-US"/>
+            <a:endParaRPr lang="hr-BA" noProof="1"/>
           </a:p>
         </p:txBody>
       </p:sp>
@@ -10931,7 +10038,7 @@
               <a:buNone/>
             </a:pPr>
             <a:r>
-              <a:rPr lang="en-US" sz="1400" b="1" dirty="0">
+              <a:rPr lang="hr-BA" sz="1400" b="1" noProof="1">
                 <a:solidFill>
                   <a:srgbClr val="1A2E5A"/>
                 </a:solidFill>
@@ -10941,7 +10048,7 @@
               </a:rPr>
               <a:t>ZAKLJUČAK</a:t>
             </a:r>
-            <a:endParaRPr lang="en-US" sz="1400" dirty="0"/>
+            <a:endParaRPr lang="hr-BA" sz="1400" noProof="1"/>
           </a:p>
         </p:txBody>
       </p:sp>
@@ -10977,7 +10084,7 @@
           <a:bodyPr/>
           <a:lstStyle/>
           <a:p>
-            <a:endParaRPr lang="en-US" dirty="0"/>
+            <a:endParaRPr lang="hr-BA" noProof="1"/>
           </a:p>
         </p:txBody>
       </p:sp>
@@ -11010,7 +10117,7 @@
           <a:p>
             <a:pPr algn="just"/>
             <a:r>
-              <a:rPr lang="bs-Latn-BA" sz="1200" dirty="0">
+              <a:rPr lang="hr-BA" sz="1200" noProof="1">
                 <a:latin typeface="Times New Roman" panose="02020603050405020304" pitchFamily="18" charset="0"/>
                 <a:cs typeface="Times New Roman" panose="02020603050405020304" pitchFamily="18" charset="0"/>
               </a:rPr>
@@ -11019,7 +10126,7 @@
           </a:p>
           <a:p>
             <a:pPr algn="just"/>
-            <a:endParaRPr lang="bs-Latn-BA" sz="1200" dirty="0">
+            <a:endParaRPr lang="hr-BA" sz="1200" noProof="1">
               <a:latin typeface="Times New Roman" panose="02020603050405020304" pitchFamily="18" charset="0"/>
               <a:cs typeface="Times New Roman" panose="02020603050405020304" pitchFamily="18" charset="0"/>
             </a:endParaRPr>
@@ -11027,7 +10134,7 @@
           <a:p>
             <a:pPr algn="just"/>
             <a:r>
-              <a:rPr lang="bs-Latn-BA" sz="1200" dirty="0">
+              <a:rPr lang="hr-BA" sz="1200" noProof="1">
                 <a:latin typeface="Times New Roman" panose="02020603050405020304" pitchFamily="18" charset="0"/>
                 <a:cs typeface="Times New Roman" panose="02020603050405020304" pitchFamily="18" charset="0"/>
               </a:rPr>
@@ -11036,7 +10143,7 @@
           </a:p>
           <a:p>
             <a:pPr algn="just"/>
-            <a:endParaRPr lang="bs-Latn-BA" sz="1200" dirty="0">
+            <a:endParaRPr lang="hr-BA" sz="1200" noProof="1">
               <a:latin typeface="Times New Roman" panose="02020603050405020304" pitchFamily="18" charset="0"/>
               <a:cs typeface="Times New Roman" panose="02020603050405020304" pitchFamily="18" charset="0"/>
             </a:endParaRPr>
@@ -11044,7 +10151,7 @@
           <a:p>
             <a:pPr algn="just"/>
             <a:r>
-              <a:rPr lang="bs-Latn-BA" sz="1200" dirty="0">
+              <a:rPr lang="hr-BA" sz="1200" noProof="1">
                 <a:latin typeface="Times New Roman" panose="02020603050405020304" pitchFamily="18" charset="0"/>
                 <a:cs typeface="Times New Roman" panose="02020603050405020304" pitchFamily="18" charset="0"/>
               </a:rPr>
@@ -11053,7 +10160,7 @@
           </a:p>
           <a:p>
             <a:pPr algn="just"/>
-            <a:endParaRPr lang="bs-Latn-BA" sz="1200" dirty="0">
+            <a:endParaRPr lang="hr-BA" sz="1200" noProof="1">
               <a:latin typeface="Times New Roman" panose="02020603050405020304" pitchFamily="18" charset="0"/>
               <a:cs typeface="Times New Roman" panose="02020603050405020304" pitchFamily="18" charset="0"/>
             </a:endParaRPr>
@@ -11061,20 +10168,16 @@
           <a:p>
             <a:pPr algn="just"/>
             <a:r>
-              <a:rPr lang="pl-PL" sz="1200" dirty="0">
+              <a:rPr lang="hr-BA" sz="1200" noProof="1">
                 <a:latin typeface="Times New Roman" panose="02020603050405020304" pitchFamily="18" charset="0"/>
                 <a:cs typeface="Times New Roman" panose="02020603050405020304" pitchFamily="18" charset="0"/>
               </a:rPr>
-              <a:t>Ograničenje: jedan vremenski presjek podataka. Buduća istraživanja mogu uključiti poređenje Airbnb tržišta sa hotelskim sektorom</a:t>
-            </a:r>
-            <a:endParaRPr lang="bs-Latn-BA" sz="1200" dirty="0">
-              <a:latin typeface="Times New Roman" panose="02020603050405020304" pitchFamily="18" charset="0"/>
-              <a:cs typeface="Times New Roman" panose="02020603050405020304" pitchFamily="18" charset="0"/>
-            </a:endParaRPr>
+              <a:t>Ograničenje: jedan vremenski presjek podataka. Buduća istraživanja mogu uključiti poređenje Airbnb tržišta sa hotelskim sektorom.</a:t>
+            </a:r>
           </a:p>
           <a:p>
             <a:pPr algn="just"/>
-            <a:endParaRPr lang="en-US" sz="1200" dirty="0">
+            <a:endParaRPr lang="hr-BA" sz="1200" noProof="1">
               <a:latin typeface="Times New Roman" panose="02020603050405020304" pitchFamily="18" charset="0"/>
               <a:cs typeface="Times New Roman" panose="02020603050405020304" pitchFamily="18" charset="0"/>
             </a:endParaRPr>
@@ -11122,7 +10225,7 @@
           <a:bodyPr/>
           <a:lstStyle/>
           <a:p>
-            <a:endParaRPr lang="en-US"/>
+            <a:endParaRPr lang="hr-BA" noProof="1"/>
           </a:p>
         </p:txBody>
       </p:sp>
@@ -11160,7 +10263,7 @@
           <a:bodyPr/>
           <a:lstStyle/>
           <a:p>
-            <a:endParaRPr lang="en-US"/>
+            <a:endParaRPr lang="hr-BA" noProof="1"/>
           </a:p>
         </p:txBody>
       </p:sp>
@@ -11195,7 +10298,7 @@
               <a:buNone/>
             </a:pPr>
             <a:r>
-              <a:rPr lang="en-US" sz="1400" b="1" dirty="0">
+              <a:rPr lang="hr-BA" sz="1400" b="1" noProof="1">
                 <a:solidFill>
                   <a:srgbClr val="64748B"/>
                 </a:solidFill>
@@ -11205,7 +10308,7 @@
               </a:rPr>
               <a:t>LITERATURA</a:t>
             </a:r>
-            <a:endParaRPr lang="en-US" sz="1400" dirty="0"/>
+            <a:endParaRPr lang="hr-BA" sz="1400" noProof="1"/>
           </a:p>
         </p:txBody>
       </p:sp>
@@ -11241,7 +10344,7 @@
           <a:bodyPr/>
           <a:lstStyle/>
           <a:p>
-            <a:endParaRPr lang="en-US"/>
+            <a:endParaRPr lang="hr-BA" noProof="1"/>
           </a:p>
         </p:txBody>
       </p:sp>
@@ -11273,7 +10376,7 @@
           <a:lstStyle/>
           <a:p>
             <a:r>
-              <a:rPr lang="hr-BA" sz="1200" kern="100" dirty="0">
+              <a:rPr lang="hr-BA" sz="1200" kern="100" noProof="1">
                 <a:latin typeface="Times New Roman" panose="02020603050405020304" pitchFamily="18" charset="0"/>
                 <a:ea typeface="Aptos"/>
                 <a:cs typeface="Times New Roman" panose="02020603050405020304" pitchFamily="18" charset="0"/>
@@ -11281,7 +10384,7 @@
               <a:t>Inside Airbnb. (2025). </a:t>
             </a:r>
             <a:r>
-              <a:rPr lang="hr-BA" sz="1200" i="1" kern="100" dirty="0">
+              <a:rPr lang="hr-BA" sz="1200" i="1" kern="100" noProof="1">
                 <a:latin typeface="Times New Roman" panose="02020603050405020304" pitchFamily="18" charset="0"/>
                 <a:ea typeface="Aptos"/>
                 <a:cs typeface="Times New Roman" panose="02020603050405020304" pitchFamily="18" charset="0"/>
@@ -11289,7 +10392,7 @@
               <a:t>Listings and Neighbourhood Data</a:t>
             </a:r>
             <a:r>
-              <a:rPr lang="hr-BA" sz="1200" kern="100" dirty="0">
+              <a:rPr lang="hr-BA" sz="1200" kern="100" noProof="1">
                 <a:latin typeface="Times New Roman" panose="02020603050405020304" pitchFamily="18" charset="0"/>
                 <a:ea typeface="Aptos"/>
                 <a:cs typeface="Times New Roman" panose="02020603050405020304" pitchFamily="18" charset="0"/>
@@ -11297,7 +10400,7 @@
               <a:t> [Skup podataka za gradove: Atena (26.09.2025.), Malaga (30.09.2025.), Istanbul (29.09.2025.), Napulj (22.09.2025.), Rim (14.09.2025.) i Valencia (23.09.2025.)]. Preuzeto sa zvanične platforme Inside Airbnb: </a:t>
             </a:r>
             <a:r>
-              <a:rPr lang="hr-BA" sz="1200" u="sng" kern="100" dirty="0">
+              <a:rPr lang="hr-BA" sz="1200" u="sng" kern="100" noProof="1">
                 <a:solidFill>
                   <a:srgbClr val="467886"/>
                 </a:solidFill>
@@ -11309,21 +10412,16 @@
               <a:t>https://insideairbnb.com/get-the-data/</a:t>
             </a:r>
             <a:r>
-              <a:rPr lang="hr-BA" sz="1200" kern="100" dirty="0">
+              <a:rPr lang="hr-BA" sz="1200" kern="100" noProof="1">
                 <a:latin typeface="Times New Roman" panose="02020603050405020304" pitchFamily="18" charset="0"/>
                 <a:ea typeface="Aptos"/>
                 <a:cs typeface="Times New Roman" panose="02020603050405020304" pitchFamily="18" charset="0"/>
               </a:rPr>
               <a:t> [Pristupljeno: maj 2026.].</a:t>
             </a:r>
-            <a:endParaRPr lang="bs-Latn-BA" sz="1200" kern="100" dirty="0">
-              <a:latin typeface="Times New Roman" panose="02020603050405020304" pitchFamily="18" charset="0"/>
-              <a:ea typeface="Aptos"/>
-              <a:cs typeface="Times New Roman" panose="02020603050405020304" pitchFamily="18" charset="0"/>
-            </a:endParaRPr>
-          </a:p>
-          <a:p>
-            <a:endParaRPr lang="en-US" sz="1000" dirty="0"/>
+          </a:p>
+          <a:p>
+            <a:endParaRPr lang="hr-BA" sz="1000" noProof="1"/>
           </a:p>
         </p:txBody>
       </p:sp>
@@ -11434,27 +10532,13 @@
           <a:p>
             <a:pPr algn="ctr"/>
             <a:r>
-              <a:rPr lang="bs-Latn-BA" sz="1000" dirty="0">
+              <a:rPr lang="hr-BA" sz="1000" noProof="1">
                 <a:latin typeface="Times New Roman" panose="02020603050405020304" pitchFamily="18" charset="0"/>
                 <a:cs typeface="Times New Roman" panose="02020603050405020304" pitchFamily="18" charset="0"/>
               </a:rPr>
-              <a:t>Slika 1 – Distribucija cijena </a:t>
-            </a:r>
-            <a:r>
-              <a:rPr lang="bs-Latn-BA" sz="1000" dirty="0" err="1">
-                <a:latin typeface="Times New Roman" panose="02020603050405020304" pitchFamily="18" charset="0"/>
-                <a:cs typeface="Times New Roman" panose="02020603050405020304" pitchFamily="18" charset="0"/>
-              </a:rPr>
-              <a:t>Airbnb</a:t>
-            </a:r>
-            <a:r>
-              <a:rPr lang="bs-Latn-BA" sz="1000" dirty="0">
-                <a:latin typeface="Times New Roman" panose="02020603050405020304" pitchFamily="18" charset="0"/>
-                <a:cs typeface="Times New Roman" panose="02020603050405020304" pitchFamily="18" charset="0"/>
-              </a:rPr>
-              <a:t> smještaja po gradu</a:t>
-            </a:r>
-            <a:endParaRPr lang="en-US" sz="700" dirty="0">
+              <a:t>Slika 1 – Distribucija cijena Airbnb smještaja po gradu</a:t>
+            </a:r>
+            <a:endParaRPr lang="hr-BA" sz="700" noProof="1">
               <a:latin typeface="Times New Roman" panose="02020603050405020304" pitchFamily="18" charset="0"/>
               <a:cs typeface="Times New Roman" panose="02020603050405020304" pitchFamily="18" charset="0"/>
             </a:endParaRPr>
@@ -11490,27 +10574,13 @@
           <a:p>
             <a:pPr algn="ctr"/>
             <a:r>
-              <a:rPr lang="bs-Latn-BA" sz="1000" dirty="0">
+              <a:rPr lang="hr-BA" sz="1000" noProof="1">
                 <a:latin typeface="Times New Roman" panose="02020603050405020304" pitchFamily="18" charset="0"/>
                 <a:cs typeface="Times New Roman" panose="02020603050405020304" pitchFamily="18" charset="0"/>
               </a:rPr>
-              <a:t>Slika 2 – Lokacija </a:t>
-            </a:r>
-            <a:r>
-              <a:rPr lang="bs-Latn-BA" sz="1000" dirty="0" err="1">
-                <a:latin typeface="Times New Roman" panose="02020603050405020304" pitchFamily="18" charset="0"/>
-                <a:cs typeface="Times New Roman" panose="02020603050405020304" pitchFamily="18" charset="0"/>
-              </a:rPr>
-              <a:t>vs</a:t>
-            </a:r>
-            <a:r>
-              <a:rPr lang="bs-Latn-BA" sz="1000" dirty="0">
-                <a:latin typeface="Times New Roman" panose="02020603050405020304" pitchFamily="18" charset="0"/>
-                <a:cs typeface="Times New Roman" panose="02020603050405020304" pitchFamily="18" charset="0"/>
-              </a:rPr>
-              <a:t> tip smještaja</a:t>
-            </a:r>
-            <a:endParaRPr lang="en-US" sz="700" dirty="0">
+              <a:t>Slika 2 – Lokacija vs tip smještaja</a:t>
+            </a:r>
+            <a:endParaRPr lang="hr-BA" sz="700" noProof="1">
               <a:latin typeface="Times New Roman" panose="02020603050405020304" pitchFamily="18" charset="0"/>
               <a:cs typeface="Times New Roman" panose="02020603050405020304" pitchFamily="18" charset="0"/>
             </a:endParaRPr>
